--- a/output/wordlabs-safe-3day.pptx
+++ b/output/wordlabs-safe-3day.pptx
@@ -6040,7 +6040,7 @@
                 <a:ea typeface="Calibri" pitchFamily="34" charset="-122"/>
                 <a:cs typeface="Calibri" pitchFamily="34" charset="-120"/>
               </a:rPr>
-              <a:t>The </a:t>
+              <a:t>It is important to follow </a:t>
             </a:r>
             <a:pPr algn="l" indent="0" marL="0">
               <a:buNone/>
@@ -6071,7 +6071,7 @@
                 <a:ea typeface="Calibri" pitchFamily="34" charset="-122"/>
                 <a:cs typeface="Calibri" pitchFamily="34" charset="-120"/>
               </a:rPr>
-              <a:t> officer checked that all the equipment was stored </a:t>
+              <a:t> rules so that everyone can play </a:t>
             </a:r>
             <a:pPr algn="l" indent="0" marL="0">
               <a:buNone/>
@@ -6102,7 +6102,7 @@
                 <a:ea typeface="Calibri" pitchFamily="34" charset="-122"/>
                 <a:cs typeface="Calibri" pitchFamily="34" charset="-120"/>
               </a:rPr>
-              <a:t> before the trip.</a:t>
+              <a:t> at the park.</a:t>
             </a:r>
             <a:endParaRPr lang="en-US" sz="1800" dirty="0"/>
           </a:p>
@@ -16403,7 +16403,7 @@
                 <a:ea typeface="Trebuchet MS" pitchFamily="34" charset="-122"/>
                 <a:cs typeface="Trebuchet MS" pitchFamily="34" charset="-120"/>
               </a:rPr>
-              <a:t>2</a:t>
+              <a:t>1</a:t>
             </a:r>
             <a:pPr algn="ctr" indent="0" marL="0">
               <a:buNone/>
@@ -16417,7 +16417,7 @@
                 <a:ea typeface="Trebuchet MS" pitchFamily="34" charset="-122"/>
                 <a:cs typeface="Trebuchet MS" pitchFamily="34" charset="-120"/>
               </a:rPr>
-              <a:t>  punctuation marks</a:t>
+              <a:t>  punctuation mark</a:t>
             </a:r>
             <a:endParaRPr lang="en-US" sz="2800" dirty="0"/>
           </a:p>
@@ -16852,7 +16852,7 @@
                 <a:ea typeface="Calibri" pitchFamily="34" charset="-122"/>
                 <a:cs typeface="Calibri" pitchFamily="34" charset="-120"/>
               </a:rPr>
-              <a:t> system worked well, so everyone reached the shelter </a:t>
+              <a:t> on the equipment was checked carefully, but the </a:t>
             </a:r>
             <a:pPr algn="l" indent="0" marL="0">
               <a:buNone/>
@@ -16869,7 +16869,7 @@
                 <a:ea typeface="Calibri" pitchFamily="34" charset="-122"/>
                 <a:cs typeface="Calibri" pitchFamily="34" charset="-120"/>
               </a:rPr>
-              <a:t>safely</a:t>
+              <a:t>unsafe</a:t>
             </a:r>
             <a:pPr algn="l" indent="0" marL="0">
               <a:buNone/>
@@ -16883,7 +16883,7 @@
                 <a:ea typeface="Calibri" pitchFamily="34" charset="-122"/>
                 <a:cs typeface="Calibri" pitchFamily="34" charset="-120"/>
               </a:rPr>
-              <a:t>, and the </a:t>
+              <a:t> ladder still needed fixing before the </a:t>
             </a:r>
             <a:pPr algn="l" indent="0" marL="0">
               <a:buNone/>
@@ -16900,7 +16900,7 @@
                 <a:ea typeface="Calibri" pitchFamily="34" charset="-122"/>
                 <a:cs typeface="Calibri" pitchFamily="34" charset="-120"/>
               </a:rPr>
-              <a:t>unsafe</a:t>
+              <a:t>safest</a:t>
             </a:r>
             <a:pPr algn="l" indent="0" marL="0">
               <a:buNone/>
@@ -16914,7 +16914,7 @@
                 <a:ea typeface="Calibri" pitchFamily="34" charset="-122"/>
                 <a:cs typeface="Calibri" pitchFamily="34" charset="-120"/>
               </a:rPr>
-              <a:t> bridge was closed.</a:t>
+              <a:t> path could be used.</a:t>
             </a:r>
             <a:endParaRPr lang="en-US" sz="1800" dirty="0"/>
           </a:p>
@@ -17197,7 +17197,7 @@
                 <a:ea typeface="Trebuchet MS" pitchFamily="34" charset="-122"/>
                 <a:cs typeface="Trebuchet MS" pitchFamily="34" charset="-120"/>
               </a:rPr>
-              <a:t>safely</a:t>
+              <a:t>unsafe</a:t>
             </a:r>
             <a:endParaRPr lang="en-US" sz="1400" dirty="0"/>
           </a:p>
@@ -17325,7 +17325,7 @@
                 <a:ea typeface="Trebuchet MS" pitchFamily="34" charset="-122"/>
                 <a:cs typeface="Trebuchet MS" pitchFamily="34" charset="-120"/>
               </a:rPr>
-              <a:t>unsafe</a:t>
+              <a:t>safest</a:t>
             </a:r>
             <a:endParaRPr lang="en-US" sz="1400" dirty="0"/>
           </a:p>
@@ -18912,7 +18912,7 @@
                 <a:ea typeface="Calibri" pitchFamily="34" charset="-122"/>
                 <a:cs typeface="Calibri" pitchFamily="34" charset="-120"/>
               </a:rPr>
-              <a:t>to watch over and protect</a:t>
+              <a:t>to watch over or protect</a:t>
             </a:r>
             <a:endParaRPr lang="en-US" sz="850" dirty="0"/>
           </a:p>
@@ -19897,7 +19897,7 @@
                 <a:ea typeface="Calibri" pitchFamily="34" charset="-122"/>
                 <a:cs typeface="Calibri" pitchFamily="34" charset="-120"/>
               </a:rPr>
-              <a:t>to watch over and protect</a:t>
+              <a:t>to watch over or protect</a:t>
             </a:r>
             <a:endParaRPr lang="en-US" sz="850" dirty="0"/>
           </a:p>
@@ -21014,7 +21014,7 @@
                 <a:ea typeface="Calibri" pitchFamily="34" charset="-122"/>
                 <a:cs typeface="Calibri" pitchFamily="34" charset="-120"/>
               </a:rPr>
-              <a:t>to watch over and protect</a:t>
+              <a:t>to watch over or protect</a:t>
             </a:r>
             <a:endParaRPr lang="en-US" sz="850" dirty="0"/>
           </a:p>
@@ -21385,7 +21385,7 @@
         </p:nvSpPr>
         <p:spPr>
           <a:xfrm>
-            <a:off x="2124837" y="4169664"/>
+            <a:off x="2023872" y="4169664"/>
             <a:ext cx="685800" cy="475488"/>
           </a:xfrm>
           <a:prstGeom prst="rect">
@@ -21412,7 +21412,7 @@
         </p:nvSpPr>
         <p:spPr>
           <a:xfrm>
-            <a:off x="2124837" y="4169664"/>
+            <a:off x="2023872" y="4169664"/>
             <a:ext cx="685800" cy="475488"/>
           </a:xfrm>
           <a:prstGeom prst="rect">
@@ -21451,7 +21451,7 @@
         </p:nvSpPr>
         <p:spPr>
           <a:xfrm>
-            <a:off x="3033522" y="4169664"/>
+            <a:off x="2831592" y="4169664"/>
             <a:ext cx="685800" cy="475488"/>
           </a:xfrm>
           <a:prstGeom prst="rect">
@@ -21478,7 +21478,7 @@
         </p:nvSpPr>
         <p:spPr>
           <a:xfrm>
-            <a:off x="3033522" y="4169664"/>
+            <a:off x="2831592" y="4169664"/>
             <a:ext cx="685800" cy="475488"/>
           </a:xfrm>
           <a:prstGeom prst="rect">
@@ -21517,7 +21517,7 @@
         </p:nvSpPr>
         <p:spPr>
           <a:xfrm>
-            <a:off x="3942207" y="4169664"/>
+            <a:off x="3639312" y="4169664"/>
             <a:ext cx="685800" cy="475488"/>
           </a:xfrm>
           <a:prstGeom prst="rect">
@@ -21544,7 +21544,7 @@
         </p:nvSpPr>
         <p:spPr>
           <a:xfrm>
-            <a:off x="3942207" y="4169664"/>
+            <a:off x="3639312" y="4169664"/>
             <a:ext cx="685800" cy="475488"/>
           </a:xfrm>
           <a:prstGeom prst="rect">
@@ -21583,7 +21583,7 @@
         </p:nvSpPr>
         <p:spPr>
           <a:xfrm>
-            <a:off x="4850892" y="4169664"/>
+            <a:off x="4447032" y="4169664"/>
             <a:ext cx="685800" cy="475488"/>
           </a:xfrm>
           <a:prstGeom prst="rect">
@@ -21610,7 +21610,7 @@
         </p:nvSpPr>
         <p:spPr>
           <a:xfrm>
-            <a:off x="4850892" y="4169664"/>
+            <a:off x="4447032" y="4169664"/>
             <a:ext cx="685800" cy="475488"/>
           </a:xfrm>
           <a:prstGeom prst="rect">
@@ -21649,7 +21649,7 @@
         </p:nvSpPr>
         <p:spPr>
           <a:xfrm>
-            <a:off x="5759577" y="4169664"/>
+            <a:off x="5254752" y="4169664"/>
             <a:ext cx="685800" cy="475488"/>
           </a:xfrm>
           <a:prstGeom prst="rect">
@@ -21676,7 +21676,7 @@
         </p:nvSpPr>
         <p:spPr>
           <a:xfrm>
-            <a:off x="5759577" y="4169664"/>
+            <a:off x="5254752" y="4169664"/>
             <a:ext cx="685800" cy="475488"/>
           </a:xfrm>
           <a:prstGeom prst="rect">
@@ -21715,7 +21715,7 @@
         </p:nvSpPr>
         <p:spPr>
           <a:xfrm>
-            <a:off x="6668262" y="4169664"/>
+            <a:off x="6062472" y="4169664"/>
             <a:ext cx="685800" cy="475488"/>
           </a:xfrm>
           <a:prstGeom prst="rect">
@@ -21742,7 +21742,7 @@
         </p:nvSpPr>
         <p:spPr>
           <a:xfrm>
-            <a:off x="6668262" y="4169664"/>
+            <a:off x="6062472" y="4169664"/>
             <a:ext cx="685800" cy="475488"/>
           </a:xfrm>
           <a:prstGeom prst="rect">
@@ -21767,7 +21767,7 @@
                 <a:ea typeface="Trebuchet MS" pitchFamily="34" charset="-122"/>
                 <a:cs typeface="Trebuchet MS" pitchFamily="34" charset="-120"/>
               </a:rPr>
-              <a:t>ar</a:t>
+              <a:t>u</a:t>
             </a:r>
             <a:endParaRPr lang="en-US" sz="900" dirty="0"/>
           </a:p>
@@ -21781,7 +21781,7 @@
         </p:nvSpPr>
         <p:spPr>
           <a:xfrm>
-            <a:off x="7576947" y="4169664"/>
+            <a:off x="6870192" y="4169664"/>
             <a:ext cx="685800" cy="475488"/>
           </a:xfrm>
           <a:prstGeom prst="rect">
@@ -21808,7 +21808,73 @@
         </p:nvSpPr>
         <p:spPr>
           <a:xfrm>
-            <a:off x="7576947" y="4169664"/>
+            <a:off x="6870192" y="4169664"/>
+            <a:ext cx="685800" cy="475488"/>
+          </a:xfrm>
+          <a:prstGeom prst="rect">
+            <a:avLst/>
+          </a:prstGeom>
+          <a:noFill/>
+          <a:ln/>
+        </p:spPr>
+        <p:txBody>
+          <a:bodyPr wrap="square" lIns="0" tIns="0" rIns="0" bIns="0" rtlCol="0" anchor="ctr"/>
+          <a:lstStyle/>
+          <a:p>
+            <a:pPr algn="ctr" indent="0" marL="0">
+              <a:buNone/>
+            </a:pPr>
+            <a:r>
+              <a:rPr lang="en-US" sz="900" b="1" dirty="0">
+                <a:solidFill>
+                  <a:srgbClr val="9D174D"/>
+                </a:solidFill>
+                <a:latin typeface="Trebuchet MS" pitchFamily="34" charset="0"/>
+                <a:ea typeface="Trebuchet MS" pitchFamily="34" charset="-122"/>
+                <a:cs typeface="Trebuchet MS" pitchFamily="34" charset="-120"/>
+              </a:rPr>
+              <a:t>ar</a:t>
+            </a:r>
+            <a:endParaRPr lang="en-US" sz="900" dirty="0"/>
+          </a:p>
+        </p:txBody>
+      </p:sp>
+      <p:sp>
+        <p:nvSpPr>
+          <p:cNvPr id="47" name="Shape 45"/>
+          <p:cNvSpPr/>
+          <p:nvPr/>
+        </p:nvSpPr>
+        <p:spPr>
+          <a:xfrm>
+            <a:off x="7677912" y="4169664"/>
+            <a:ext cx="685800" cy="475488"/>
+          </a:xfrm>
+          <a:prstGeom prst="rect">
+            <a:avLst>
+              <a:gd name="adj" fmla="val 7692"/>
+            </a:avLst>
+          </a:prstGeom>
+          <a:solidFill>
+            <a:srgbClr val="FFFFFF"/>
+          </a:solidFill>
+          <a:ln w="12700">
+            <a:solidFill>
+              <a:srgbClr val="DB2777"/>
+            </a:solidFill>
+            <a:prstDash val="solid"/>
+          </a:ln>
+        </p:spPr>
+      </p:sp>
+      <p:sp>
+        <p:nvSpPr>
+          <p:cNvPr id="48" name="Text 46"/>
+          <p:cNvSpPr/>
+          <p:nvPr/>
+        </p:nvSpPr>
+        <p:spPr>
+          <a:xfrm>
+            <a:off x="7677912" y="4169664"/>
             <a:ext cx="685800" cy="475488"/>
           </a:xfrm>
           <a:prstGeom prst="rect">
@@ -22264,7 +22330,7 @@
                 <a:ea typeface="Trebuchet MS" pitchFamily="34" charset="-122"/>
                 <a:cs typeface="Trebuchet MS" pitchFamily="34" charset="-120"/>
               </a:rPr>
-              <a:t>safely</a:t>
+              <a:t>unsafe</a:t>
             </a:r>
             <a:endParaRPr lang="en-US" sz="2800" dirty="0"/>
           </a:p>
@@ -23091,7 +23157,7 @@
                 <a:ea typeface="Trebuchet MS" pitchFamily="34" charset="-122"/>
                 <a:cs typeface="Trebuchet MS" pitchFamily="34" charset="-120"/>
               </a:rPr>
-              <a:t>safely</a:t>
+              <a:t>unsafe</a:t>
             </a:r>
             <a:endParaRPr lang="en-US" sz="2800" dirty="0"/>
           </a:p>
@@ -23180,11 +23246,11 @@
             </a:avLst>
           </a:prstGeom>
           <a:solidFill>
-            <a:srgbClr val="CCFBF1"/>
+            <a:srgbClr val="DDD6FE"/>
           </a:solidFill>
           <a:ln w="19050">
             <a:solidFill>
-              <a:srgbClr val="0D9488"/>
+              <a:srgbClr val="7C3AED"/>
             </a:solidFill>
             <a:prstDash val="solid"/>
           </a:ln>
@@ -23224,13 +23290,13 @@
             <a:r>
               <a:rPr lang="en-US" sz="1300" b="1" dirty="0">
                 <a:solidFill>
-                  <a:srgbClr val="0F766E"/>
+                  <a:srgbClr val="4C1D95"/>
                 </a:solidFill>
                 <a:latin typeface="Trebuchet MS" pitchFamily="34" charset="0"/>
                 <a:ea typeface="Trebuchet MS" pitchFamily="34" charset="-122"/>
                 <a:cs typeface="Trebuchet MS" pitchFamily="34" charset="-120"/>
               </a:rPr>
-              <a:t>safe</a:t>
+              <a:t>un</a:t>
             </a:r>
             <a:endParaRPr lang="en-US" sz="1300" dirty="0"/>
           </a:p>
@@ -23269,7 +23335,7 @@
                 <a:ea typeface="Calibri" pitchFamily="34" charset="-122"/>
                 <a:cs typeface="Calibri" pitchFamily="34" charset="-120"/>
               </a:rPr>
-              <a:t>free from harm</a:t>
+              <a:t>not</a:t>
             </a:r>
             <a:endParaRPr lang="en-US" sz="850" dirty="0"/>
           </a:p>
@@ -23292,11 +23358,11 @@
             </a:avLst>
           </a:prstGeom>
           <a:solidFill>
-            <a:srgbClr val="FCE7F3"/>
+            <a:srgbClr val="CCFBF1"/>
           </a:solidFill>
           <a:ln w="19050">
             <a:solidFill>
-              <a:srgbClr val="DB2777"/>
+              <a:srgbClr val="0D9488"/>
             </a:solidFill>
             <a:prstDash val="solid"/>
           </a:ln>
@@ -23336,13 +23402,13 @@
             <a:r>
               <a:rPr lang="en-US" sz="1300" b="1" dirty="0">
                 <a:solidFill>
-                  <a:srgbClr val="9D174D"/>
+                  <a:srgbClr val="0F766E"/>
                 </a:solidFill>
                 <a:latin typeface="Trebuchet MS" pitchFamily="34" charset="0"/>
                 <a:ea typeface="Trebuchet MS" pitchFamily="34" charset="-122"/>
                 <a:cs typeface="Trebuchet MS" pitchFamily="34" charset="-120"/>
               </a:rPr>
-              <a:t>ly</a:t>
+              <a:t>safe</a:t>
             </a:r>
             <a:endParaRPr lang="en-US" sz="1300" dirty="0"/>
           </a:p>
@@ -23381,7 +23447,7 @@
                 <a:ea typeface="Calibri" pitchFamily="34" charset="-122"/>
                 <a:cs typeface="Calibri" pitchFamily="34" charset="-120"/>
               </a:rPr>
-              <a:t>in a certain way</a:t>
+              <a:t>free from harm</a:t>
             </a:r>
             <a:endParaRPr lang="en-US" sz="850" dirty="0"/>
           </a:p>
@@ -24795,7 +24861,7 @@
                 <a:ea typeface="Trebuchet MS" pitchFamily="34" charset="-122"/>
                 <a:cs typeface="Trebuchet MS" pitchFamily="34" charset="-120"/>
               </a:rPr>
-              <a:t>safely</a:t>
+              <a:t>unsafe</a:t>
             </a:r>
             <a:endParaRPr lang="en-US" sz="2800" dirty="0"/>
           </a:p>
@@ -24884,11 +24950,11 @@
             </a:avLst>
           </a:prstGeom>
           <a:solidFill>
-            <a:srgbClr val="CCFBF1"/>
+            <a:srgbClr val="DDD6FE"/>
           </a:solidFill>
           <a:ln w="19050">
             <a:solidFill>
-              <a:srgbClr val="0D9488"/>
+              <a:srgbClr val="7C3AED"/>
             </a:solidFill>
             <a:prstDash val="solid"/>
           </a:ln>
@@ -24928,13 +24994,13 @@
             <a:r>
               <a:rPr lang="en-US" sz="1300" b="1" dirty="0">
                 <a:solidFill>
-                  <a:srgbClr val="0F766E"/>
+                  <a:srgbClr val="4C1D95"/>
                 </a:solidFill>
                 <a:latin typeface="Trebuchet MS" pitchFamily="34" charset="0"/>
                 <a:ea typeface="Trebuchet MS" pitchFamily="34" charset="-122"/>
                 <a:cs typeface="Trebuchet MS" pitchFamily="34" charset="-120"/>
               </a:rPr>
-              <a:t>safe</a:t>
+              <a:t>un</a:t>
             </a:r>
             <a:endParaRPr lang="en-US" sz="1300" dirty="0"/>
           </a:p>
@@ -24973,7 +25039,7 @@
                 <a:ea typeface="Calibri" pitchFamily="34" charset="-122"/>
                 <a:cs typeface="Calibri" pitchFamily="34" charset="-120"/>
               </a:rPr>
-              <a:t>free from harm</a:t>
+              <a:t>not</a:t>
             </a:r>
             <a:endParaRPr lang="en-US" sz="850" dirty="0"/>
           </a:p>
@@ -24996,11 +25062,11 @@
             </a:avLst>
           </a:prstGeom>
           <a:solidFill>
-            <a:srgbClr val="FCE7F3"/>
+            <a:srgbClr val="CCFBF1"/>
           </a:solidFill>
           <a:ln w="19050">
             <a:solidFill>
-              <a:srgbClr val="DB2777"/>
+              <a:srgbClr val="0D9488"/>
             </a:solidFill>
             <a:prstDash val="solid"/>
           </a:ln>
@@ -25040,13 +25106,13 @@
             <a:r>
               <a:rPr lang="en-US" sz="1300" b="1" dirty="0">
                 <a:solidFill>
-                  <a:srgbClr val="9D174D"/>
+                  <a:srgbClr val="0F766E"/>
                 </a:solidFill>
                 <a:latin typeface="Trebuchet MS" pitchFamily="34" charset="0"/>
                 <a:ea typeface="Trebuchet MS" pitchFamily="34" charset="-122"/>
                 <a:cs typeface="Trebuchet MS" pitchFamily="34" charset="-120"/>
               </a:rPr>
-              <a:t>ly</a:t>
+              <a:t>safe</a:t>
             </a:r>
             <a:endParaRPr lang="en-US" sz="1300" dirty="0"/>
           </a:p>
@@ -25085,7 +25151,7 @@
                 <a:ea typeface="Calibri" pitchFamily="34" charset="-122"/>
                 <a:cs typeface="Calibri" pitchFamily="34" charset="-120"/>
               </a:rPr>
-              <a:t>in a certain way</a:t>
+              <a:t>free from harm</a:t>
             </a:r>
             <a:endParaRPr lang="en-US" sz="850" dirty="0"/>
           </a:p>
@@ -25244,7 +25310,7 @@
                 <a:ea typeface="Trebuchet MS" pitchFamily="34" charset="-122"/>
                 <a:cs typeface="Trebuchet MS" pitchFamily="34" charset="-120"/>
               </a:rPr>
-              <a:t>safe</a:t>
+              <a:t>un</a:t>
             </a:r>
             <a:endParaRPr lang="en-US" sz="1400" dirty="0"/>
           </a:p>
@@ -25349,7 +25415,7 @@
                 <a:ea typeface="Trebuchet MS" pitchFamily="34" charset="-122"/>
                 <a:cs typeface="Trebuchet MS" pitchFamily="34" charset="-120"/>
               </a:rPr>
-              <a:t>ly</a:t>
+              <a:t>safe</a:t>
             </a:r>
             <a:endParaRPr lang="en-US" sz="1400" dirty="0"/>
           </a:p>
@@ -25912,7 +25978,7 @@
                 <a:ea typeface="Trebuchet MS" pitchFamily="34" charset="-122"/>
                 <a:cs typeface="Trebuchet MS" pitchFamily="34" charset="-120"/>
               </a:rPr>
-              <a:t>safely</a:t>
+              <a:t>unsafe</a:t>
             </a:r>
             <a:endParaRPr lang="en-US" sz="2800" dirty="0"/>
           </a:p>
@@ -26001,11 +26067,11 @@
             </a:avLst>
           </a:prstGeom>
           <a:solidFill>
-            <a:srgbClr val="CCFBF1"/>
+            <a:srgbClr val="DDD6FE"/>
           </a:solidFill>
           <a:ln w="19050">
             <a:solidFill>
-              <a:srgbClr val="0D9488"/>
+              <a:srgbClr val="7C3AED"/>
             </a:solidFill>
             <a:prstDash val="solid"/>
           </a:ln>
@@ -26045,13 +26111,13 @@
             <a:r>
               <a:rPr lang="en-US" sz="1300" b="1" dirty="0">
                 <a:solidFill>
-                  <a:srgbClr val="0F766E"/>
+                  <a:srgbClr val="4C1D95"/>
                 </a:solidFill>
                 <a:latin typeface="Trebuchet MS" pitchFamily="34" charset="0"/>
                 <a:ea typeface="Trebuchet MS" pitchFamily="34" charset="-122"/>
                 <a:cs typeface="Trebuchet MS" pitchFamily="34" charset="-120"/>
               </a:rPr>
-              <a:t>safe</a:t>
+              <a:t>un</a:t>
             </a:r>
             <a:endParaRPr lang="en-US" sz="1300" dirty="0"/>
           </a:p>
@@ -26090,7 +26156,7 @@
                 <a:ea typeface="Calibri" pitchFamily="34" charset="-122"/>
                 <a:cs typeface="Calibri" pitchFamily="34" charset="-120"/>
               </a:rPr>
-              <a:t>free from harm</a:t>
+              <a:t>not</a:t>
             </a:r>
             <a:endParaRPr lang="en-US" sz="850" dirty="0"/>
           </a:p>
@@ -26113,11 +26179,11 @@
             </a:avLst>
           </a:prstGeom>
           <a:solidFill>
-            <a:srgbClr val="FCE7F3"/>
+            <a:srgbClr val="CCFBF1"/>
           </a:solidFill>
           <a:ln w="19050">
             <a:solidFill>
-              <a:srgbClr val="DB2777"/>
+              <a:srgbClr val="0D9488"/>
             </a:solidFill>
             <a:prstDash val="solid"/>
           </a:ln>
@@ -26157,13 +26223,13 @@
             <a:r>
               <a:rPr lang="en-US" sz="1300" b="1" dirty="0">
                 <a:solidFill>
-                  <a:srgbClr val="9D174D"/>
+                  <a:srgbClr val="0F766E"/>
                 </a:solidFill>
                 <a:latin typeface="Trebuchet MS" pitchFamily="34" charset="0"/>
                 <a:ea typeface="Trebuchet MS" pitchFamily="34" charset="-122"/>
                 <a:cs typeface="Trebuchet MS" pitchFamily="34" charset="-120"/>
               </a:rPr>
-              <a:t>ly</a:t>
+              <a:t>safe</a:t>
             </a:r>
             <a:endParaRPr lang="en-US" sz="1300" dirty="0"/>
           </a:p>
@@ -26202,7 +26268,7 @@
                 <a:ea typeface="Calibri" pitchFamily="34" charset="-122"/>
                 <a:cs typeface="Calibri" pitchFamily="34" charset="-120"/>
               </a:rPr>
-              <a:t>in a certain way</a:t>
+              <a:t>free from harm</a:t>
             </a:r>
             <a:endParaRPr lang="en-US" sz="850" dirty="0"/>
           </a:p>
@@ -26361,7 +26427,7 @@
                 <a:ea typeface="Trebuchet MS" pitchFamily="34" charset="-122"/>
                 <a:cs typeface="Trebuchet MS" pitchFamily="34" charset="-120"/>
               </a:rPr>
-              <a:t>safe</a:t>
+              <a:t>un</a:t>
             </a:r>
             <a:endParaRPr lang="en-US" sz="1400" dirty="0"/>
           </a:p>
@@ -26466,7 +26532,7 @@
                 <a:ea typeface="Trebuchet MS" pitchFamily="34" charset="-122"/>
                 <a:cs typeface="Trebuchet MS" pitchFamily="34" charset="-120"/>
               </a:rPr>
-              <a:t>ly</a:t>
+              <a:t>safe</a:t>
             </a:r>
             <a:endParaRPr lang="en-US" sz="1400" dirty="0"/>
           </a:p>
@@ -26625,7 +26691,7 @@
                 <a:ea typeface="Trebuchet MS" pitchFamily="34" charset="-122"/>
                 <a:cs typeface="Trebuchet MS" pitchFamily="34" charset="-120"/>
               </a:rPr>
-              <a:t>s</a:t>
+              <a:t>u</a:t>
             </a:r>
             <a:endParaRPr lang="en-US" sz="900" dirty="0"/>
           </a:p>
@@ -26691,7 +26757,7 @@
                 <a:ea typeface="Trebuchet MS" pitchFamily="34" charset="-122"/>
                 <a:cs typeface="Trebuchet MS" pitchFamily="34" charset="-120"/>
               </a:rPr>
-              <a:t>a</a:t>
+              <a:t>n</a:t>
             </a:r>
             <a:endParaRPr lang="en-US" sz="900" dirty="0"/>
           </a:p>
@@ -26757,7 +26823,7 @@
                 <a:ea typeface="Trebuchet MS" pitchFamily="34" charset="-122"/>
                 <a:cs typeface="Trebuchet MS" pitchFamily="34" charset="-120"/>
               </a:rPr>
-              <a:t>f</a:t>
+              <a:t>s</a:t>
             </a:r>
             <a:endParaRPr lang="en-US" sz="900" dirty="0"/>
           </a:p>
@@ -26823,7 +26889,7 @@
                 <a:ea typeface="Trebuchet MS" pitchFamily="34" charset="-122"/>
                 <a:cs typeface="Trebuchet MS" pitchFamily="34" charset="-120"/>
               </a:rPr>
-              <a:t>e</a:t>
+              <a:t>a</a:t>
             </a:r>
             <a:endParaRPr lang="en-US" sz="900" dirty="0"/>
           </a:p>
@@ -26889,7 +26955,7 @@
                 <a:ea typeface="Trebuchet MS" pitchFamily="34" charset="-122"/>
                 <a:cs typeface="Trebuchet MS" pitchFamily="34" charset="-120"/>
               </a:rPr>
-              <a:t>l</a:t>
+              <a:t>f</a:t>
             </a:r>
             <a:endParaRPr lang="en-US" sz="900" dirty="0"/>
           </a:p>
@@ -26955,7 +27021,7 @@
                 <a:ea typeface="Trebuchet MS" pitchFamily="34" charset="-122"/>
                 <a:cs typeface="Trebuchet MS" pitchFamily="34" charset="-120"/>
               </a:rPr>
-              <a:t>y</a:t>
+              <a:t>e</a:t>
             </a:r>
             <a:endParaRPr lang="en-US" sz="900" dirty="0"/>
           </a:p>
@@ -27386,7 +27452,7 @@
                 <a:ea typeface="Trebuchet MS" pitchFamily="34" charset="-122"/>
                 <a:cs typeface="Trebuchet MS" pitchFamily="34" charset="-120"/>
               </a:rPr>
-              <a:t>unsafe</a:t>
+              <a:t>safest</a:t>
             </a:r>
             <a:endParaRPr lang="en-US" sz="2800" dirty="0"/>
           </a:p>
@@ -28213,7 +28279,7 @@
                 <a:ea typeface="Trebuchet MS" pitchFamily="34" charset="-122"/>
                 <a:cs typeface="Trebuchet MS" pitchFamily="34" charset="-120"/>
               </a:rPr>
-              <a:t>unsafe</a:t>
+              <a:t>safest</a:t>
             </a:r>
             <a:endParaRPr lang="en-US" sz="2800" dirty="0"/>
           </a:p>
@@ -28302,11 +28368,11 @@
             </a:avLst>
           </a:prstGeom>
           <a:solidFill>
-            <a:srgbClr val="DDD6FE"/>
+            <a:srgbClr val="CCFBF1"/>
           </a:solidFill>
           <a:ln w="19050">
             <a:solidFill>
-              <a:srgbClr val="7C3AED"/>
+              <a:srgbClr val="0D9488"/>
             </a:solidFill>
             <a:prstDash val="solid"/>
           </a:ln>
@@ -28346,13 +28412,13 @@
             <a:r>
               <a:rPr lang="en-US" sz="1300" b="1" dirty="0">
                 <a:solidFill>
-                  <a:srgbClr val="4C1D95"/>
+                  <a:srgbClr val="0F766E"/>
                 </a:solidFill>
                 <a:latin typeface="Trebuchet MS" pitchFamily="34" charset="0"/>
                 <a:ea typeface="Trebuchet MS" pitchFamily="34" charset="-122"/>
                 <a:cs typeface="Trebuchet MS" pitchFamily="34" charset="-120"/>
               </a:rPr>
-              <a:t>un</a:t>
+              <a:t>safe</a:t>
             </a:r>
             <a:endParaRPr lang="en-US" sz="1300" dirty="0"/>
           </a:p>
@@ -28391,7 +28457,7 @@
                 <a:ea typeface="Calibri" pitchFamily="34" charset="-122"/>
                 <a:cs typeface="Calibri" pitchFamily="34" charset="-120"/>
               </a:rPr>
-              <a:t>not</a:t>
+              <a:t>free from harm</a:t>
             </a:r>
             <a:endParaRPr lang="en-US" sz="850" dirty="0"/>
           </a:p>
@@ -28414,11 +28480,11 @@
             </a:avLst>
           </a:prstGeom>
           <a:solidFill>
-            <a:srgbClr val="CCFBF1"/>
+            <a:srgbClr val="FCE7F3"/>
           </a:solidFill>
           <a:ln w="19050">
             <a:solidFill>
-              <a:srgbClr val="0D9488"/>
+              <a:srgbClr val="DB2777"/>
             </a:solidFill>
             <a:prstDash val="solid"/>
           </a:ln>
@@ -28458,13 +28524,13 @@
             <a:r>
               <a:rPr lang="en-US" sz="1300" b="1" dirty="0">
                 <a:solidFill>
-                  <a:srgbClr val="0F766E"/>
+                  <a:srgbClr val="9D174D"/>
                 </a:solidFill>
                 <a:latin typeface="Trebuchet MS" pitchFamily="34" charset="0"/>
                 <a:ea typeface="Trebuchet MS" pitchFamily="34" charset="-122"/>
                 <a:cs typeface="Trebuchet MS" pitchFamily="34" charset="-120"/>
               </a:rPr>
-              <a:t>safe</a:t>
+              <a:t>st</a:t>
             </a:r>
             <a:endParaRPr lang="en-US" sz="1300" dirty="0"/>
           </a:p>
@@ -28503,7 +28569,7 @@
                 <a:ea typeface="Calibri" pitchFamily="34" charset="-122"/>
                 <a:cs typeface="Calibri" pitchFamily="34" charset="-120"/>
               </a:rPr>
-              <a:t>free from harm</a:t>
+              <a:t>most (superlative)</a:t>
             </a:r>
             <a:endParaRPr lang="en-US" sz="850" dirty="0"/>
           </a:p>
@@ -29198,7 +29264,7 @@
                 <a:ea typeface="Trebuchet MS" pitchFamily="34" charset="-122"/>
                 <a:cs typeface="Trebuchet MS" pitchFamily="34" charset="-120"/>
               </a:rPr>
-              <a:t>unsafe</a:t>
+              <a:t>safest</a:t>
             </a:r>
             <a:endParaRPr lang="en-US" sz="2800" dirty="0"/>
           </a:p>
@@ -29287,11 +29353,11 @@
             </a:avLst>
           </a:prstGeom>
           <a:solidFill>
-            <a:srgbClr val="DDD6FE"/>
+            <a:srgbClr val="CCFBF1"/>
           </a:solidFill>
           <a:ln w="19050">
             <a:solidFill>
-              <a:srgbClr val="7C3AED"/>
+              <a:srgbClr val="0D9488"/>
             </a:solidFill>
             <a:prstDash val="solid"/>
           </a:ln>
@@ -29331,13 +29397,13 @@
             <a:r>
               <a:rPr lang="en-US" sz="1300" b="1" dirty="0">
                 <a:solidFill>
-                  <a:srgbClr val="4C1D95"/>
+                  <a:srgbClr val="0F766E"/>
                 </a:solidFill>
                 <a:latin typeface="Trebuchet MS" pitchFamily="34" charset="0"/>
                 <a:ea typeface="Trebuchet MS" pitchFamily="34" charset="-122"/>
                 <a:cs typeface="Trebuchet MS" pitchFamily="34" charset="-120"/>
               </a:rPr>
-              <a:t>un</a:t>
+              <a:t>safe</a:t>
             </a:r>
             <a:endParaRPr lang="en-US" sz="1300" dirty="0"/>
           </a:p>
@@ -29376,7 +29442,7 @@
                 <a:ea typeface="Calibri" pitchFamily="34" charset="-122"/>
                 <a:cs typeface="Calibri" pitchFamily="34" charset="-120"/>
               </a:rPr>
-              <a:t>not</a:t>
+              <a:t>free from harm</a:t>
             </a:r>
             <a:endParaRPr lang="en-US" sz="850" dirty="0"/>
           </a:p>
@@ -29399,11 +29465,11 @@
             </a:avLst>
           </a:prstGeom>
           <a:solidFill>
-            <a:srgbClr val="CCFBF1"/>
+            <a:srgbClr val="FCE7F3"/>
           </a:solidFill>
           <a:ln w="19050">
             <a:solidFill>
-              <a:srgbClr val="0D9488"/>
+              <a:srgbClr val="DB2777"/>
             </a:solidFill>
             <a:prstDash val="solid"/>
           </a:ln>
@@ -29443,13 +29509,13 @@
             <a:r>
               <a:rPr lang="en-US" sz="1300" b="1" dirty="0">
                 <a:solidFill>
-                  <a:srgbClr val="0F766E"/>
+                  <a:srgbClr val="9D174D"/>
                 </a:solidFill>
                 <a:latin typeface="Trebuchet MS" pitchFamily="34" charset="0"/>
                 <a:ea typeface="Trebuchet MS" pitchFamily="34" charset="-122"/>
                 <a:cs typeface="Trebuchet MS" pitchFamily="34" charset="-120"/>
               </a:rPr>
-              <a:t>safe</a:t>
+              <a:t>st</a:t>
             </a:r>
             <a:endParaRPr lang="en-US" sz="1300" dirty="0"/>
           </a:p>
@@ -29488,7 +29554,7 @@
                 <a:ea typeface="Calibri" pitchFamily="34" charset="-122"/>
                 <a:cs typeface="Calibri" pitchFamily="34" charset="-120"/>
               </a:rPr>
-              <a:t>free from harm</a:t>
+              <a:t>most (superlative)</a:t>
             </a:r>
             <a:endParaRPr lang="en-US" sz="850" dirty="0"/>
           </a:p>
@@ -29647,7 +29713,7 @@
                 <a:ea typeface="Trebuchet MS" pitchFamily="34" charset="-122"/>
                 <a:cs typeface="Trebuchet MS" pitchFamily="34" charset="-120"/>
               </a:rPr>
-              <a:t>un</a:t>
+              <a:t>saf</a:t>
             </a:r>
             <a:endParaRPr lang="en-US" sz="1400" dirty="0"/>
           </a:p>
@@ -29752,7 +29818,7 @@
                 <a:ea typeface="Trebuchet MS" pitchFamily="34" charset="-122"/>
                 <a:cs typeface="Trebuchet MS" pitchFamily="34" charset="-120"/>
               </a:rPr>
-              <a:t>safe</a:t>
+              <a:t>est</a:t>
             </a:r>
             <a:endParaRPr lang="en-US" sz="1400" dirty="0"/>
           </a:p>
@@ -30315,7 +30381,7 @@
                 <a:ea typeface="Trebuchet MS" pitchFamily="34" charset="-122"/>
                 <a:cs typeface="Trebuchet MS" pitchFamily="34" charset="-120"/>
               </a:rPr>
-              <a:t>unsafe</a:t>
+              <a:t>safest</a:t>
             </a:r>
             <a:endParaRPr lang="en-US" sz="2800" dirty="0"/>
           </a:p>
@@ -30404,11 +30470,11 @@
             </a:avLst>
           </a:prstGeom>
           <a:solidFill>
-            <a:srgbClr val="DDD6FE"/>
+            <a:srgbClr val="CCFBF1"/>
           </a:solidFill>
           <a:ln w="19050">
             <a:solidFill>
-              <a:srgbClr val="7C3AED"/>
+              <a:srgbClr val="0D9488"/>
             </a:solidFill>
             <a:prstDash val="solid"/>
           </a:ln>
@@ -30448,13 +30514,13 @@
             <a:r>
               <a:rPr lang="en-US" sz="1300" b="1" dirty="0">
                 <a:solidFill>
-                  <a:srgbClr val="4C1D95"/>
+                  <a:srgbClr val="0F766E"/>
                 </a:solidFill>
                 <a:latin typeface="Trebuchet MS" pitchFamily="34" charset="0"/>
                 <a:ea typeface="Trebuchet MS" pitchFamily="34" charset="-122"/>
                 <a:cs typeface="Trebuchet MS" pitchFamily="34" charset="-120"/>
               </a:rPr>
-              <a:t>un</a:t>
+              <a:t>safe</a:t>
             </a:r>
             <a:endParaRPr lang="en-US" sz="1300" dirty="0"/>
           </a:p>
@@ -30493,7 +30559,7 @@
                 <a:ea typeface="Calibri" pitchFamily="34" charset="-122"/>
                 <a:cs typeface="Calibri" pitchFamily="34" charset="-120"/>
               </a:rPr>
-              <a:t>not</a:t>
+              <a:t>free from harm</a:t>
             </a:r>
             <a:endParaRPr lang="en-US" sz="850" dirty="0"/>
           </a:p>
@@ -30516,11 +30582,11 @@
             </a:avLst>
           </a:prstGeom>
           <a:solidFill>
-            <a:srgbClr val="CCFBF1"/>
+            <a:srgbClr val="FCE7F3"/>
           </a:solidFill>
           <a:ln w="19050">
             <a:solidFill>
-              <a:srgbClr val="0D9488"/>
+              <a:srgbClr val="DB2777"/>
             </a:solidFill>
             <a:prstDash val="solid"/>
           </a:ln>
@@ -30560,13 +30626,13 @@
             <a:r>
               <a:rPr lang="en-US" sz="1300" b="1" dirty="0">
                 <a:solidFill>
-                  <a:srgbClr val="0F766E"/>
+                  <a:srgbClr val="9D174D"/>
                 </a:solidFill>
                 <a:latin typeface="Trebuchet MS" pitchFamily="34" charset="0"/>
                 <a:ea typeface="Trebuchet MS" pitchFamily="34" charset="-122"/>
                 <a:cs typeface="Trebuchet MS" pitchFamily="34" charset="-120"/>
               </a:rPr>
-              <a:t>safe</a:t>
+              <a:t>st</a:t>
             </a:r>
             <a:endParaRPr lang="en-US" sz="1300" dirty="0"/>
           </a:p>
@@ -30605,7 +30671,7 @@
                 <a:ea typeface="Calibri" pitchFamily="34" charset="-122"/>
                 <a:cs typeface="Calibri" pitchFamily="34" charset="-120"/>
               </a:rPr>
-              <a:t>free from harm</a:t>
+              <a:t>most (superlative)</a:t>
             </a:r>
             <a:endParaRPr lang="en-US" sz="850" dirty="0"/>
           </a:p>
@@ -30764,7 +30830,7 @@
                 <a:ea typeface="Trebuchet MS" pitchFamily="34" charset="-122"/>
                 <a:cs typeface="Trebuchet MS" pitchFamily="34" charset="-120"/>
               </a:rPr>
-              <a:t>un</a:t>
+              <a:t>saf</a:t>
             </a:r>
             <a:endParaRPr lang="en-US" sz="1400" dirty="0"/>
           </a:p>
@@ -30869,7 +30935,7 @@
                 <a:ea typeface="Trebuchet MS" pitchFamily="34" charset="-122"/>
                 <a:cs typeface="Trebuchet MS" pitchFamily="34" charset="-120"/>
               </a:rPr>
-              <a:t>safe</a:t>
+              <a:t>est</a:t>
             </a:r>
             <a:endParaRPr lang="en-US" sz="1400" dirty="0"/>
           </a:p>
@@ -31028,7 +31094,7 @@
                 <a:ea typeface="Trebuchet MS" pitchFamily="34" charset="-122"/>
                 <a:cs typeface="Trebuchet MS" pitchFamily="34" charset="-120"/>
               </a:rPr>
-              <a:t>u</a:t>
+              <a:t>s</a:t>
             </a:r>
             <a:endParaRPr lang="en-US" sz="900" dirty="0"/>
           </a:p>
@@ -31094,7 +31160,7 @@
                 <a:ea typeface="Trebuchet MS" pitchFamily="34" charset="-122"/>
                 <a:cs typeface="Trebuchet MS" pitchFamily="34" charset="-120"/>
               </a:rPr>
-              <a:t>n</a:t>
+              <a:t>a</a:t>
             </a:r>
             <a:endParaRPr lang="en-US" sz="900" dirty="0"/>
           </a:p>
@@ -31160,7 +31226,7 @@
                 <a:ea typeface="Trebuchet MS" pitchFamily="34" charset="-122"/>
                 <a:cs typeface="Trebuchet MS" pitchFamily="34" charset="-120"/>
               </a:rPr>
-              <a:t>s</a:t>
+              <a:t>f</a:t>
             </a:r>
             <a:endParaRPr lang="en-US" sz="900" dirty="0"/>
           </a:p>
@@ -31226,7 +31292,7 @@
                 <a:ea typeface="Trebuchet MS" pitchFamily="34" charset="-122"/>
                 <a:cs typeface="Trebuchet MS" pitchFamily="34" charset="-120"/>
               </a:rPr>
-              <a:t>a</a:t>
+              <a:t>e</a:t>
             </a:r>
             <a:endParaRPr lang="en-US" sz="900" dirty="0"/>
           </a:p>
@@ -31292,7 +31358,7 @@
                 <a:ea typeface="Trebuchet MS" pitchFamily="34" charset="-122"/>
                 <a:cs typeface="Trebuchet MS" pitchFamily="34" charset="-120"/>
               </a:rPr>
-              <a:t>f</a:t>
+              <a:t>s</a:t>
             </a:r>
             <a:endParaRPr lang="en-US" sz="900" dirty="0"/>
           </a:p>
@@ -31358,7 +31424,7 @@
                 <a:ea typeface="Trebuchet MS" pitchFamily="34" charset="-122"/>
                 <a:cs typeface="Trebuchet MS" pitchFamily="34" charset="-120"/>
               </a:rPr>
-              <a:t>e</a:t>
+              <a:t>t</a:t>
             </a:r>
             <a:endParaRPr lang="en-US" sz="900" dirty="0"/>
           </a:p>
@@ -33465,7 +33531,7 @@
                 <a:ea typeface="Trebuchet MS" pitchFamily="34" charset="-122"/>
                 <a:cs typeface="Trebuchet MS" pitchFamily="34" charset="-120"/>
               </a:rPr>
-              <a:t>fail-</a:t>
+              <a:t>fire-</a:t>
             </a:r>
             <a:endParaRPr lang="en-US" sz="1300" dirty="0"/>
           </a:p>
@@ -33618,7 +33684,7 @@
                 <a:ea typeface="Trebuchet MS" pitchFamily="34" charset="-122"/>
                 <a:cs typeface="Trebuchet MS" pitchFamily="34" charset="-120"/>
               </a:rPr>
-              <a:t>crash-</a:t>
+              <a:t>food-</a:t>
             </a:r>
             <a:endParaRPr lang="en-US" sz="1300" dirty="0"/>
           </a:p>
@@ -33771,7 +33837,7 @@
                 <a:ea typeface="Trebuchet MS" pitchFamily="34" charset="-122"/>
                 <a:cs typeface="Trebuchet MS" pitchFamily="34" charset="-120"/>
               </a:rPr>
-              <a:t>tamper-</a:t>
+              <a:t>child-</a:t>
             </a:r>
             <a:endParaRPr lang="en-US" sz="1300" dirty="0"/>
           </a:p>
@@ -34427,7 +34493,7 @@
                 <a:ea typeface="Trebuchet MS" pitchFamily="34" charset="-122"/>
                 <a:cs typeface="Trebuchet MS" pitchFamily="34" charset="-120"/>
               </a:rPr>
-              <a:t>failsafe</a:t>
+              <a:t>safecracker</a:t>
             </a:r>
             <a:endParaRPr lang="en-US" sz="1200" dirty="0"/>
           </a:p>
@@ -35615,7 +35681,7 @@
                 <a:ea typeface="Calibri" pitchFamily="34" charset="-122"/>
                 <a:cs typeface="Calibri" pitchFamily="34" charset="-120"/>
               </a:rPr>
-              <a:t>1.  The word 'safely' is made by adding the suffix '-ly' to the base word 'safe'.</a:t>
+              <a:t>1.  Adding '-ly' to 'safe' changes it into a noun.</a:t>
             </a:r>
             <a:endParaRPr lang="en-US" sz="1300" dirty="0"/>
           </a:p>
@@ -35638,11 +35704,11 @@
             </a:avLst>
           </a:prstGeom>
           <a:solidFill>
-            <a:srgbClr val="DCFCE7"/>
-          </a:solidFill>
-          <a:ln w="12700">
-            <a:solidFill>
-              <a:srgbClr val="16A34A"/>
+            <a:srgbClr val="FEE2E2"/>
+          </a:solidFill>
+          <a:ln w="12700">
+            <a:solidFill>
+              <a:srgbClr val="DC2626"/>
             </a:solidFill>
             <a:prstDash val="solid"/>
           </a:ln>
@@ -35675,13 +35741,13 @@
             <a:r>
               <a:rPr lang="en-US" sz="1100" b="1" dirty="0">
                 <a:solidFill>
-                  <a:srgbClr val="16A34A"/>
+                  <a:srgbClr val="DC2626"/>
                 </a:solidFill>
                 <a:latin typeface="Trebuchet MS" pitchFamily="34" charset="0"/>
                 <a:ea typeface="Trebuchet MS" pitchFamily="34" charset="-122"/>
                 <a:cs typeface="Trebuchet MS" pitchFamily="34" charset="-120"/>
               </a:rPr>
-              <a:t>TRUE</a:t>
+              <a:t>FALSE</a:t>
             </a:r>
             <a:endParaRPr lang="en-US" sz="1100" dirty="0"/>
           </a:p>
@@ -35754,7 +35820,7 @@
                 <a:ea typeface="Calibri" pitchFamily="34" charset="-122"/>
                 <a:cs typeface="Calibri" pitchFamily="34" charset="-120"/>
               </a:rPr>
-              <a:t>2.  The root 'safe' comes from a Greek word.</a:t>
+              <a:t>2.  The root 'safe' comes from an ancient Greek word.</a:t>
             </a:r>
             <a:endParaRPr lang="en-US" sz="1300" dirty="0"/>
           </a:p>
@@ -35893,7 +35959,7 @@
                 <a:ea typeface="Calibri" pitchFamily="34" charset="-122"/>
                 <a:cs typeface="Calibri" pitchFamily="34" charset="-120"/>
               </a:rPr>
-              <a:t>3.  A 'safeguard' is something that protects you from danger.</a:t>
+              <a:t>3.  The word 'unsafe' uses a prefix to give 'safe' the opposite meaning.</a:t>
             </a:r>
             <a:endParaRPr lang="en-US" sz="1300" dirty="0"/>
           </a:p>
@@ -36032,7 +36098,7 @@
                 <a:ea typeface="Calibri" pitchFamily="34" charset="-122"/>
                 <a:cs typeface="Calibri" pitchFamily="34" charset="-120"/>
               </a:rPr>
-              <a:t>4.  The word 'unsafe' means the prefix 'un-' has been added to 'safe' to give it the opposite meaning.</a:t>
+              <a:t>4.  A 'safeguard' is something that protects you from harm.</a:t>
             </a:r>
             <a:endParaRPr lang="en-US" sz="1300" dirty="0"/>
           </a:p>
@@ -36171,7 +36237,7 @@
                 <a:ea typeface="Calibri" pitchFamily="34" charset="-122"/>
                 <a:cs typeface="Calibri" pitchFamily="34" charset="-120"/>
               </a:rPr>
-              <a:t>5.  The word 'safety' contains the suffix '-ment'.</a:t>
+              <a:t>5.  The word 'safely' is formed by adding the suffix '-ly' to the root 'safe'.</a:t>
             </a:r>
             <a:endParaRPr lang="en-US" sz="1300" dirty="0"/>
           </a:p>
@@ -36194,11 +36260,11 @@
             </a:avLst>
           </a:prstGeom>
           <a:solidFill>
-            <a:srgbClr val="FEE2E2"/>
-          </a:solidFill>
-          <a:ln w="12700">
-            <a:solidFill>
-              <a:srgbClr val="DC2626"/>
+            <a:srgbClr val="DCFCE7"/>
+          </a:solidFill>
+          <a:ln w="12700">
+            <a:solidFill>
+              <a:srgbClr val="16A34A"/>
             </a:solidFill>
             <a:prstDash val="solid"/>
           </a:ln>
@@ -36231,13 +36297,13 @@
             <a:r>
               <a:rPr lang="en-US" sz="1100" b="1" dirty="0">
                 <a:solidFill>
-                  <a:srgbClr val="DC2626"/>
+                  <a:srgbClr val="16A34A"/>
                 </a:solidFill>
                 <a:latin typeface="Trebuchet MS" pitchFamily="34" charset="0"/>
                 <a:ea typeface="Trebuchet MS" pitchFamily="34" charset="-122"/>
                 <a:cs typeface="Trebuchet MS" pitchFamily="34" charset="-120"/>
               </a:rPr>
-              <a:t>FALSE</a:t>
+              <a:t>TRUE</a:t>
             </a:r>
             <a:endParaRPr lang="en-US" sz="1100" dirty="0"/>
           </a:p>
@@ -38144,7 +38210,7 @@
                 <a:ea typeface="Trebuchet MS" pitchFamily="34" charset="-122"/>
                 <a:cs typeface="Trebuchet MS" pitchFamily="34" charset="-120"/>
               </a:rPr>
-              <a:t>fail-</a:t>
+              <a:t>fire-</a:t>
             </a:r>
             <a:endParaRPr lang="en-US" sz="1300" dirty="0"/>
           </a:p>
@@ -38297,7 +38363,7 @@
                 <a:ea typeface="Trebuchet MS" pitchFamily="34" charset="-122"/>
                 <a:cs typeface="Trebuchet MS" pitchFamily="34" charset="-120"/>
               </a:rPr>
-              <a:t>crash-</a:t>
+              <a:t>food-</a:t>
             </a:r>
             <a:endParaRPr lang="en-US" sz="1300" dirty="0"/>
           </a:p>
@@ -38450,7 +38516,7 @@
                 <a:ea typeface="Trebuchet MS" pitchFamily="34" charset="-122"/>
                 <a:cs typeface="Trebuchet MS" pitchFamily="34" charset="-120"/>
               </a:rPr>
-              <a:t>tamper-</a:t>
+              <a:t>child-</a:t>
             </a:r>
             <a:endParaRPr lang="en-US" sz="1300" dirty="0"/>
           </a:p>
@@ -39728,7 +39794,7 @@
                 <a:ea typeface="Calibri" pitchFamily="34" charset="-122"/>
                 <a:cs typeface="Calibri" pitchFamily="34" charset="-120"/>
               </a:rPr>
-              <a:t>Not safe; likely to cause harm or danger.</a:t>
+              <a:t>Something that is dangerous or could cause harm.</a:t>
             </a:r>
             <a:endParaRPr lang="en-US" sz="1200" dirty="0"/>
           </a:p>
@@ -39867,7 +39933,7 @@
                 <a:ea typeface="Calibri" pitchFamily="34" charset="-122"/>
                 <a:cs typeface="Calibri" pitchFamily="34" charset="-120"/>
               </a:rPr>
-              <a:t>The most free from danger compared to other things.</a:t>
+              <a:t>The most protected from danger out of a group of options.</a:t>
             </a:r>
             <a:endParaRPr lang="en-US" sz="1200" dirty="0"/>
           </a:p>
@@ -40006,7 +40072,7 @@
                 <a:ea typeface="Calibri" pitchFamily="34" charset="-122"/>
                 <a:cs typeface="Calibri" pitchFamily="34" charset="-120"/>
               </a:rPr>
-              <a:t>Something that protects you or keeps you from harm.</a:t>
+              <a:t>Something that protects you or keeps you safe from harm.</a:t>
             </a:r>
             <a:endParaRPr lang="en-US" sz="1200" dirty="0"/>
           </a:p>
@@ -40145,7 +40211,7 @@
                 <a:ea typeface="Calibri" pitchFamily="34" charset="-122"/>
                 <a:cs typeface="Calibri" pitchFamily="34" charset="-120"/>
               </a:rPr>
-              <a:t>Done in a way that avoids danger or harm.</a:t>
+              <a:t>Doing something without getting hurt or in danger.</a:t>
             </a:r>
             <a:endParaRPr lang="en-US" sz="1200" dirty="0"/>
           </a:p>
@@ -40284,7 +40350,7 @@
                 <a:ea typeface="Calibri" pitchFamily="34" charset="-122"/>
                 <a:cs typeface="Calibri" pitchFamily="34" charset="-120"/>
               </a:rPr>
-              <a:t>The state of being protected from danger or harm.</a:t>
+              <a:t>The state of being protected from harm or danger.</a:t>
             </a:r>
             <a:endParaRPr lang="en-US" sz="1200" dirty="0"/>
           </a:p>
@@ -40779,7 +40845,7 @@
                 <a:ea typeface="Calibri" pitchFamily="34" charset="-122"/>
                 <a:cs typeface="Calibri" pitchFamily="34" charset="-120"/>
               </a:rPr>
-              <a:t>The lifeguard reminded all the children to swim safely between the flags at the beach.</a:t>
+              <a:t>Always cross the road safely by using the pedestrian crossing and looking both ways.</a:t>
             </a:r>
             <a:endParaRPr lang="en-US" sz="1500" dirty="0"/>
           </a:p>
@@ -40943,7 +41009,7 @@
                 <a:ea typeface="Calibri" pitchFamily="34" charset="-122"/>
                 <a:cs typeface="Calibri" pitchFamily="34" charset="-120"/>
               </a:rPr>
-              <a:t>Our teacher showed us the safety rules before we started the science experiment.</a:t>
+              <a:t>The lifeguard's job is to safeguard swimmers at the beach during the summer holidays.</a:t>
             </a:r>
             <a:endParaRPr lang="en-US" sz="1500" dirty="0"/>
           </a:p>
@@ -41107,7 +41173,7 @@
                 <a:ea typeface="Calibri" pitchFamily="34" charset="-122"/>
                 <a:cs typeface="Calibri" pitchFamily="34" charset="-120"/>
               </a:rPr>
-              <a:t>The security guard was the safeguard that kept the museum's precious artworks protected.</a:t>
+              <a:t>Wearing a helmet is an important safety rule when riding your bike.</a:t>
             </a:r>
             <a:endParaRPr lang="en-US" sz="1500" dirty="0"/>
           </a:p>

--- a/output/wordlabs-safe-3day.pptx
+++ b/output/wordlabs-safe-3day.pptx
@@ -4240,7 +4240,7 @@
                 <a:ea typeface="Calibri" pitchFamily="34" charset="-122"/>
                 <a:cs typeface="Calibri" pitchFamily="34" charset="-120"/>
               </a:rPr>
-              <a:t>"free from harm or danger"</a:t>
+              <a:t>"free from danger"</a:t>
             </a:r>
             <a:endParaRPr lang="en-US" sz="2200" dirty="0"/>
           </a:p>
@@ -4279,7 +4279,7 @@
                 <a:ea typeface="Calibri" pitchFamily="34" charset="-122"/>
                 <a:cs typeface="Calibri" pitchFamily="34" charset="-120"/>
               </a:rPr>
-              <a:t>Origin: Latin: salvus</a:t>
+              <a:t>Origin: Anglo-Saxon (Old English) root</a:t>
             </a:r>
             <a:endParaRPr lang="en-US" sz="1300" dirty="0"/>
           </a:p>
@@ -5288,7 +5288,7 @@
                 <a:ea typeface="Calibri" pitchFamily="34" charset="-122"/>
                 <a:cs typeface="Calibri" pitchFamily="34" charset="-120"/>
               </a:rPr>
-              <a:t>Word Labs  •  wordlabs.app  •  Root: 'safe' = free from harm or danger</a:t>
+              <a:t>Word Labs  •  wordlabs.app  •  Root: 'safe' = free from danger</a:t>
             </a:r>
             <a:endParaRPr lang="en-US" sz="800" dirty="0"/>
           </a:p>
@@ -5928,7 +5928,7 @@
                 <a:ea typeface="Calibri" pitchFamily="34" charset="-122"/>
                 <a:cs typeface="Calibri" pitchFamily="34" charset="-120"/>
               </a:rPr>
-              <a:t>Word Labs  •  wordlabs.app  •  Root: 'safe' = free from harm or danger</a:t>
+              <a:t>Word Labs  •  wordlabs.app  •  Root: 'safe' = free from danger</a:t>
             </a:r>
             <a:endParaRPr lang="en-US" sz="800" dirty="0"/>
           </a:p>
@@ -6040,7 +6040,7 @@
                 <a:ea typeface="Calibri" pitchFamily="34" charset="-122"/>
                 <a:cs typeface="Calibri" pitchFamily="34" charset="-120"/>
               </a:rPr>
-              <a:t>It is important to follow </a:t>
+              <a:t>The rickety bridge was declared </a:t>
             </a:r>
             <a:pPr algn="l" indent="0" marL="0">
               <a:buNone/>
@@ -6057,7 +6057,7 @@
                 <a:ea typeface="Calibri" pitchFamily="34" charset="-122"/>
                 <a:cs typeface="Calibri" pitchFamily="34" charset="-120"/>
               </a:rPr>
-              <a:t>safety</a:t>
+              <a:t>unsafe</a:t>
             </a:r>
             <a:pPr algn="l" indent="0" marL="0">
               <a:buNone/>
@@ -6071,7 +6071,7 @@
                 <a:ea typeface="Calibri" pitchFamily="34" charset="-122"/>
                 <a:cs typeface="Calibri" pitchFamily="34" charset="-120"/>
               </a:rPr>
-              <a:t> rules so that everyone can play </a:t>
+              <a:t> for traffic. The guard checked the </a:t>
             </a:r>
             <a:pPr algn="l" indent="0" marL="0">
               <a:buNone/>
@@ -6088,7 +6088,7 @@
                 <a:ea typeface="Calibri" pitchFamily="34" charset="-122"/>
                 <a:cs typeface="Calibri" pitchFamily="34" charset="-120"/>
               </a:rPr>
-              <a:t>safely</a:t>
+              <a:t>safeness</a:t>
             </a:r>
             <a:pPr algn="l" indent="0" marL="0">
               <a:buNone/>
@@ -6102,7 +6102,7 @@
                 <a:ea typeface="Calibri" pitchFamily="34" charset="-122"/>
                 <a:cs typeface="Calibri" pitchFamily="34" charset="-120"/>
               </a:rPr>
-              <a:t> at the park.</a:t>
+              <a:t> of the building before letting everyone in.</a:t>
             </a:r>
             <a:endParaRPr lang="en-US" sz="1800" dirty="0"/>
           </a:p>
@@ -6257,7 +6257,7 @@
                 <a:ea typeface="Trebuchet MS" pitchFamily="34" charset="-122"/>
                 <a:cs typeface="Trebuchet MS" pitchFamily="34" charset="-120"/>
               </a:rPr>
-              <a:t>safety</a:t>
+              <a:t>unsafe</a:t>
             </a:r>
             <a:endParaRPr lang="en-US" sz="1400" dirty="0"/>
           </a:p>
@@ -6385,7 +6385,7 @@
                 <a:ea typeface="Trebuchet MS" pitchFamily="34" charset="-122"/>
                 <a:cs typeface="Trebuchet MS" pitchFamily="34" charset="-120"/>
               </a:rPr>
-              <a:t>safely</a:t>
+              <a:t>safeness</a:t>
             </a:r>
             <a:endParaRPr lang="en-US" sz="1400" dirty="0"/>
           </a:p>
@@ -6716,7 +6716,7 @@
                 <a:ea typeface="Calibri" pitchFamily="34" charset="-122"/>
                 <a:cs typeface="Calibri" pitchFamily="34" charset="-120"/>
               </a:rPr>
-              <a:t>Word Labs  •  wordlabs.app  •  Root: 'safe' = free from harm or danger</a:t>
+              <a:t>Word Labs  •  wordlabs.app  •  Root: 'safe' = free from danger</a:t>
             </a:r>
             <a:endParaRPr lang="en-US" sz="800" dirty="0"/>
           </a:p>
@@ -6855,7 +6855,7 @@
                 <a:ea typeface="Trebuchet MS" pitchFamily="34" charset="-122"/>
                 <a:cs typeface="Trebuchet MS" pitchFamily="34" charset="-120"/>
               </a:rPr>
-              <a:t>safety</a:t>
+              <a:t>unsafe</a:t>
             </a:r>
             <a:endParaRPr lang="en-US" sz="2800" dirty="0"/>
           </a:p>
@@ -7543,7 +7543,7 @@
                 <a:ea typeface="Calibri" pitchFamily="34" charset="-122"/>
                 <a:cs typeface="Calibri" pitchFamily="34" charset="-120"/>
               </a:rPr>
-              <a:t>Word Labs  •  wordlabs.app  •  Root: 'safe' = free from harm or danger</a:t>
+              <a:t>Word Labs  •  wordlabs.app  •  Root: 'safe' = free from danger</a:t>
             </a:r>
             <a:endParaRPr lang="en-US" sz="800" dirty="0"/>
           </a:p>
@@ -7682,7 +7682,7 @@
                 <a:ea typeface="Trebuchet MS" pitchFamily="34" charset="-122"/>
                 <a:cs typeface="Trebuchet MS" pitchFamily="34" charset="-120"/>
               </a:rPr>
-              <a:t>safety</a:t>
+              <a:t>unsafe</a:t>
             </a:r>
             <a:endParaRPr lang="en-US" sz="2800" dirty="0"/>
           </a:p>
@@ -7771,11 +7771,11 @@
             </a:avLst>
           </a:prstGeom>
           <a:solidFill>
-            <a:srgbClr val="CCFBF1"/>
+            <a:srgbClr val="DDD6FE"/>
           </a:solidFill>
           <a:ln w="19050">
             <a:solidFill>
-              <a:srgbClr val="0D9488"/>
+              <a:srgbClr val="7C3AED"/>
             </a:solidFill>
             <a:prstDash val="solid"/>
           </a:ln>
@@ -7815,13 +7815,13 @@
             <a:r>
               <a:rPr lang="en-US" sz="1300" b="1" dirty="0">
                 <a:solidFill>
-                  <a:srgbClr val="0F766E"/>
+                  <a:srgbClr val="4C1D95"/>
                 </a:solidFill>
                 <a:latin typeface="Trebuchet MS" pitchFamily="34" charset="0"/>
                 <a:ea typeface="Trebuchet MS" pitchFamily="34" charset="-122"/>
                 <a:cs typeface="Trebuchet MS" pitchFamily="34" charset="-120"/>
               </a:rPr>
-              <a:t>safe</a:t>
+              <a:t>un</a:t>
             </a:r>
             <a:endParaRPr lang="en-US" sz="1300" dirty="0"/>
           </a:p>
@@ -7860,7 +7860,7 @@
                 <a:ea typeface="Calibri" pitchFamily="34" charset="-122"/>
                 <a:cs typeface="Calibri" pitchFamily="34" charset="-120"/>
               </a:rPr>
-              <a:t>free from harm</a:t>
+              <a:t>not</a:t>
             </a:r>
             <a:endParaRPr lang="en-US" sz="850" dirty="0"/>
           </a:p>
@@ -7883,11 +7883,11 @@
             </a:avLst>
           </a:prstGeom>
           <a:solidFill>
-            <a:srgbClr val="FCE7F3"/>
+            <a:srgbClr val="CCFBF1"/>
           </a:solidFill>
           <a:ln w="19050">
             <a:solidFill>
-              <a:srgbClr val="DB2777"/>
+              <a:srgbClr val="0D9488"/>
             </a:solidFill>
             <a:prstDash val="solid"/>
           </a:ln>
@@ -7927,13 +7927,13 @@
             <a:r>
               <a:rPr lang="en-US" sz="1300" b="1" dirty="0">
                 <a:solidFill>
-                  <a:srgbClr val="9D174D"/>
+                  <a:srgbClr val="0F766E"/>
                 </a:solidFill>
                 <a:latin typeface="Trebuchet MS" pitchFamily="34" charset="0"/>
                 <a:ea typeface="Trebuchet MS" pitchFamily="34" charset="-122"/>
                 <a:cs typeface="Trebuchet MS" pitchFamily="34" charset="-120"/>
               </a:rPr>
-              <a:t>ty</a:t>
+              <a:t>safe</a:t>
             </a:r>
             <a:endParaRPr lang="en-US" sz="1300" dirty="0"/>
           </a:p>
@@ -7972,7 +7972,7 @@
                 <a:ea typeface="Calibri" pitchFamily="34" charset="-122"/>
                 <a:cs typeface="Calibri" pitchFamily="34" charset="-120"/>
               </a:rPr>
-              <a:t>state or quality of</a:t>
+              <a:t>free from danger</a:t>
             </a:r>
             <a:endParaRPr lang="en-US" sz="850" dirty="0"/>
           </a:p>
@@ -8528,7 +8528,7 @@
                 <a:ea typeface="Calibri" pitchFamily="34" charset="-122"/>
                 <a:cs typeface="Calibri" pitchFamily="34" charset="-120"/>
               </a:rPr>
-              <a:t>Word Labs  •  wordlabs.app  •  Root: 'safe' = free from harm or danger</a:t>
+              <a:t>Word Labs  •  wordlabs.app  •  Root: 'safe' = free from danger</a:t>
             </a:r>
             <a:endParaRPr lang="en-US" sz="800" dirty="0"/>
           </a:p>
@@ -8667,7 +8667,7 @@
                 <a:ea typeface="Trebuchet MS" pitchFamily="34" charset="-122"/>
                 <a:cs typeface="Trebuchet MS" pitchFamily="34" charset="-120"/>
               </a:rPr>
-              <a:t>safety</a:t>
+              <a:t>unsafe</a:t>
             </a:r>
             <a:endParaRPr lang="en-US" sz="2800" dirty="0"/>
           </a:p>
@@ -8756,11 +8756,11 @@
             </a:avLst>
           </a:prstGeom>
           <a:solidFill>
-            <a:srgbClr val="CCFBF1"/>
+            <a:srgbClr val="DDD6FE"/>
           </a:solidFill>
           <a:ln w="19050">
             <a:solidFill>
-              <a:srgbClr val="0D9488"/>
+              <a:srgbClr val="7C3AED"/>
             </a:solidFill>
             <a:prstDash val="solid"/>
           </a:ln>
@@ -8800,13 +8800,13 @@
             <a:r>
               <a:rPr lang="en-US" sz="1300" b="1" dirty="0">
                 <a:solidFill>
-                  <a:srgbClr val="0F766E"/>
+                  <a:srgbClr val="4C1D95"/>
                 </a:solidFill>
                 <a:latin typeface="Trebuchet MS" pitchFamily="34" charset="0"/>
                 <a:ea typeface="Trebuchet MS" pitchFamily="34" charset="-122"/>
                 <a:cs typeface="Trebuchet MS" pitchFamily="34" charset="-120"/>
               </a:rPr>
-              <a:t>safe</a:t>
+              <a:t>un</a:t>
             </a:r>
             <a:endParaRPr lang="en-US" sz="1300" dirty="0"/>
           </a:p>
@@ -8845,7 +8845,7 @@
                 <a:ea typeface="Calibri" pitchFamily="34" charset="-122"/>
                 <a:cs typeface="Calibri" pitchFamily="34" charset="-120"/>
               </a:rPr>
-              <a:t>free from harm</a:t>
+              <a:t>not</a:t>
             </a:r>
             <a:endParaRPr lang="en-US" sz="850" dirty="0"/>
           </a:p>
@@ -8868,11 +8868,11 @@
             </a:avLst>
           </a:prstGeom>
           <a:solidFill>
-            <a:srgbClr val="FCE7F3"/>
+            <a:srgbClr val="CCFBF1"/>
           </a:solidFill>
           <a:ln w="19050">
             <a:solidFill>
-              <a:srgbClr val="DB2777"/>
+              <a:srgbClr val="0D9488"/>
             </a:solidFill>
             <a:prstDash val="solid"/>
           </a:ln>
@@ -8912,13 +8912,13 @@
             <a:r>
               <a:rPr lang="en-US" sz="1300" b="1" dirty="0">
                 <a:solidFill>
-                  <a:srgbClr val="9D174D"/>
+                  <a:srgbClr val="0F766E"/>
                 </a:solidFill>
                 <a:latin typeface="Trebuchet MS" pitchFamily="34" charset="0"/>
                 <a:ea typeface="Trebuchet MS" pitchFamily="34" charset="-122"/>
                 <a:cs typeface="Trebuchet MS" pitchFamily="34" charset="-120"/>
               </a:rPr>
-              <a:t>ty</a:t>
+              <a:t>safe</a:t>
             </a:r>
             <a:endParaRPr lang="en-US" sz="1300" dirty="0"/>
           </a:p>
@@ -8957,7 +8957,7 @@
                 <a:ea typeface="Calibri" pitchFamily="34" charset="-122"/>
                 <a:cs typeface="Calibri" pitchFamily="34" charset="-120"/>
               </a:rPr>
-              <a:t>state or quality of</a:t>
+              <a:t>free from danger</a:t>
             </a:r>
             <a:endParaRPr lang="en-US" sz="850" dirty="0"/>
           </a:p>
@@ -9116,7 +9116,7 @@
                 <a:ea typeface="Trebuchet MS" pitchFamily="34" charset="-122"/>
                 <a:cs typeface="Trebuchet MS" pitchFamily="34" charset="-120"/>
               </a:rPr>
-              <a:t>safe</a:t>
+              <a:t>un</a:t>
             </a:r>
             <a:endParaRPr lang="en-US" sz="1400" dirty="0"/>
           </a:p>
@@ -9221,7 +9221,7 @@
                 <a:ea typeface="Trebuchet MS" pitchFamily="34" charset="-122"/>
                 <a:cs typeface="Trebuchet MS" pitchFamily="34" charset="-120"/>
               </a:rPr>
-              <a:t>ty</a:t>
+              <a:t>safe</a:t>
             </a:r>
             <a:endParaRPr lang="en-US" sz="1400" dirty="0"/>
           </a:p>
@@ -9645,7 +9645,7 @@
                 <a:ea typeface="Calibri" pitchFamily="34" charset="-122"/>
                 <a:cs typeface="Calibri" pitchFamily="34" charset="-120"/>
               </a:rPr>
-              <a:t>Word Labs  •  wordlabs.app  •  Root: 'safe' = free from harm or danger</a:t>
+              <a:t>Word Labs  •  wordlabs.app  •  Root: 'safe' = free from danger</a:t>
             </a:r>
             <a:endParaRPr lang="en-US" sz="800" dirty="0"/>
           </a:p>
@@ -9784,7 +9784,7 @@
                 <a:ea typeface="Trebuchet MS" pitchFamily="34" charset="-122"/>
                 <a:cs typeface="Trebuchet MS" pitchFamily="34" charset="-120"/>
               </a:rPr>
-              <a:t>safety</a:t>
+              <a:t>unsafe</a:t>
             </a:r>
             <a:endParaRPr lang="en-US" sz="2800" dirty="0"/>
           </a:p>
@@ -9873,11 +9873,11 @@
             </a:avLst>
           </a:prstGeom>
           <a:solidFill>
-            <a:srgbClr val="CCFBF1"/>
+            <a:srgbClr val="DDD6FE"/>
           </a:solidFill>
           <a:ln w="19050">
             <a:solidFill>
-              <a:srgbClr val="0D9488"/>
+              <a:srgbClr val="7C3AED"/>
             </a:solidFill>
             <a:prstDash val="solid"/>
           </a:ln>
@@ -9917,13 +9917,13 @@
             <a:r>
               <a:rPr lang="en-US" sz="1300" b="1" dirty="0">
                 <a:solidFill>
-                  <a:srgbClr val="0F766E"/>
+                  <a:srgbClr val="4C1D95"/>
                 </a:solidFill>
                 <a:latin typeface="Trebuchet MS" pitchFamily="34" charset="0"/>
                 <a:ea typeface="Trebuchet MS" pitchFamily="34" charset="-122"/>
                 <a:cs typeface="Trebuchet MS" pitchFamily="34" charset="-120"/>
               </a:rPr>
-              <a:t>safe</a:t>
+              <a:t>un</a:t>
             </a:r>
             <a:endParaRPr lang="en-US" sz="1300" dirty="0"/>
           </a:p>
@@ -9962,7 +9962,7 @@
                 <a:ea typeface="Calibri" pitchFamily="34" charset="-122"/>
                 <a:cs typeface="Calibri" pitchFamily="34" charset="-120"/>
               </a:rPr>
-              <a:t>free from harm</a:t>
+              <a:t>not</a:t>
             </a:r>
             <a:endParaRPr lang="en-US" sz="850" dirty="0"/>
           </a:p>
@@ -9985,11 +9985,11 @@
             </a:avLst>
           </a:prstGeom>
           <a:solidFill>
-            <a:srgbClr val="FCE7F3"/>
+            <a:srgbClr val="CCFBF1"/>
           </a:solidFill>
           <a:ln w="19050">
             <a:solidFill>
-              <a:srgbClr val="DB2777"/>
+              <a:srgbClr val="0D9488"/>
             </a:solidFill>
             <a:prstDash val="solid"/>
           </a:ln>
@@ -10029,13 +10029,13 @@
             <a:r>
               <a:rPr lang="en-US" sz="1300" b="1" dirty="0">
                 <a:solidFill>
-                  <a:srgbClr val="9D174D"/>
+                  <a:srgbClr val="0F766E"/>
                 </a:solidFill>
                 <a:latin typeface="Trebuchet MS" pitchFamily="34" charset="0"/>
                 <a:ea typeface="Trebuchet MS" pitchFamily="34" charset="-122"/>
                 <a:cs typeface="Trebuchet MS" pitchFamily="34" charset="-120"/>
               </a:rPr>
-              <a:t>ty</a:t>
+              <a:t>safe</a:t>
             </a:r>
             <a:endParaRPr lang="en-US" sz="1300" dirty="0"/>
           </a:p>
@@ -10074,7 +10074,7 @@
                 <a:ea typeface="Calibri" pitchFamily="34" charset="-122"/>
                 <a:cs typeface="Calibri" pitchFamily="34" charset="-120"/>
               </a:rPr>
-              <a:t>state or quality of</a:t>
+              <a:t>free from danger</a:t>
             </a:r>
             <a:endParaRPr lang="en-US" sz="850" dirty="0"/>
           </a:p>
@@ -10233,7 +10233,7 @@
                 <a:ea typeface="Trebuchet MS" pitchFamily="34" charset="-122"/>
                 <a:cs typeface="Trebuchet MS" pitchFamily="34" charset="-120"/>
               </a:rPr>
-              <a:t>safe</a:t>
+              <a:t>un</a:t>
             </a:r>
             <a:endParaRPr lang="en-US" sz="1400" dirty="0"/>
           </a:p>
@@ -10338,7 +10338,7 @@
                 <a:ea typeface="Trebuchet MS" pitchFamily="34" charset="-122"/>
                 <a:cs typeface="Trebuchet MS" pitchFamily="34" charset="-120"/>
               </a:rPr>
-              <a:t>ty</a:t>
+              <a:t>safe</a:t>
             </a:r>
             <a:endParaRPr lang="en-US" sz="1400" dirty="0"/>
           </a:p>
@@ -10445,7 +10445,7 @@
         </p:nvSpPr>
         <p:spPr>
           <a:xfrm>
-            <a:off x="2254649" y="4169664"/>
+            <a:off x="2427732" y="4169664"/>
             <a:ext cx="685800" cy="475488"/>
           </a:xfrm>
           <a:prstGeom prst="rect">
@@ -10472,7 +10472,7 @@
         </p:nvSpPr>
         <p:spPr>
           <a:xfrm>
-            <a:off x="2254649" y="4169664"/>
+            <a:off x="2427732" y="4169664"/>
             <a:ext cx="685800" cy="475488"/>
           </a:xfrm>
           <a:prstGeom prst="rect">
@@ -10497,7 +10497,7 @@
                 <a:ea typeface="Trebuchet MS" pitchFamily="34" charset="-122"/>
                 <a:cs typeface="Trebuchet MS" pitchFamily="34" charset="-120"/>
               </a:rPr>
-              <a:t>s</a:t>
+              <a:t>u</a:t>
             </a:r>
             <a:endParaRPr lang="en-US" sz="900" dirty="0"/>
           </a:p>
@@ -10511,7 +10511,7 @@
         </p:nvSpPr>
         <p:spPr>
           <a:xfrm>
-            <a:off x="3293146" y="4169664"/>
+            <a:off x="3639312" y="4169664"/>
             <a:ext cx="685800" cy="475488"/>
           </a:xfrm>
           <a:prstGeom prst="rect">
@@ -10538,7 +10538,7 @@
         </p:nvSpPr>
         <p:spPr>
           <a:xfrm>
-            <a:off x="3293146" y="4169664"/>
+            <a:off x="3639312" y="4169664"/>
             <a:ext cx="685800" cy="475488"/>
           </a:xfrm>
           <a:prstGeom prst="rect">
@@ -10563,7 +10563,7 @@
                 <a:ea typeface="Trebuchet MS" pitchFamily="34" charset="-122"/>
                 <a:cs typeface="Trebuchet MS" pitchFamily="34" charset="-120"/>
               </a:rPr>
-              <a:t>a</a:t>
+              <a:t>n</a:t>
             </a:r>
             <a:endParaRPr lang="en-US" sz="900" dirty="0"/>
           </a:p>
@@ -10577,7 +10577,7 @@
         </p:nvSpPr>
         <p:spPr>
           <a:xfrm>
-            <a:off x="4331643" y="4169664"/>
+            <a:off x="4850892" y="4169664"/>
             <a:ext cx="685800" cy="475488"/>
           </a:xfrm>
           <a:prstGeom prst="rect">
@@ -10604,7 +10604,7 @@
         </p:nvSpPr>
         <p:spPr>
           <a:xfrm>
-            <a:off x="4331643" y="4169664"/>
+            <a:off x="4850892" y="4169664"/>
             <a:ext cx="685800" cy="475488"/>
           </a:xfrm>
           <a:prstGeom prst="rect">
@@ -10629,7 +10629,7 @@
                 <a:ea typeface="Trebuchet MS" pitchFamily="34" charset="-122"/>
                 <a:cs typeface="Trebuchet MS" pitchFamily="34" charset="-120"/>
               </a:rPr>
-              <a:t>f</a:t>
+              <a:t>s</a:t>
             </a:r>
             <a:endParaRPr lang="en-US" sz="900" dirty="0"/>
           </a:p>
@@ -10643,7 +10643,7 @@
         </p:nvSpPr>
         <p:spPr>
           <a:xfrm>
-            <a:off x="5370141" y="4169664"/>
+            <a:off x="6062472" y="4169664"/>
             <a:ext cx="685800" cy="475488"/>
           </a:xfrm>
           <a:prstGeom prst="rect">
@@ -10670,7 +10670,7 @@
         </p:nvSpPr>
         <p:spPr>
           <a:xfrm>
-            <a:off x="5370141" y="4169664"/>
+            <a:off x="6062472" y="4169664"/>
             <a:ext cx="685800" cy="475488"/>
           </a:xfrm>
           <a:prstGeom prst="rect">
@@ -10695,7 +10695,7 @@
                 <a:ea typeface="Trebuchet MS" pitchFamily="34" charset="-122"/>
                 <a:cs typeface="Trebuchet MS" pitchFamily="34" charset="-120"/>
               </a:rPr>
-              <a:t>e</a:t>
+              <a:t>a_e</a:t>
             </a:r>
             <a:endParaRPr lang="en-US" sz="900" dirty="0"/>
           </a:p>
@@ -10709,7 +10709,7 @@
         </p:nvSpPr>
         <p:spPr>
           <a:xfrm>
-            <a:off x="6408638" y="4169664"/>
+            <a:off x="7274052" y="4169664"/>
             <a:ext cx="685800" cy="475488"/>
           </a:xfrm>
           <a:prstGeom prst="rect">
@@ -10736,7 +10736,7 @@
         </p:nvSpPr>
         <p:spPr>
           <a:xfrm>
-            <a:off x="6408638" y="4169664"/>
+            <a:off x="7274052" y="4169664"/>
             <a:ext cx="685800" cy="475488"/>
           </a:xfrm>
           <a:prstGeom prst="rect">
@@ -10761,73 +10761,7 @@
                 <a:ea typeface="Trebuchet MS" pitchFamily="34" charset="-122"/>
                 <a:cs typeface="Trebuchet MS" pitchFamily="34" charset="-120"/>
               </a:rPr>
-              <a:t>t</a:t>
-            </a:r>
-            <a:endParaRPr lang="en-US" sz="900" dirty="0"/>
-          </a:p>
-        </p:txBody>
-      </p:sp>
-      <p:sp>
-        <p:nvSpPr>
-          <p:cNvPr id="43" name="Shape 41"/>
-          <p:cNvSpPr/>
-          <p:nvPr/>
-        </p:nvSpPr>
-        <p:spPr>
-          <a:xfrm>
-            <a:off x="7447135" y="4169664"/>
-            <a:ext cx="685800" cy="475488"/>
-          </a:xfrm>
-          <a:prstGeom prst="rect">
-            <a:avLst>
-              <a:gd name="adj" fmla="val 7692"/>
-            </a:avLst>
-          </a:prstGeom>
-          <a:solidFill>
-            <a:srgbClr val="FFFFFF"/>
-          </a:solidFill>
-          <a:ln w="12700">
-            <a:solidFill>
-              <a:srgbClr val="DB2777"/>
-            </a:solidFill>
-            <a:prstDash val="solid"/>
-          </a:ln>
-        </p:spPr>
-      </p:sp>
-      <p:sp>
-        <p:nvSpPr>
-          <p:cNvPr id="44" name="Text 42"/>
-          <p:cNvSpPr/>
-          <p:nvPr/>
-        </p:nvSpPr>
-        <p:spPr>
-          <a:xfrm>
-            <a:off x="7447135" y="4169664"/>
-            <a:ext cx="685800" cy="475488"/>
-          </a:xfrm>
-          <a:prstGeom prst="rect">
-            <a:avLst/>
-          </a:prstGeom>
-          <a:noFill/>
-          <a:ln/>
-        </p:spPr>
-        <p:txBody>
-          <a:bodyPr wrap="square" lIns="0" tIns="0" rIns="0" bIns="0" rtlCol="0" anchor="ctr"/>
-          <a:lstStyle/>
-          <a:p>
-            <a:pPr algn="ctr" indent="0" marL="0">
-              <a:buNone/>
-            </a:pPr>
-            <a:r>
-              <a:rPr lang="en-US" sz="900" b="1" dirty="0">
-                <a:solidFill>
-                  <a:srgbClr val="9D174D"/>
-                </a:solidFill>
-                <a:latin typeface="Trebuchet MS" pitchFamily="34" charset="0"/>
-                <a:ea typeface="Trebuchet MS" pitchFamily="34" charset="-122"/>
-                <a:cs typeface="Trebuchet MS" pitchFamily="34" charset="-120"/>
-              </a:rPr>
-              <a:t>y</a:t>
+              <a:t>f</a:t>
             </a:r>
             <a:endParaRPr lang="en-US" sz="900" dirty="0"/>
           </a:p>
@@ -11119,7 +11053,7 @@
                 <a:ea typeface="Calibri" pitchFamily="34" charset="-122"/>
                 <a:cs typeface="Calibri" pitchFamily="34" charset="-120"/>
               </a:rPr>
-              <a:t>Word Labs  •  wordlabs.app  •  Root: 'safe' = free from harm or danger</a:t>
+              <a:t>Word Labs  •  wordlabs.app  •  Root: 'safe' = free from danger</a:t>
             </a:r>
             <a:endParaRPr lang="en-US" sz="800" dirty="0"/>
           </a:p>
@@ -11258,7 +11192,7 @@
                 <a:ea typeface="Trebuchet MS" pitchFamily="34" charset="-122"/>
                 <a:cs typeface="Trebuchet MS" pitchFamily="34" charset="-120"/>
               </a:rPr>
-              <a:t>safely</a:t>
+              <a:t>safeness</a:t>
             </a:r>
             <a:endParaRPr lang="en-US" sz="2800" dirty="0"/>
           </a:p>
@@ -11946,7 +11880,7 @@
                 <a:ea typeface="Calibri" pitchFamily="34" charset="-122"/>
                 <a:cs typeface="Calibri" pitchFamily="34" charset="-120"/>
               </a:rPr>
-              <a:t>Word Labs  •  wordlabs.app  •  Root: 'safe' = free from harm or danger</a:t>
+              <a:t>Word Labs  •  wordlabs.app  •  Root: 'safe' = free from danger</a:t>
             </a:r>
             <a:endParaRPr lang="en-US" sz="800" dirty="0"/>
           </a:p>
@@ -12085,7 +12019,7 @@
                 <a:ea typeface="Trebuchet MS" pitchFamily="34" charset="-122"/>
                 <a:cs typeface="Trebuchet MS" pitchFamily="34" charset="-120"/>
               </a:rPr>
-              <a:t>safely</a:t>
+              <a:t>safeness</a:t>
             </a:r>
             <a:endParaRPr lang="en-US" sz="2800" dirty="0"/>
           </a:p>
@@ -12263,7 +12197,7 @@
                 <a:ea typeface="Calibri" pitchFamily="34" charset="-122"/>
                 <a:cs typeface="Calibri" pitchFamily="34" charset="-120"/>
               </a:rPr>
-              <a:t>free from harm</a:t>
+              <a:t>free from danger</a:t>
             </a:r>
             <a:endParaRPr lang="en-US" sz="850" dirty="0"/>
           </a:p>
@@ -12336,7 +12270,7 @@
                 <a:ea typeface="Trebuchet MS" pitchFamily="34" charset="-122"/>
                 <a:cs typeface="Trebuchet MS" pitchFamily="34" charset="-120"/>
               </a:rPr>
-              <a:t>ly</a:t>
+              <a:t>ness</a:t>
             </a:r>
             <a:endParaRPr lang="en-US" sz="1300" dirty="0"/>
           </a:p>
@@ -12375,7 +12309,7 @@
                 <a:ea typeface="Calibri" pitchFamily="34" charset="-122"/>
                 <a:cs typeface="Calibri" pitchFamily="34" charset="-120"/>
               </a:rPr>
-              <a:t>in a certain way</a:t>
+              <a:t>state of</a:t>
             </a:r>
             <a:endParaRPr lang="en-US" sz="850" dirty="0"/>
           </a:p>
@@ -12931,7 +12865,7 @@
                 <a:ea typeface="Calibri" pitchFamily="34" charset="-122"/>
                 <a:cs typeface="Calibri" pitchFamily="34" charset="-120"/>
               </a:rPr>
-              <a:t>Word Labs  •  wordlabs.app  •  Root: 'safe' = free from harm or danger</a:t>
+              <a:t>Word Labs  •  wordlabs.app  •  Root: 'safe' = free from danger</a:t>
             </a:r>
             <a:endParaRPr lang="en-US" sz="800" dirty="0"/>
           </a:p>
@@ -13070,7 +13004,7 @@
                 <a:ea typeface="Trebuchet MS" pitchFamily="34" charset="-122"/>
                 <a:cs typeface="Trebuchet MS" pitchFamily="34" charset="-120"/>
               </a:rPr>
-              <a:t>safely</a:t>
+              <a:t>safeness</a:t>
             </a:r>
             <a:endParaRPr lang="en-US" sz="2800" dirty="0"/>
           </a:p>
@@ -13248,7 +13182,7 @@
                 <a:ea typeface="Calibri" pitchFamily="34" charset="-122"/>
                 <a:cs typeface="Calibri" pitchFamily="34" charset="-120"/>
               </a:rPr>
-              <a:t>free from harm</a:t>
+              <a:t>free from danger</a:t>
             </a:r>
             <a:endParaRPr lang="en-US" sz="850" dirty="0"/>
           </a:p>
@@ -13321,7 +13255,7 @@
                 <a:ea typeface="Trebuchet MS" pitchFamily="34" charset="-122"/>
                 <a:cs typeface="Trebuchet MS" pitchFamily="34" charset="-120"/>
               </a:rPr>
-              <a:t>ly</a:t>
+              <a:t>ness</a:t>
             </a:r>
             <a:endParaRPr lang="en-US" sz="1300" dirty="0"/>
           </a:p>
@@ -13360,7 +13294,7 @@
                 <a:ea typeface="Calibri" pitchFamily="34" charset="-122"/>
                 <a:cs typeface="Calibri" pitchFamily="34" charset="-120"/>
               </a:rPr>
-              <a:t>in a certain way</a:t>
+              <a:t>state of</a:t>
             </a:r>
             <a:endParaRPr lang="en-US" sz="850" dirty="0"/>
           </a:p>
@@ -13624,7 +13558,7 @@
                 <a:ea typeface="Trebuchet MS" pitchFamily="34" charset="-122"/>
                 <a:cs typeface="Trebuchet MS" pitchFamily="34" charset="-120"/>
               </a:rPr>
-              <a:t>ly</a:t>
+              <a:t>ness</a:t>
             </a:r>
             <a:endParaRPr lang="en-US" sz="1400" dirty="0"/>
           </a:p>
@@ -13957,7 +13891,7 @@
                 <a:ea typeface="Calibri" pitchFamily="34" charset="-122"/>
                 <a:cs typeface="Calibri" pitchFamily="34" charset="-120"/>
               </a:rPr>
-              <a:t>Root 'safe' — free from harm or danger</a:t>
+              <a:t>Root 'safe' — free from danger</a:t>
             </a:r>
             <a:endParaRPr lang="en-US" sz="1600" dirty="0"/>
           </a:p>
@@ -14313,7 +14247,7 @@
                 <a:ea typeface="Calibri" pitchFamily="34" charset="-122"/>
                 <a:cs typeface="Calibri" pitchFamily="34" charset="-120"/>
               </a:rPr>
-              <a:t>Word Labs  •  wordlabs.app  •  Root: 'safe' = free from harm or danger</a:t>
+              <a:t>Word Labs  •  wordlabs.app  •  Root: 'safe' = free from danger</a:t>
             </a:r>
             <a:endParaRPr lang="en-US" sz="800" dirty="0"/>
           </a:p>
@@ -14452,7 +14386,7 @@
                 <a:ea typeface="Trebuchet MS" pitchFamily="34" charset="-122"/>
                 <a:cs typeface="Trebuchet MS" pitchFamily="34" charset="-120"/>
               </a:rPr>
-              <a:t>safely</a:t>
+              <a:t>safeness</a:t>
             </a:r>
             <a:endParaRPr lang="en-US" sz="2800" dirty="0"/>
           </a:p>
@@ -14630,7 +14564,7 @@
                 <a:ea typeface="Calibri" pitchFamily="34" charset="-122"/>
                 <a:cs typeface="Calibri" pitchFamily="34" charset="-120"/>
               </a:rPr>
-              <a:t>free from harm</a:t>
+              <a:t>free from danger</a:t>
             </a:r>
             <a:endParaRPr lang="en-US" sz="850" dirty="0"/>
           </a:p>
@@ -14703,7 +14637,7 @@
                 <a:ea typeface="Trebuchet MS" pitchFamily="34" charset="-122"/>
                 <a:cs typeface="Trebuchet MS" pitchFamily="34" charset="-120"/>
               </a:rPr>
-              <a:t>ly</a:t>
+              <a:t>ness</a:t>
             </a:r>
             <a:endParaRPr lang="en-US" sz="1300" dirty="0"/>
           </a:p>
@@ -14742,7 +14676,7 @@
                 <a:ea typeface="Calibri" pitchFamily="34" charset="-122"/>
                 <a:cs typeface="Calibri" pitchFamily="34" charset="-120"/>
               </a:rPr>
-              <a:t>in a certain way</a:t>
+              <a:t>state of</a:t>
             </a:r>
             <a:endParaRPr lang="en-US" sz="850" dirty="0"/>
           </a:p>
@@ -15006,7 +14940,7 @@
                 <a:ea typeface="Trebuchet MS" pitchFamily="34" charset="-122"/>
                 <a:cs typeface="Trebuchet MS" pitchFamily="34" charset="-120"/>
               </a:rPr>
-              <a:t>ly</a:t>
+              <a:t>ness</a:t>
             </a:r>
             <a:endParaRPr lang="en-US" sz="1400" dirty="0"/>
           </a:p>
@@ -15113,7 +15047,7 @@
         </p:nvSpPr>
         <p:spPr>
           <a:xfrm>
-            <a:off x="2254649" y="4169664"/>
+            <a:off x="2124837" y="4169664"/>
             <a:ext cx="685800" cy="475488"/>
           </a:xfrm>
           <a:prstGeom prst="rect">
@@ -15140,7 +15074,7 @@
         </p:nvSpPr>
         <p:spPr>
           <a:xfrm>
-            <a:off x="2254649" y="4169664"/>
+            <a:off x="2124837" y="4169664"/>
             <a:ext cx="685800" cy="475488"/>
           </a:xfrm>
           <a:prstGeom prst="rect">
@@ -15179,7 +15113,7 @@
         </p:nvSpPr>
         <p:spPr>
           <a:xfrm>
-            <a:off x="3293146" y="4169664"/>
+            <a:off x="3033522" y="4169664"/>
             <a:ext cx="685800" cy="475488"/>
           </a:xfrm>
           <a:prstGeom prst="rect">
@@ -15206,7 +15140,7 @@
         </p:nvSpPr>
         <p:spPr>
           <a:xfrm>
-            <a:off x="3293146" y="4169664"/>
+            <a:off x="3033522" y="4169664"/>
             <a:ext cx="685800" cy="475488"/>
           </a:xfrm>
           <a:prstGeom prst="rect">
@@ -15231,7 +15165,7 @@
                 <a:ea typeface="Trebuchet MS" pitchFamily="34" charset="-122"/>
                 <a:cs typeface="Trebuchet MS" pitchFamily="34" charset="-120"/>
               </a:rPr>
-              <a:t>a</a:t>
+              <a:t>a_e</a:t>
             </a:r>
             <a:endParaRPr lang="en-US" sz="900" dirty="0"/>
           </a:p>
@@ -15245,7 +15179,7 @@
         </p:nvSpPr>
         <p:spPr>
           <a:xfrm>
-            <a:off x="4331643" y="4169664"/>
+            <a:off x="3942207" y="4169664"/>
             <a:ext cx="685800" cy="475488"/>
           </a:xfrm>
           <a:prstGeom prst="rect">
@@ -15272,7 +15206,7 @@
         </p:nvSpPr>
         <p:spPr>
           <a:xfrm>
-            <a:off x="4331643" y="4169664"/>
+            <a:off x="3942207" y="4169664"/>
             <a:ext cx="685800" cy="475488"/>
           </a:xfrm>
           <a:prstGeom prst="rect">
@@ -15311,7 +15245,7 @@
         </p:nvSpPr>
         <p:spPr>
           <a:xfrm>
-            <a:off x="5370141" y="4169664"/>
+            <a:off x="4850892" y="4169664"/>
             <a:ext cx="685800" cy="475488"/>
           </a:xfrm>
           <a:prstGeom prst="rect">
@@ -15338,7 +15272,7 @@
         </p:nvSpPr>
         <p:spPr>
           <a:xfrm>
-            <a:off x="5370141" y="4169664"/>
+            <a:off x="4850892" y="4169664"/>
             <a:ext cx="685800" cy="475488"/>
           </a:xfrm>
           <a:prstGeom prst="rect">
@@ -15363,7 +15297,7 @@
                 <a:ea typeface="Trebuchet MS" pitchFamily="34" charset="-122"/>
                 <a:cs typeface="Trebuchet MS" pitchFamily="34" charset="-120"/>
               </a:rPr>
-              <a:t>e</a:t>
+              <a:t>n</a:t>
             </a:r>
             <a:endParaRPr lang="en-US" sz="900" dirty="0"/>
           </a:p>
@@ -15377,7 +15311,7 @@
         </p:nvSpPr>
         <p:spPr>
           <a:xfrm>
-            <a:off x="6408638" y="4169664"/>
+            <a:off x="5759577" y="4169664"/>
             <a:ext cx="685800" cy="475488"/>
           </a:xfrm>
           <a:prstGeom prst="rect">
@@ -15404,7 +15338,7 @@
         </p:nvSpPr>
         <p:spPr>
           <a:xfrm>
-            <a:off x="6408638" y="4169664"/>
+            <a:off x="5759577" y="4169664"/>
             <a:ext cx="685800" cy="475488"/>
           </a:xfrm>
           <a:prstGeom prst="rect">
@@ -15429,7 +15363,7 @@
                 <a:ea typeface="Trebuchet MS" pitchFamily="34" charset="-122"/>
                 <a:cs typeface="Trebuchet MS" pitchFamily="34" charset="-120"/>
               </a:rPr>
-              <a:t>l</a:t>
+              <a:t>e</a:t>
             </a:r>
             <a:endParaRPr lang="en-US" sz="900" dirty="0"/>
           </a:p>
@@ -15443,7 +15377,7 @@
         </p:nvSpPr>
         <p:spPr>
           <a:xfrm>
-            <a:off x="7447135" y="4169664"/>
+            <a:off x="6668262" y="4169664"/>
             <a:ext cx="685800" cy="475488"/>
           </a:xfrm>
           <a:prstGeom prst="rect">
@@ -15470,7 +15404,7 @@
         </p:nvSpPr>
         <p:spPr>
           <a:xfrm>
-            <a:off x="7447135" y="4169664"/>
+            <a:off x="6668262" y="4169664"/>
             <a:ext cx="685800" cy="475488"/>
           </a:xfrm>
           <a:prstGeom prst="rect">
@@ -15495,7 +15429,73 @@
                 <a:ea typeface="Trebuchet MS" pitchFamily="34" charset="-122"/>
                 <a:cs typeface="Trebuchet MS" pitchFamily="34" charset="-120"/>
               </a:rPr>
-              <a:t>y</a:t>
+              <a:t>s</a:t>
+            </a:r>
+            <a:endParaRPr lang="en-US" sz="900" dirty="0"/>
+          </a:p>
+        </p:txBody>
+      </p:sp>
+      <p:sp>
+        <p:nvSpPr>
+          <p:cNvPr id="45" name="Shape 43"/>
+          <p:cNvSpPr/>
+          <p:nvPr/>
+        </p:nvSpPr>
+        <p:spPr>
+          <a:xfrm>
+            <a:off x="7576947" y="4169664"/>
+            <a:ext cx="685800" cy="475488"/>
+          </a:xfrm>
+          <a:prstGeom prst="rect">
+            <a:avLst>
+              <a:gd name="adj" fmla="val 7692"/>
+            </a:avLst>
+          </a:prstGeom>
+          <a:solidFill>
+            <a:srgbClr val="FFFFFF"/>
+          </a:solidFill>
+          <a:ln w="12700">
+            <a:solidFill>
+              <a:srgbClr val="DB2777"/>
+            </a:solidFill>
+            <a:prstDash val="solid"/>
+          </a:ln>
+        </p:spPr>
+      </p:sp>
+      <p:sp>
+        <p:nvSpPr>
+          <p:cNvPr id="46" name="Text 44"/>
+          <p:cNvSpPr/>
+          <p:nvPr/>
+        </p:nvSpPr>
+        <p:spPr>
+          <a:xfrm>
+            <a:off x="7576947" y="4169664"/>
+            <a:ext cx="685800" cy="475488"/>
+          </a:xfrm>
+          <a:prstGeom prst="rect">
+            <a:avLst/>
+          </a:prstGeom>
+          <a:noFill/>
+          <a:ln/>
+        </p:spPr>
+        <p:txBody>
+          <a:bodyPr wrap="square" lIns="0" tIns="0" rIns="0" bIns="0" rtlCol="0" anchor="ctr"/>
+          <a:lstStyle/>
+          <a:p>
+            <a:pPr algn="ctr" indent="0" marL="0">
+              <a:buNone/>
+            </a:pPr>
+            <a:r>
+              <a:rPr lang="en-US" sz="900" b="1" dirty="0">
+                <a:solidFill>
+                  <a:srgbClr val="9D174D"/>
+                </a:solidFill>
+                <a:latin typeface="Trebuchet MS" pitchFamily="34" charset="0"/>
+                <a:ea typeface="Trebuchet MS" pitchFamily="34" charset="-122"/>
+                <a:cs typeface="Trebuchet MS" pitchFamily="34" charset="-120"/>
+              </a:rPr>
+              <a:t>s</a:t>
             </a:r>
             <a:endParaRPr lang="en-US" sz="900" dirty="0"/>
           </a:p>
@@ -16069,7 +16069,7 @@
                 <a:ea typeface="Calibri" pitchFamily="34" charset="-122"/>
                 <a:cs typeface="Calibri" pitchFamily="34" charset="-120"/>
               </a:rPr>
-              <a:t>Word Labs  •  wordlabs.app  •  Root: 'safe' = free from harm or danger</a:t>
+              <a:t>Word Labs  •  wordlabs.app  •  Root: 'safe' = free from danger</a:t>
             </a:r>
             <a:endParaRPr lang="en-US" sz="800" dirty="0"/>
           </a:p>
@@ -16403,7 +16403,7 @@
                 <a:ea typeface="Trebuchet MS" pitchFamily="34" charset="-122"/>
                 <a:cs typeface="Trebuchet MS" pitchFamily="34" charset="-120"/>
               </a:rPr>
-              <a:t>1</a:t>
+              <a:t>0</a:t>
             </a:r>
             <a:pPr algn="ctr" indent="0" marL="0">
               <a:buNone/>
@@ -16709,7 +16709,7 @@
                 <a:ea typeface="Calibri" pitchFamily="34" charset="-122"/>
                 <a:cs typeface="Calibri" pitchFamily="34" charset="-120"/>
               </a:rPr>
-              <a:t>Word Labs  •  wordlabs.app  •  Root: 'safe' = free from harm or danger</a:t>
+              <a:t>Word Labs  •  wordlabs.app  •  Root: 'safe' = free from danger</a:t>
             </a:r>
             <a:endParaRPr lang="en-US" sz="800" dirty="0"/>
           </a:p>
@@ -16821,7 +16821,7 @@
                 <a:ea typeface="Calibri" pitchFamily="34" charset="-122"/>
                 <a:cs typeface="Calibri" pitchFamily="34" charset="-120"/>
               </a:rPr>
-              <a:t>The </a:t>
+              <a:t>He rode his bike </a:t>
             </a:r>
             <a:pPr algn="l" indent="0" marL="0">
               <a:buNone/>
@@ -16838,7 +16838,7 @@
                 <a:ea typeface="Calibri" pitchFamily="34" charset="-122"/>
                 <a:cs typeface="Calibri" pitchFamily="34" charset="-120"/>
               </a:rPr>
-              <a:t>safeguard</a:t>
+              <a:t>unsafely</a:t>
             </a:r>
             <a:pPr algn="l" indent="0" marL="0">
               <a:buNone/>
@@ -16852,7 +16852,7 @@
                 <a:ea typeface="Calibri" pitchFamily="34" charset="-122"/>
                 <a:cs typeface="Calibri" pitchFamily="34" charset="-120"/>
               </a:rPr>
-              <a:t> on the equipment was checked carefully, but the </a:t>
+              <a:t> down the busy road. The teacher explained the </a:t>
             </a:r>
             <a:pPr algn="l" indent="0" marL="0">
               <a:buNone/>
@@ -16869,7 +16869,7 @@
                 <a:ea typeface="Calibri" pitchFamily="34" charset="-122"/>
                 <a:cs typeface="Calibri" pitchFamily="34" charset="-120"/>
               </a:rPr>
-              <a:t>unsafe</a:t>
+              <a:t>safety</a:t>
             </a:r>
             <a:pPr algn="l" indent="0" marL="0">
               <a:buNone/>
@@ -16883,7 +16883,7 @@
                 <a:ea typeface="Calibri" pitchFamily="34" charset="-122"/>
                 <a:cs typeface="Calibri" pitchFamily="34" charset="-120"/>
               </a:rPr>
-              <a:t> ladder still needed fixing before the </a:t>
+              <a:t> rules before the science experiment. The family went on two </a:t>
             </a:r>
             <a:pPr algn="l" indent="0" marL="0">
               <a:buNone/>
@@ -16900,7 +16900,7 @@
                 <a:ea typeface="Calibri" pitchFamily="34" charset="-122"/>
                 <a:cs typeface="Calibri" pitchFamily="34" charset="-120"/>
               </a:rPr>
-              <a:t>safest</a:t>
+              <a:t>safaris</a:t>
             </a:r>
             <a:pPr algn="l" indent="0" marL="0">
               <a:buNone/>
@@ -16914,7 +16914,7 @@
                 <a:ea typeface="Calibri" pitchFamily="34" charset="-122"/>
                 <a:cs typeface="Calibri" pitchFamily="34" charset="-120"/>
               </a:rPr>
-              <a:t> path could be used.</a:t>
+              <a:t> in Africa to see lions and elephants.</a:t>
             </a:r>
             <a:endParaRPr lang="en-US" sz="1800" dirty="0"/>
           </a:p>
@@ -17069,7 +17069,7 @@
                 <a:ea typeface="Trebuchet MS" pitchFamily="34" charset="-122"/>
                 <a:cs typeface="Trebuchet MS" pitchFamily="34" charset="-120"/>
               </a:rPr>
-              <a:t>safeguard</a:t>
+              <a:t>unsafely</a:t>
             </a:r>
             <a:endParaRPr lang="en-US" sz="1400" dirty="0"/>
           </a:p>
@@ -17197,7 +17197,7 @@
                 <a:ea typeface="Trebuchet MS" pitchFamily="34" charset="-122"/>
                 <a:cs typeface="Trebuchet MS" pitchFamily="34" charset="-120"/>
               </a:rPr>
-              <a:t>unsafe</a:t>
+              <a:t>safety</a:t>
             </a:r>
             <a:endParaRPr lang="en-US" sz="1400" dirty="0"/>
           </a:p>
@@ -17325,7 +17325,7 @@
                 <a:ea typeface="Trebuchet MS" pitchFamily="34" charset="-122"/>
                 <a:cs typeface="Trebuchet MS" pitchFamily="34" charset="-120"/>
               </a:rPr>
-              <a:t>safest</a:t>
+              <a:t>safaris</a:t>
             </a:r>
             <a:endParaRPr lang="en-US" sz="1400" dirty="0"/>
           </a:p>
@@ -17656,7 +17656,7 @@
                 <a:ea typeface="Calibri" pitchFamily="34" charset="-122"/>
                 <a:cs typeface="Calibri" pitchFamily="34" charset="-120"/>
               </a:rPr>
-              <a:t>Word Labs  •  wordlabs.app  •  Root: 'safe' = free from harm or danger</a:t>
+              <a:t>Word Labs  •  wordlabs.app  •  Root: 'safe' = free from danger</a:t>
             </a:r>
             <a:endParaRPr lang="en-US" sz="800" dirty="0"/>
           </a:p>
@@ -17795,7 +17795,7 @@
                 <a:ea typeface="Trebuchet MS" pitchFamily="34" charset="-122"/>
                 <a:cs typeface="Trebuchet MS" pitchFamily="34" charset="-120"/>
               </a:rPr>
-              <a:t>safeguard</a:t>
+              <a:t>unsafely</a:t>
             </a:r>
             <a:endParaRPr lang="en-US" sz="2800" dirty="0"/>
           </a:p>
@@ -18483,7 +18483,7 @@
                 <a:ea typeface="Calibri" pitchFamily="34" charset="-122"/>
                 <a:cs typeface="Calibri" pitchFamily="34" charset="-120"/>
               </a:rPr>
-              <a:t>Word Labs  •  wordlabs.app  •  Root: 'safe' = free from harm or danger</a:t>
+              <a:t>Word Labs  •  wordlabs.app  •  Root: 'safe' = free from danger</a:t>
             </a:r>
             <a:endParaRPr lang="en-US" sz="800" dirty="0"/>
           </a:p>
@@ -18622,7 +18622,7 @@
                 <a:ea typeface="Trebuchet MS" pitchFamily="34" charset="-122"/>
                 <a:cs typeface="Trebuchet MS" pitchFamily="34" charset="-120"/>
               </a:rPr>
-              <a:t>safeguard</a:t>
+              <a:t>unsafely</a:t>
             </a:r>
             <a:endParaRPr lang="en-US" sz="2800" dirty="0"/>
           </a:p>
@@ -18702,7 +18702,7 @@
         </p:nvSpPr>
         <p:spPr>
           <a:xfrm>
-            <a:off x="2938272" y="2258568"/>
+            <a:off x="2221992" y="2258568"/>
             <a:ext cx="1828800" cy="292608"/>
           </a:xfrm>
           <a:prstGeom prst="rect">
@@ -18711,11 +18711,11 @@
             </a:avLst>
           </a:prstGeom>
           <a:solidFill>
-            <a:srgbClr val="CCFBF1"/>
+            <a:srgbClr val="DDD6FE"/>
           </a:solidFill>
           <a:ln w="19050">
             <a:solidFill>
-              <a:srgbClr val="0D9488"/>
+              <a:srgbClr val="7C3AED"/>
             </a:solidFill>
             <a:prstDash val="solid"/>
           </a:ln>
@@ -18736,7 +18736,7 @@
         </p:nvSpPr>
         <p:spPr>
           <a:xfrm>
-            <a:off x="2938272" y="2258568"/>
+            <a:off x="2221992" y="2258568"/>
             <a:ext cx="1828800" cy="292608"/>
           </a:xfrm>
           <a:prstGeom prst="rect">
@@ -18755,13 +18755,13 @@
             <a:r>
               <a:rPr lang="en-US" sz="1300" b="1" dirty="0">
                 <a:solidFill>
-                  <a:srgbClr val="0F766E"/>
+                  <a:srgbClr val="4C1D95"/>
                 </a:solidFill>
                 <a:latin typeface="Trebuchet MS" pitchFamily="34" charset="0"/>
                 <a:ea typeface="Trebuchet MS" pitchFamily="34" charset="-122"/>
                 <a:cs typeface="Trebuchet MS" pitchFamily="34" charset="-120"/>
               </a:rPr>
-              <a:t>safe</a:t>
+              <a:t>un</a:t>
             </a:r>
             <a:endParaRPr lang="en-US" sz="1300" dirty="0"/>
           </a:p>
@@ -18775,7 +18775,7 @@
         </p:nvSpPr>
         <p:spPr>
           <a:xfrm>
-            <a:off x="2938272" y="2569464"/>
+            <a:off x="2221992" y="2569464"/>
             <a:ext cx="1828800" cy="201168"/>
           </a:xfrm>
           <a:prstGeom prst="rect">
@@ -18800,7 +18800,7 @@
                 <a:ea typeface="Calibri" pitchFamily="34" charset="-122"/>
                 <a:cs typeface="Calibri" pitchFamily="34" charset="-120"/>
               </a:rPr>
-              <a:t>free from harm</a:t>
+              <a:t>not</a:t>
             </a:r>
             <a:endParaRPr lang="en-US" sz="850" dirty="0"/>
           </a:p>
@@ -18814,7 +18814,7 @@
         </p:nvSpPr>
         <p:spPr>
           <a:xfrm>
-            <a:off x="5803392" y="2258568"/>
+            <a:off x="4370832" y="2258568"/>
             <a:ext cx="1828800" cy="292608"/>
           </a:xfrm>
           <a:prstGeom prst="rect">
@@ -18823,11 +18823,11 @@
             </a:avLst>
           </a:prstGeom>
           <a:solidFill>
-            <a:srgbClr val="FCE7F3"/>
+            <a:srgbClr val="CCFBF1"/>
           </a:solidFill>
           <a:ln w="19050">
             <a:solidFill>
-              <a:srgbClr val="DB2777"/>
+              <a:srgbClr val="0D9488"/>
             </a:solidFill>
             <a:prstDash val="solid"/>
           </a:ln>
@@ -18848,7 +18848,7 @@
         </p:nvSpPr>
         <p:spPr>
           <a:xfrm>
-            <a:off x="5803392" y="2258568"/>
+            <a:off x="4370832" y="2258568"/>
             <a:ext cx="1828800" cy="292608"/>
           </a:xfrm>
           <a:prstGeom prst="rect">
@@ -18867,13 +18867,13 @@
             <a:r>
               <a:rPr lang="en-US" sz="1300" b="1" dirty="0">
                 <a:solidFill>
-                  <a:srgbClr val="9D174D"/>
+                  <a:srgbClr val="0F766E"/>
                 </a:solidFill>
                 <a:latin typeface="Trebuchet MS" pitchFamily="34" charset="0"/>
                 <a:ea typeface="Trebuchet MS" pitchFamily="34" charset="-122"/>
                 <a:cs typeface="Trebuchet MS" pitchFamily="34" charset="-120"/>
               </a:rPr>
-              <a:t>guard</a:t>
+              <a:t>safe</a:t>
             </a:r>
             <a:endParaRPr lang="en-US" sz="1300" dirty="0"/>
           </a:p>
@@ -18887,7 +18887,7 @@
         </p:nvSpPr>
         <p:spPr>
           <a:xfrm>
-            <a:off x="5803392" y="2569464"/>
+            <a:off x="4370832" y="2569464"/>
             <a:ext cx="1828800" cy="201168"/>
           </a:xfrm>
           <a:prstGeom prst="rect">
@@ -18912,7 +18912,7 @@
                 <a:ea typeface="Calibri" pitchFamily="34" charset="-122"/>
                 <a:cs typeface="Calibri" pitchFamily="34" charset="-120"/>
               </a:rPr>
-              <a:t>to watch over or protect</a:t>
+              <a:t>free from danger</a:t>
             </a:r>
             <a:endParaRPr lang="en-US" sz="850" dirty="0"/>
           </a:p>
@@ -18921,6 +18921,118 @@
       <p:sp>
         <p:nvSpPr>
           <p:cNvPr id="22" name="Shape 20"/>
+          <p:cNvSpPr/>
+          <p:nvPr/>
+        </p:nvSpPr>
+        <p:spPr>
+          <a:xfrm>
+            <a:off x="6519672" y="2258568"/>
+            <a:ext cx="1828800" cy="292608"/>
+          </a:xfrm>
+          <a:prstGeom prst="rect">
+            <a:avLst>
+              <a:gd name="adj" fmla="val 25000"/>
+            </a:avLst>
+          </a:prstGeom>
+          <a:solidFill>
+            <a:srgbClr val="FCE7F3"/>
+          </a:solidFill>
+          <a:ln w="19050">
+            <a:solidFill>
+              <a:srgbClr val="DB2777"/>
+            </a:solidFill>
+            <a:prstDash val="solid"/>
+          </a:ln>
+          <a:effectLst>
+            <a:outerShdw sx="100000" sy="100000" kx="0" ky="0" algn="bl" rotWithShape="0" blurRad="101600" dist="38100" dir="8100000">
+              <a:srgbClr val="000000">
+                <a:alpha val="12000"/>
+              </a:srgbClr>
+            </a:outerShdw>
+          </a:effectLst>
+        </p:spPr>
+      </p:sp>
+      <p:sp>
+        <p:nvSpPr>
+          <p:cNvPr id="23" name="Text 21"/>
+          <p:cNvSpPr/>
+          <p:nvPr/>
+        </p:nvSpPr>
+        <p:spPr>
+          <a:xfrm>
+            <a:off x="6519672" y="2258568"/>
+            <a:ext cx="1828800" cy="292608"/>
+          </a:xfrm>
+          <a:prstGeom prst="rect">
+            <a:avLst/>
+          </a:prstGeom>
+          <a:noFill/>
+          <a:ln/>
+        </p:spPr>
+        <p:txBody>
+          <a:bodyPr wrap="square" lIns="0" tIns="0" rIns="0" bIns="0" rtlCol="0" anchor="ctr"/>
+          <a:lstStyle/>
+          <a:p>
+            <a:pPr algn="ctr" indent="0" marL="0">
+              <a:buNone/>
+            </a:pPr>
+            <a:r>
+              <a:rPr lang="en-US" sz="1300" b="1" dirty="0">
+                <a:solidFill>
+                  <a:srgbClr val="9D174D"/>
+                </a:solidFill>
+                <a:latin typeface="Trebuchet MS" pitchFamily="34" charset="0"/>
+                <a:ea typeface="Trebuchet MS" pitchFamily="34" charset="-122"/>
+                <a:cs typeface="Trebuchet MS" pitchFamily="34" charset="-120"/>
+              </a:rPr>
+              <a:t>ly</a:t>
+            </a:r>
+            <a:endParaRPr lang="en-US" sz="1300" dirty="0"/>
+          </a:p>
+        </p:txBody>
+      </p:sp>
+      <p:sp>
+        <p:nvSpPr>
+          <p:cNvPr id="24" name="Text 22"/>
+          <p:cNvSpPr/>
+          <p:nvPr/>
+        </p:nvSpPr>
+        <p:spPr>
+          <a:xfrm>
+            <a:off x="6519672" y="2569464"/>
+            <a:ext cx="1828800" cy="201168"/>
+          </a:xfrm>
+          <a:prstGeom prst="rect">
+            <a:avLst/>
+          </a:prstGeom>
+          <a:noFill/>
+          <a:ln/>
+        </p:spPr>
+        <p:txBody>
+          <a:bodyPr wrap="square" lIns="0" tIns="0" rIns="0" bIns="0" rtlCol="0" anchor="t"/>
+          <a:lstStyle/>
+          <a:p>
+            <a:pPr algn="ctr" indent="0" marL="0">
+              <a:buNone/>
+            </a:pPr>
+            <a:r>
+              <a:rPr lang="en-US" sz="850" dirty="0">
+                <a:solidFill>
+                  <a:srgbClr val="475569"/>
+                </a:solidFill>
+                <a:latin typeface="Calibri" pitchFamily="34" charset="0"/>
+                <a:ea typeface="Calibri" pitchFamily="34" charset="-122"/>
+                <a:cs typeface="Calibri" pitchFamily="34" charset="-120"/>
+              </a:rPr>
+              <a:t>in a way</a:t>
+            </a:r>
+            <a:endParaRPr lang="en-US" sz="850" dirty="0"/>
+          </a:p>
+        </p:txBody>
+      </p:sp>
+      <p:sp>
+        <p:nvSpPr>
+          <p:cNvPr id="25" name="Shape 23"/>
           <p:cNvSpPr/>
           <p:nvPr/>
         </p:nvSpPr>
@@ -18947,7 +19059,7 @@
       </p:sp>
       <p:sp>
         <p:nvSpPr>
-          <p:cNvPr id="23" name="Text 21"/>
+          <p:cNvPr id="26" name="Text 24"/>
           <p:cNvSpPr/>
           <p:nvPr/>
         </p:nvSpPr>
@@ -18986,7 +19098,7 @@
       </p:sp>
       <p:sp>
         <p:nvSpPr>
-          <p:cNvPr id="24" name="Shape 22"/>
+          <p:cNvPr id="27" name="Shape 25"/>
           <p:cNvSpPr/>
           <p:nvPr/>
         </p:nvSpPr>
@@ -19013,7 +19125,7 @@
       </p:sp>
       <p:sp>
         <p:nvSpPr>
-          <p:cNvPr id="25" name="Text 23"/>
+          <p:cNvPr id="28" name="Text 26"/>
           <p:cNvSpPr/>
           <p:nvPr/>
         </p:nvSpPr>
@@ -19052,7 +19164,7 @@
       </p:sp>
       <p:sp>
         <p:nvSpPr>
-          <p:cNvPr id="26" name="Shape 24"/>
+          <p:cNvPr id="29" name="Shape 27"/>
           <p:cNvSpPr/>
           <p:nvPr/>
         </p:nvSpPr>
@@ -19079,7 +19191,7 @@
       </p:sp>
       <p:sp>
         <p:nvSpPr>
-          <p:cNvPr id="27" name="Text 25"/>
+          <p:cNvPr id="30" name="Text 28"/>
           <p:cNvSpPr/>
           <p:nvPr/>
         </p:nvSpPr>
@@ -19118,7 +19230,7 @@
       </p:sp>
       <p:sp>
         <p:nvSpPr>
-          <p:cNvPr id="28" name="Shape 26"/>
+          <p:cNvPr id="31" name="Shape 29"/>
           <p:cNvSpPr/>
           <p:nvPr/>
         </p:nvSpPr>
@@ -19145,7 +19257,7 @@
       </p:sp>
       <p:sp>
         <p:nvSpPr>
-          <p:cNvPr id="29" name="Text 27"/>
+          <p:cNvPr id="32" name="Text 30"/>
           <p:cNvSpPr/>
           <p:nvPr/>
         </p:nvSpPr>
@@ -19468,7 +19580,7 @@
                 <a:ea typeface="Calibri" pitchFamily="34" charset="-122"/>
                 <a:cs typeface="Calibri" pitchFamily="34" charset="-120"/>
               </a:rPr>
-              <a:t>Word Labs  •  wordlabs.app  •  Root: 'safe' = free from harm or danger</a:t>
+              <a:t>Word Labs  •  wordlabs.app  •  Root: 'safe' = free from danger</a:t>
             </a:r>
             <a:endParaRPr lang="en-US" sz="800" dirty="0"/>
           </a:p>
@@ -19607,7 +19719,7 @@
                 <a:ea typeface="Trebuchet MS" pitchFamily="34" charset="-122"/>
                 <a:cs typeface="Trebuchet MS" pitchFamily="34" charset="-120"/>
               </a:rPr>
-              <a:t>safeguard</a:t>
+              <a:t>unsafely</a:t>
             </a:r>
             <a:endParaRPr lang="en-US" sz="2800" dirty="0"/>
           </a:p>
@@ -19687,7 +19799,7 @@
         </p:nvSpPr>
         <p:spPr>
           <a:xfrm>
-            <a:off x="2938272" y="2258568"/>
+            <a:off x="2221992" y="2258568"/>
             <a:ext cx="1828800" cy="292608"/>
           </a:xfrm>
           <a:prstGeom prst="rect">
@@ -19696,11 +19808,11 @@
             </a:avLst>
           </a:prstGeom>
           <a:solidFill>
-            <a:srgbClr val="CCFBF1"/>
+            <a:srgbClr val="DDD6FE"/>
           </a:solidFill>
           <a:ln w="19050">
             <a:solidFill>
-              <a:srgbClr val="0D9488"/>
+              <a:srgbClr val="7C3AED"/>
             </a:solidFill>
             <a:prstDash val="solid"/>
           </a:ln>
@@ -19721,7 +19833,7 @@
         </p:nvSpPr>
         <p:spPr>
           <a:xfrm>
-            <a:off x="2938272" y="2258568"/>
+            <a:off x="2221992" y="2258568"/>
             <a:ext cx="1828800" cy="292608"/>
           </a:xfrm>
           <a:prstGeom prst="rect">
@@ -19740,13 +19852,13 @@
             <a:r>
               <a:rPr lang="en-US" sz="1300" b="1" dirty="0">
                 <a:solidFill>
-                  <a:srgbClr val="0F766E"/>
+                  <a:srgbClr val="4C1D95"/>
                 </a:solidFill>
                 <a:latin typeface="Trebuchet MS" pitchFamily="34" charset="0"/>
                 <a:ea typeface="Trebuchet MS" pitchFamily="34" charset="-122"/>
                 <a:cs typeface="Trebuchet MS" pitchFamily="34" charset="-120"/>
               </a:rPr>
-              <a:t>safe</a:t>
+              <a:t>un</a:t>
             </a:r>
             <a:endParaRPr lang="en-US" sz="1300" dirty="0"/>
           </a:p>
@@ -19760,7 +19872,7 @@
         </p:nvSpPr>
         <p:spPr>
           <a:xfrm>
-            <a:off x="2938272" y="2569464"/>
+            <a:off x="2221992" y="2569464"/>
             <a:ext cx="1828800" cy="201168"/>
           </a:xfrm>
           <a:prstGeom prst="rect">
@@ -19785,7 +19897,7 @@
                 <a:ea typeface="Calibri" pitchFamily="34" charset="-122"/>
                 <a:cs typeface="Calibri" pitchFamily="34" charset="-120"/>
               </a:rPr>
-              <a:t>free from harm</a:t>
+              <a:t>not</a:t>
             </a:r>
             <a:endParaRPr lang="en-US" sz="850" dirty="0"/>
           </a:p>
@@ -19799,7 +19911,7 @@
         </p:nvSpPr>
         <p:spPr>
           <a:xfrm>
-            <a:off x="5803392" y="2258568"/>
+            <a:off x="4370832" y="2258568"/>
             <a:ext cx="1828800" cy="292608"/>
           </a:xfrm>
           <a:prstGeom prst="rect">
@@ -19808,11 +19920,11 @@
             </a:avLst>
           </a:prstGeom>
           <a:solidFill>
-            <a:srgbClr val="FCE7F3"/>
+            <a:srgbClr val="CCFBF1"/>
           </a:solidFill>
           <a:ln w="19050">
             <a:solidFill>
-              <a:srgbClr val="DB2777"/>
+              <a:srgbClr val="0D9488"/>
             </a:solidFill>
             <a:prstDash val="solid"/>
           </a:ln>
@@ -19833,7 +19945,7 @@
         </p:nvSpPr>
         <p:spPr>
           <a:xfrm>
-            <a:off x="5803392" y="2258568"/>
+            <a:off x="4370832" y="2258568"/>
             <a:ext cx="1828800" cy="292608"/>
           </a:xfrm>
           <a:prstGeom prst="rect">
@@ -19852,13 +19964,13 @@
             <a:r>
               <a:rPr lang="en-US" sz="1300" b="1" dirty="0">
                 <a:solidFill>
-                  <a:srgbClr val="9D174D"/>
+                  <a:srgbClr val="0F766E"/>
                 </a:solidFill>
                 <a:latin typeface="Trebuchet MS" pitchFamily="34" charset="0"/>
                 <a:ea typeface="Trebuchet MS" pitchFamily="34" charset="-122"/>
                 <a:cs typeface="Trebuchet MS" pitchFamily="34" charset="-120"/>
               </a:rPr>
-              <a:t>guard</a:t>
+              <a:t>safe</a:t>
             </a:r>
             <a:endParaRPr lang="en-US" sz="1300" dirty="0"/>
           </a:p>
@@ -19872,7 +19984,7 @@
         </p:nvSpPr>
         <p:spPr>
           <a:xfrm>
-            <a:off x="5803392" y="2569464"/>
+            <a:off x="4370832" y="2569464"/>
             <a:ext cx="1828800" cy="201168"/>
           </a:xfrm>
           <a:prstGeom prst="rect">
@@ -19897,7 +20009,7 @@
                 <a:ea typeface="Calibri" pitchFamily="34" charset="-122"/>
                 <a:cs typeface="Calibri" pitchFamily="34" charset="-120"/>
               </a:rPr>
-              <a:t>to watch over or protect</a:t>
+              <a:t>free from danger</a:t>
             </a:r>
             <a:endParaRPr lang="en-US" sz="850" dirty="0"/>
           </a:p>
@@ -19906,6 +20018,118 @@
       <p:sp>
         <p:nvSpPr>
           <p:cNvPr id="22" name="Shape 20"/>
+          <p:cNvSpPr/>
+          <p:nvPr/>
+        </p:nvSpPr>
+        <p:spPr>
+          <a:xfrm>
+            <a:off x="6519672" y="2258568"/>
+            <a:ext cx="1828800" cy="292608"/>
+          </a:xfrm>
+          <a:prstGeom prst="rect">
+            <a:avLst>
+              <a:gd name="adj" fmla="val 25000"/>
+            </a:avLst>
+          </a:prstGeom>
+          <a:solidFill>
+            <a:srgbClr val="FCE7F3"/>
+          </a:solidFill>
+          <a:ln w="19050">
+            <a:solidFill>
+              <a:srgbClr val="DB2777"/>
+            </a:solidFill>
+            <a:prstDash val="solid"/>
+          </a:ln>
+          <a:effectLst>
+            <a:outerShdw sx="100000" sy="100000" kx="0" ky="0" algn="bl" rotWithShape="0" blurRad="101600" dist="38100" dir="8100000">
+              <a:srgbClr val="000000">
+                <a:alpha val="12000"/>
+              </a:srgbClr>
+            </a:outerShdw>
+          </a:effectLst>
+        </p:spPr>
+      </p:sp>
+      <p:sp>
+        <p:nvSpPr>
+          <p:cNvPr id="23" name="Text 21"/>
+          <p:cNvSpPr/>
+          <p:nvPr/>
+        </p:nvSpPr>
+        <p:spPr>
+          <a:xfrm>
+            <a:off x="6519672" y="2258568"/>
+            <a:ext cx="1828800" cy="292608"/>
+          </a:xfrm>
+          <a:prstGeom prst="rect">
+            <a:avLst/>
+          </a:prstGeom>
+          <a:noFill/>
+          <a:ln/>
+        </p:spPr>
+        <p:txBody>
+          <a:bodyPr wrap="square" lIns="0" tIns="0" rIns="0" bIns="0" rtlCol="0" anchor="ctr"/>
+          <a:lstStyle/>
+          <a:p>
+            <a:pPr algn="ctr" indent="0" marL="0">
+              <a:buNone/>
+            </a:pPr>
+            <a:r>
+              <a:rPr lang="en-US" sz="1300" b="1" dirty="0">
+                <a:solidFill>
+                  <a:srgbClr val="9D174D"/>
+                </a:solidFill>
+                <a:latin typeface="Trebuchet MS" pitchFamily="34" charset="0"/>
+                <a:ea typeface="Trebuchet MS" pitchFamily="34" charset="-122"/>
+                <a:cs typeface="Trebuchet MS" pitchFamily="34" charset="-120"/>
+              </a:rPr>
+              <a:t>ly</a:t>
+            </a:r>
+            <a:endParaRPr lang="en-US" sz="1300" dirty="0"/>
+          </a:p>
+        </p:txBody>
+      </p:sp>
+      <p:sp>
+        <p:nvSpPr>
+          <p:cNvPr id="24" name="Text 22"/>
+          <p:cNvSpPr/>
+          <p:nvPr/>
+        </p:nvSpPr>
+        <p:spPr>
+          <a:xfrm>
+            <a:off x="6519672" y="2569464"/>
+            <a:ext cx="1828800" cy="201168"/>
+          </a:xfrm>
+          <a:prstGeom prst="rect">
+            <a:avLst/>
+          </a:prstGeom>
+          <a:noFill/>
+          <a:ln/>
+        </p:spPr>
+        <p:txBody>
+          <a:bodyPr wrap="square" lIns="0" tIns="0" rIns="0" bIns="0" rtlCol="0" anchor="t"/>
+          <a:lstStyle/>
+          <a:p>
+            <a:pPr algn="ctr" indent="0" marL="0">
+              <a:buNone/>
+            </a:pPr>
+            <a:r>
+              <a:rPr lang="en-US" sz="850" dirty="0">
+                <a:solidFill>
+                  <a:srgbClr val="475569"/>
+                </a:solidFill>
+                <a:latin typeface="Calibri" pitchFamily="34" charset="0"/>
+                <a:ea typeface="Calibri" pitchFamily="34" charset="-122"/>
+                <a:cs typeface="Calibri" pitchFamily="34" charset="-120"/>
+              </a:rPr>
+              <a:t>in a way</a:t>
+            </a:r>
+            <a:endParaRPr lang="en-US" sz="850" dirty="0"/>
+          </a:p>
+        </p:txBody>
+      </p:sp>
+      <p:sp>
+        <p:nvSpPr>
+          <p:cNvPr id="25" name="Shape 23"/>
           <p:cNvSpPr/>
           <p:nvPr/>
         </p:nvSpPr>
@@ -19932,7 +20156,7 @@
       </p:sp>
       <p:sp>
         <p:nvSpPr>
-          <p:cNvPr id="23" name="Text 21"/>
+          <p:cNvPr id="26" name="Text 24"/>
           <p:cNvSpPr/>
           <p:nvPr/>
         </p:nvSpPr>
@@ -19971,7 +20195,7 @@
       </p:sp>
       <p:sp>
         <p:nvSpPr>
-          <p:cNvPr id="24" name="Shape 22"/>
+          <p:cNvPr id="27" name="Shape 25"/>
           <p:cNvSpPr/>
           <p:nvPr/>
         </p:nvSpPr>
@@ -19998,13 +20222,13 @@
       </p:sp>
       <p:sp>
         <p:nvSpPr>
-          <p:cNvPr id="25" name="Shape 23"/>
-          <p:cNvSpPr/>
-          <p:nvPr/>
-        </p:nvSpPr>
-        <p:spPr>
-          <a:xfrm>
-            <a:off x="2999232" y="3364992"/>
+          <p:cNvPr id="28" name="Shape 26"/>
+          <p:cNvSpPr/>
+          <p:nvPr/>
+        </p:nvSpPr>
+        <p:spPr>
+          <a:xfrm>
+            <a:off x="2313432" y="3364992"/>
             <a:ext cx="1645920" cy="475488"/>
           </a:xfrm>
           <a:prstGeom prst="rect">
@@ -20025,13 +20249,13 @@
       </p:sp>
       <p:sp>
         <p:nvSpPr>
-          <p:cNvPr id="26" name="Text 24"/>
-          <p:cNvSpPr/>
-          <p:nvPr/>
-        </p:nvSpPr>
-        <p:spPr>
-          <a:xfrm>
-            <a:off x="2999232" y="3364992"/>
+          <p:cNvPr id="29" name="Text 27"/>
+          <p:cNvSpPr/>
+          <p:nvPr/>
+        </p:nvSpPr>
+        <p:spPr>
+          <a:xfrm>
+            <a:off x="2313432" y="3364992"/>
             <a:ext cx="1645920" cy="475488"/>
           </a:xfrm>
           <a:prstGeom prst="rect">
@@ -20056,7 +20280,7 @@
                 <a:ea typeface="Trebuchet MS" pitchFamily="34" charset="-122"/>
                 <a:cs typeface="Trebuchet MS" pitchFamily="34" charset="-120"/>
               </a:rPr>
-              <a:t>safe</a:t>
+              <a:t>un</a:t>
             </a:r>
             <a:endParaRPr lang="en-US" sz="1400" dirty="0"/>
           </a:p>
@@ -20064,14 +20288,14 @@
       </p:sp>
       <p:sp>
         <p:nvSpPr>
-          <p:cNvPr id="27" name="Text 25"/>
-          <p:cNvSpPr/>
-          <p:nvPr/>
-        </p:nvSpPr>
-        <p:spPr>
-          <a:xfrm>
-            <a:off x="4645152" y="3364992"/>
-            <a:ext cx="1097280" cy="475488"/>
+          <p:cNvPr id="30" name="Text 28"/>
+          <p:cNvSpPr/>
+          <p:nvPr/>
+        </p:nvSpPr>
+        <p:spPr>
+          <a:xfrm>
+            <a:off x="3959352" y="3364992"/>
+            <a:ext cx="411480" cy="475488"/>
           </a:xfrm>
           <a:prstGeom prst="rect">
             <a:avLst/>
@@ -20103,13 +20327,13 @@
       </p:sp>
       <p:sp>
         <p:nvSpPr>
-          <p:cNvPr id="28" name="Shape 26"/>
-          <p:cNvSpPr/>
-          <p:nvPr/>
-        </p:nvSpPr>
-        <p:spPr>
-          <a:xfrm>
-            <a:off x="5742432" y="3364992"/>
+          <p:cNvPr id="31" name="Shape 29"/>
+          <p:cNvSpPr/>
+          <p:nvPr/>
+        </p:nvSpPr>
+        <p:spPr>
+          <a:xfrm>
+            <a:off x="4370832" y="3364992"/>
             <a:ext cx="1645920" cy="475488"/>
           </a:xfrm>
           <a:prstGeom prst="rect">
@@ -20130,13 +20354,13 @@
       </p:sp>
       <p:sp>
         <p:nvSpPr>
-          <p:cNvPr id="29" name="Text 27"/>
-          <p:cNvSpPr/>
-          <p:nvPr/>
-        </p:nvSpPr>
-        <p:spPr>
-          <a:xfrm>
-            <a:off x="5742432" y="3364992"/>
+          <p:cNvPr id="32" name="Text 30"/>
+          <p:cNvSpPr/>
+          <p:nvPr/>
+        </p:nvSpPr>
+        <p:spPr>
+          <a:xfrm>
+            <a:off x="4370832" y="3364992"/>
             <a:ext cx="1645920" cy="475488"/>
           </a:xfrm>
           <a:prstGeom prst="rect">
@@ -20161,7 +20385,7 @@
                 <a:ea typeface="Trebuchet MS" pitchFamily="34" charset="-122"/>
                 <a:cs typeface="Trebuchet MS" pitchFamily="34" charset="-120"/>
               </a:rPr>
-              <a:t>guard</a:t>
+              <a:t>safe</a:t>
             </a:r>
             <a:endParaRPr lang="en-US" sz="1400" dirty="0"/>
           </a:p>
@@ -20169,7 +20393,112 @@
       </p:sp>
       <p:sp>
         <p:nvSpPr>
-          <p:cNvPr id="30" name="Shape 28"/>
+          <p:cNvPr id="33" name="Text 31"/>
+          <p:cNvSpPr/>
+          <p:nvPr/>
+        </p:nvSpPr>
+        <p:spPr>
+          <a:xfrm>
+            <a:off x="6016752" y="3364992"/>
+            <a:ext cx="411480" cy="475488"/>
+          </a:xfrm>
+          <a:prstGeom prst="rect">
+            <a:avLst/>
+          </a:prstGeom>
+          <a:noFill/>
+          <a:ln/>
+        </p:spPr>
+        <p:txBody>
+          <a:bodyPr wrap="square" lIns="0" tIns="0" rIns="0" bIns="0" rtlCol="0" anchor="ctr"/>
+          <a:lstStyle/>
+          <a:p>
+            <a:pPr algn="ctr" indent="0" marL="0">
+              <a:buNone/>
+            </a:pPr>
+            <a:r>
+              <a:rPr lang="en-US" sz="1600" b="1" dirty="0">
+                <a:solidFill>
+                  <a:srgbClr val="0D9488"/>
+                </a:solidFill>
+                <a:latin typeface="Trebuchet MS" pitchFamily="34" charset="0"/>
+                <a:ea typeface="Trebuchet MS" pitchFamily="34" charset="-122"/>
+                <a:cs typeface="Trebuchet MS" pitchFamily="34" charset="-120"/>
+              </a:rPr>
+              <a:t>·</a:t>
+            </a:r>
+            <a:endParaRPr lang="en-US" sz="1600" dirty="0"/>
+          </a:p>
+        </p:txBody>
+      </p:sp>
+      <p:sp>
+        <p:nvSpPr>
+          <p:cNvPr id="34" name="Shape 32"/>
+          <p:cNvSpPr/>
+          <p:nvPr/>
+        </p:nvSpPr>
+        <p:spPr>
+          <a:xfrm>
+            <a:off x="6428232" y="3364992"/>
+            <a:ext cx="1645920" cy="475488"/>
+          </a:xfrm>
+          <a:prstGeom prst="rect">
+            <a:avLst>
+              <a:gd name="adj" fmla="val 9615"/>
+            </a:avLst>
+          </a:prstGeom>
+          <a:solidFill>
+            <a:srgbClr val="FFFFFF"/>
+          </a:solidFill>
+          <a:ln w="12700">
+            <a:solidFill>
+              <a:srgbClr val="0D9488"/>
+            </a:solidFill>
+            <a:prstDash val="solid"/>
+          </a:ln>
+        </p:spPr>
+      </p:sp>
+      <p:sp>
+        <p:nvSpPr>
+          <p:cNvPr id="35" name="Text 33"/>
+          <p:cNvSpPr/>
+          <p:nvPr/>
+        </p:nvSpPr>
+        <p:spPr>
+          <a:xfrm>
+            <a:off x="6428232" y="3364992"/>
+            <a:ext cx="1645920" cy="475488"/>
+          </a:xfrm>
+          <a:prstGeom prst="rect">
+            <a:avLst/>
+          </a:prstGeom>
+          <a:noFill/>
+          <a:ln/>
+        </p:spPr>
+        <p:txBody>
+          <a:bodyPr wrap="square" lIns="0" tIns="0" rIns="0" bIns="0" rtlCol="0" anchor="ctr"/>
+          <a:lstStyle/>
+          <a:p>
+            <a:pPr algn="ctr" indent="0" marL="0">
+              <a:buNone/>
+            </a:pPr>
+            <a:r>
+              <a:rPr lang="en-US" sz="1400" b="1" dirty="0">
+                <a:solidFill>
+                  <a:srgbClr val="0D9488"/>
+                </a:solidFill>
+                <a:latin typeface="Trebuchet MS" pitchFamily="34" charset="0"/>
+                <a:ea typeface="Trebuchet MS" pitchFamily="34" charset="-122"/>
+                <a:cs typeface="Trebuchet MS" pitchFamily="34" charset="-120"/>
+              </a:rPr>
+              <a:t>ly</a:t>
+            </a:r>
+            <a:endParaRPr lang="en-US" sz="1400" dirty="0"/>
+          </a:p>
+        </p:txBody>
+      </p:sp>
+      <p:sp>
+        <p:nvSpPr>
+          <p:cNvPr id="36" name="Shape 34"/>
           <p:cNvSpPr/>
           <p:nvPr/>
         </p:nvSpPr>
@@ -20196,7 +20525,7 @@
       </p:sp>
       <p:sp>
         <p:nvSpPr>
-          <p:cNvPr id="31" name="Text 29"/>
+          <p:cNvPr id="37" name="Text 35"/>
           <p:cNvSpPr/>
           <p:nvPr/>
         </p:nvSpPr>
@@ -20235,7 +20564,7 @@
       </p:sp>
       <p:sp>
         <p:nvSpPr>
-          <p:cNvPr id="32" name="Shape 30"/>
+          <p:cNvPr id="38" name="Shape 36"/>
           <p:cNvSpPr/>
           <p:nvPr/>
         </p:nvSpPr>
@@ -20262,7 +20591,7 @@
       </p:sp>
       <p:sp>
         <p:nvSpPr>
-          <p:cNvPr id="33" name="Text 31"/>
+          <p:cNvPr id="39" name="Text 37"/>
           <p:cNvSpPr/>
           <p:nvPr/>
         </p:nvSpPr>
@@ -20585,7 +20914,7 @@
                 <a:ea typeface="Calibri" pitchFamily="34" charset="-122"/>
                 <a:cs typeface="Calibri" pitchFamily="34" charset="-120"/>
               </a:rPr>
-              <a:t>Word Labs  •  wordlabs.app  •  Root: 'safe' = free from harm or danger</a:t>
+              <a:t>Word Labs  •  wordlabs.app  •  Root: 'safe' = free from danger</a:t>
             </a:r>
             <a:endParaRPr lang="en-US" sz="800" dirty="0"/>
           </a:p>
@@ -20724,7 +21053,7 @@
                 <a:ea typeface="Trebuchet MS" pitchFamily="34" charset="-122"/>
                 <a:cs typeface="Trebuchet MS" pitchFamily="34" charset="-120"/>
               </a:rPr>
-              <a:t>safeguard</a:t>
+              <a:t>unsafely</a:t>
             </a:r>
             <a:endParaRPr lang="en-US" sz="2800" dirty="0"/>
           </a:p>
@@ -20804,7 +21133,7 @@
         </p:nvSpPr>
         <p:spPr>
           <a:xfrm>
-            <a:off x="2938272" y="2258568"/>
+            <a:off x="2221992" y="2258568"/>
             <a:ext cx="1828800" cy="292608"/>
           </a:xfrm>
           <a:prstGeom prst="rect">
@@ -20813,11 +21142,11 @@
             </a:avLst>
           </a:prstGeom>
           <a:solidFill>
-            <a:srgbClr val="CCFBF1"/>
+            <a:srgbClr val="DDD6FE"/>
           </a:solidFill>
           <a:ln w="19050">
             <a:solidFill>
-              <a:srgbClr val="0D9488"/>
+              <a:srgbClr val="7C3AED"/>
             </a:solidFill>
             <a:prstDash val="solid"/>
           </a:ln>
@@ -20838,7 +21167,7 @@
         </p:nvSpPr>
         <p:spPr>
           <a:xfrm>
-            <a:off x="2938272" y="2258568"/>
+            <a:off x="2221992" y="2258568"/>
             <a:ext cx="1828800" cy="292608"/>
           </a:xfrm>
           <a:prstGeom prst="rect">
@@ -20857,13 +21186,13 @@
             <a:r>
               <a:rPr lang="en-US" sz="1300" b="1" dirty="0">
                 <a:solidFill>
-                  <a:srgbClr val="0F766E"/>
+                  <a:srgbClr val="4C1D95"/>
                 </a:solidFill>
                 <a:latin typeface="Trebuchet MS" pitchFamily="34" charset="0"/>
                 <a:ea typeface="Trebuchet MS" pitchFamily="34" charset="-122"/>
                 <a:cs typeface="Trebuchet MS" pitchFamily="34" charset="-120"/>
               </a:rPr>
-              <a:t>safe</a:t>
+              <a:t>un</a:t>
             </a:r>
             <a:endParaRPr lang="en-US" sz="1300" dirty="0"/>
           </a:p>
@@ -20877,7 +21206,7 @@
         </p:nvSpPr>
         <p:spPr>
           <a:xfrm>
-            <a:off x="2938272" y="2569464"/>
+            <a:off x="2221992" y="2569464"/>
             <a:ext cx="1828800" cy="201168"/>
           </a:xfrm>
           <a:prstGeom prst="rect">
@@ -20902,7 +21231,7 @@
                 <a:ea typeface="Calibri" pitchFamily="34" charset="-122"/>
                 <a:cs typeface="Calibri" pitchFamily="34" charset="-120"/>
               </a:rPr>
-              <a:t>free from harm</a:t>
+              <a:t>not</a:t>
             </a:r>
             <a:endParaRPr lang="en-US" sz="850" dirty="0"/>
           </a:p>
@@ -20916,7 +21245,7 @@
         </p:nvSpPr>
         <p:spPr>
           <a:xfrm>
-            <a:off x="5803392" y="2258568"/>
+            <a:off x="4370832" y="2258568"/>
             <a:ext cx="1828800" cy="292608"/>
           </a:xfrm>
           <a:prstGeom prst="rect">
@@ -20925,11 +21254,11 @@
             </a:avLst>
           </a:prstGeom>
           <a:solidFill>
-            <a:srgbClr val="FCE7F3"/>
+            <a:srgbClr val="CCFBF1"/>
           </a:solidFill>
           <a:ln w="19050">
             <a:solidFill>
-              <a:srgbClr val="DB2777"/>
+              <a:srgbClr val="0D9488"/>
             </a:solidFill>
             <a:prstDash val="solid"/>
           </a:ln>
@@ -20950,7 +21279,7 @@
         </p:nvSpPr>
         <p:spPr>
           <a:xfrm>
-            <a:off x="5803392" y="2258568"/>
+            <a:off x="4370832" y="2258568"/>
             <a:ext cx="1828800" cy="292608"/>
           </a:xfrm>
           <a:prstGeom prst="rect">
@@ -20969,13 +21298,13 @@
             <a:r>
               <a:rPr lang="en-US" sz="1300" b="1" dirty="0">
                 <a:solidFill>
-                  <a:srgbClr val="9D174D"/>
+                  <a:srgbClr val="0F766E"/>
                 </a:solidFill>
                 <a:latin typeface="Trebuchet MS" pitchFamily="34" charset="0"/>
                 <a:ea typeface="Trebuchet MS" pitchFamily="34" charset="-122"/>
                 <a:cs typeface="Trebuchet MS" pitchFamily="34" charset="-120"/>
               </a:rPr>
-              <a:t>guard</a:t>
+              <a:t>safe</a:t>
             </a:r>
             <a:endParaRPr lang="en-US" sz="1300" dirty="0"/>
           </a:p>
@@ -20989,7 +21318,7 @@
         </p:nvSpPr>
         <p:spPr>
           <a:xfrm>
-            <a:off x="5803392" y="2569464"/>
+            <a:off x="4370832" y="2569464"/>
             <a:ext cx="1828800" cy="201168"/>
           </a:xfrm>
           <a:prstGeom prst="rect">
@@ -21014,7 +21343,7 @@
                 <a:ea typeface="Calibri" pitchFamily="34" charset="-122"/>
                 <a:cs typeface="Calibri" pitchFamily="34" charset="-120"/>
               </a:rPr>
-              <a:t>to watch over or protect</a:t>
+              <a:t>free from danger</a:t>
             </a:r>
             <a:endParaRPr lang="en-US" sz="850" dirty="0"/>
           </a:p>
@@ -21023,6 +21352,118 @@
       <p:sp>
         <p:nvSpPr>
           <p:cNvPr id="22" name="Shape 20"/>
+          <p:cNvSpPr/>
+          <p:nvPr/>
+        </p:nvSpPr>
+        <p:spPr>
+          <a:xfrm>
+            <a:off x="6519672" y="2258568"/>
+            <a:ext cx="1828800" cy="292608"/>
+          </a:xfrm>
+          <a:prstGeom prst="rect">
+            <a:avLst>
+              <a:gd name="adj" fmla="val 25000"/>
+            </a:avLst>
+          </a:prstGeom>
+          <a:solidFill>
+            <a:srgbClr val="FCE7F3"/>
+          </a:solidFill>
+          <a:ln w="19050">
+            <a:solidFill>
+              <a:srgbClr val="DB2777"/>
+            </a:solidFill>
+            <a:prstDash val="solid"/>
+          </a:ln>
+          <a:effectLst>
+            <a:outerShdw sx="100000" sy="100000" kx="0" ky="0" algn="bl" rotWithShape="0" blurRad="101600" dist="38100" dir="8100000">
+              <a:srgbClr val="000000">
+                <a:alpha val="12000"/>
+              </a:srgbClr>
+            </a:outerShdw>
+          </a:effectLst>
+        </p:spPr>
+      </p:sp>
+      <p:sp>
+        <p:nvSpPr>
+          <p:cNvPr id="23" name="Text 21"/>
+          <p:cNvSpPr/>
+          <p:nvPr/>
+        </p:nvSpPr>
+        <p:spPr>
+          <a:xfrm>
+            <a:off x="6519672" y="2258568"/>
+            <a:ext cx="1828800" cy="292608"/>
+          </a:xfrm>
+          <a:prstGeom prst="rect">
+            <a:avLst/>
+          </a:prstGeom>
+          <a:noFill/>
+          <a:ln/>
+        </p:spPr>
+        <p:txBody>
+          <a:bodyPr wrap="square" lIns="0" tIns="0" rIns="0" bIns="0" rtlCol="0" anchor="ctr"/>
+          <a:lstStyle/>
+          <a:p>
+            <a:pPr algn="ctr" indent="0" marL="0">
+              <a:buNone/>
+            </a:pPr>
+            <a:r>
+              <a:rPr lang="en-US" sz="1300" b="1" dirty="0">
+                <a:solidFill>
+                  <a:srgbClr val="9D174D"/>
+                </a:solidFill>
+                <a:latin typeface="Trebuchet MS" pitchFamily="34" charset="0"/>
+                <a:ea typeface="Trebuchet MS" pitchFamily="34" charset="-122"/>
+                <a:cs typeface="Trebuchet MS" pitchFamily="34" charset="-120"/>
+              </a:rPr>
+              <a:t>ly</a:t>
+            </a:r>
+            <a:endParaRPr lang="en-US" sz="1300" dirty="0"/>
+          </a:p>
+        </p:txBody>
+      </p:sp>
+      <p:sp>
+        <p:nvSpPr>
+          <p:cNvPr id="24" name="Text 22"/>
+          <p:cNvSpPr/>
+          <p:nvPr/>
+        </p:nvSpPr>
+        <p:spPr>
+          <a:xfrm>
+            <a:off x="6519672" y="2569464"/>
+            <a:ext cx="1828800" cy="201168"/>
+          </a:xfrm>
+          <a:prstGeom prst="rect">
+            <a:avLst/>
+          </a:prstGeom>
+          <a:noFill/>
+          <a:ln/>
+        </p:spPr>
+        <p:txBody>
+          <a:bodyPr wrap="square" lIns="0" tIns="0" rIns="0" bIns="0" rtlCol="0" anchor="t"/>
+          <a:lstStyle/>
+          <a:p>
+            <a:pPr algn="ctr" indent="0" marL="0">
+              <a:buNone/>
+            </a:pPr>
+            <a:r>
+              <a:rPr lang="en-US" sz="850" dirty="0">
+                <a:solidFill>
+                  <a:srgbClr val="475569"/>
+                </a:solidFill>
+                <a:latin typeface="Calibri" pitchFamily="34" charset="0"/>
+                <a:ea typeface="Calibri" pitchFamily="34" charset="-122"/>
+                <a:cs typeface="Calibri" pitchFamily="34" charset="-120"/>
+              </a:rPr>
+              <a:t>in a way</a:t>
+            </a:r>
+            <a:endParaRPr lang="en-US" sz="850" dirty="0"/>
+          </a:p>
+        </p:txBody>
+      </p:sp>
+      <p:sp>
+        <p:nvSpPr>
+          <p:cNvPr id="25" name="Shape 23"/>
           <p:cNvSpPr/>
           <p:nvPr/>
         </p:nvSpPr>
@@ -21049,7 +21490,7 @@
       </p:sp>
       <p:sp>
         <p:nvSpPr>
-          <p:cNvPr id="23" name="Text 21"/>
+          <p:cNvPr id="26" name="Text 24"/>
           <p:cNvSpPr/>
           <p:nvPr/>
         </p:nvSpPr>
@@ -21088,7 +21529,7 @@
       </p:sp>
       <p:sp>
         <p:nvSpPr>
-          <p:cNvPr id="24" name="Shape 22"/>
+          <p:cNvPr id="27" name="Shape 25"/>
           <p:cNvSpPr/>
           <p:nvPr/>
         </p:nvSpPr>
@@ -21115,13 +21556,13 @@
       </p:sp>
       <p:sp>
         <p:nvSpPr>
-          <p:cNvPr id="25" name="Shape 23"/>
-          <p:cNvSpPr/>
-          <p:nvPr/>
-        </p:nvSpPr>
-        <p:spPr>
-          <a:xfrm>
-            <a:off x="2999232" y="3364992"/>
+          <p:cNvPr id="28" name="Shape 26"/>
+          <p:cNvSpPr/>
+          <p:nvPr/>
+        </p:nvSpPr>
+        <p:spPr>
+          <a:xfrm>
+            <a:off x="2313432" y="3364992"/>
             <a:ext cx="1645920" cy="475488"/>
           </a:xfrm>
           <a:prstGeom prst="rect">
@@ -21142,13 +21583,13 @@
       </p:sp>
       <p:sp>
         <p:nvSpPr>
-          <p:cNvPr id="26" name="Text 24"/>
-          <p:cNvSpPr/>
-          <p:nvPr/>
-        </p:nvSpPr>
-        <p:spPr>
-          <a:xfrm>
-            <a:off x="2999232" y="3364992"/>
+          <p:cNvPr id="29" name="Text 27"/>
+          <p:cNvSpPr/>
+          <p:nvPr/>
+        </p:nvSpPr>
+        <p:spPr>
+          <a:xfrm>
+            <a:off x="2313432" y="3364992"/>
             <a:ext cx="1645920" cy="475488"/>
           </a:xfrm>
           <a:prstGeom prst="rect">
@@ -21173,7 +21614,7 @@
                 <a:ea typeface="Trebuchet MS" pitchFamily="34" charset="-122"/>
                 <a:cs typeface="Trebuchet MS" pitchFamily="34" charset="-120"/>
               </a:rPr>
-              <a:t>safe</a:t>
+              <a:t>un</a:t>
             </a:r>
             <a:endParaRPr lang="en-US" sz="1400" dirty="0"/>
           </a:p>
@@ -21181,14 +21622,14 @@
       </p:sp>
       <p:sp>
         <p:nvSpPr>
-          <p:cNvPr id="27" name="Text 25"/>
-          <p:cNvSpPr/>
-          <p:nvPr/>
-        </p:nvSpPr>
-        <p:spPr>
-          <a:xfrm>
-            <a:off x="4645152" y="3364992"/>
-            <a:ext cx="1097280" cy="475488"/>
+          <p:cNvPr id="30" name="Text 28"/>
+          <p:cNvSpPr/>
+          <p:nvPr/>
+        </p:nvSpPr>
+        <p:spPr>
+          <a:xfrm>
+            <a:off x="3959352" y="3364992"/>
+            <a:ext cx="411480" cy="475488"/>
           </a:xfrm>
           <a:prstGeom prst="rect">
             <a:avLst/>
@@ -21220,13 +21661,13 @@
       </p:sp>
       <p:sp>
         <p:nvSpPr>
-          <p:cNvPr id="28" name="Shape 26"/>
-          <p:cNvSpPr/>
-          <p:nvPr/>
-        </p:nvSpPr>
-        <p:spPr>
-          <a:xfrm>
-            <a:off x="5742432" y="3364992"/>
+          <p:cNvPr id="31" name="Shape 29"/>
+          <p:cNvSpPr/>
+          <p:nvPr/>
+        </p:nvSpPr>
+        <p:spPr>
+          <a:xfrm>
+            <a:off x="4370832" y="3364992"/>
             <a:ext cx="1645920" cy="475488"/>
           </a:xfrm>
           <a:prstGeom prst="rect">
@@ -21247,13 +21688,13 @@
       </p:sp>
       <p:sp>
         <p:nvSpPr>
-          <p:cNvPr id="29" name="Text 27"/>
-          <p:cNvSpPr/>
-          <p:nvPr/>
-        </p:nvSpPr>
-        <p:spPr>
-          <a:xfrm>
-            <a:off x="5742432" y="3364992"/>
+          <p:cNvPr id="32" name="Text 30"/>
+          <p:cNvSpPr/>
+          <p:nvPr/>
+        </p:nvSpPr>
+        <p:spPr>
+          <a:xfrm>
+            <a:off x="4370832" y="3364992"/>
             <a:ext cx="1645920" cy="475488"/>
           </a:xfrm>
           <a:prstGeom prst="rect">
@@ -21278,7 +21719,7 @@
                 <a:ea typeface="Trebuchet MS" pitchFamily="34" charset="-122"/>
                 <a:cs typeface="Trebuchet MS" pitchFamily="34" charset="-120"/>
               </a:rPr>
-              <a:t>guard</a:t>
+              <a:t>safe</a:t>
             </a:r>
             <a:endParaRPr lang="en-US" sz="1400" dirty="0"/>
           </a:p>
@@ -21286,7 +21727,112 @@
       </p:sp>
       <p:sp>
         <p:nvSpPr>
-          <p:cNvPr id="30" name="Shape 28"/>
+          <p:cNvPr id="33" name="Text 31"/>
+          <p:cNvSpPr/>
+          <p:nvPr/>
+        </p:nvSpPr>
+        <p:spPr>
+          <a:xfrm>
+            <a:off x="6016752" y="3364992"/>
+            <a:ext cx="411480" cy="475488"/>
+          </a:xfrm>
+          <a:prstGeom prst="rect">
+            <a:avLst/>
+          </a:prstGeom>
+          <a:noFill/>
+          <a:ln/>
+        </p:spPr>
+        <p:txBody>
+          <a:bodyPr wrap="square" lIns="0" tIns="0" rIns="0" bIns="0" rtlCol="0" anchor="ctr"/>
+          <a:lstStyle/>
+          <a:p>
+            <a:pPr algn="ctr" indent="0" marL="0">
+              <a:buNone/>
+            </a:pPr>
+            <a:r>
+              <a:rPr lang="en-US" sz="1600" b="1" dirty="0">
+                <a:solidFill>
+                  <a:srgbClr val="0D9488"/>
+                </a:solidFill>
+                <a:latin typeface="Trebuchet MS" pitchFamily="34" charset="0"/>
+                <a:ea typeface="Trebuchet MS" pitchFamily="34" charset="-122"/>
+                <a:cs typeface="Trebuchet MS" pitchFamily="34" charset="-120"/>
+              </a:rPr>
+              <a:t>·</a:t>
+            </a:r>
+            <a:endParaRPr lang="en-US" sz="1600" dirty="0"/>
+          </a:p>
+        </p:txBody>
+      </p:sp>
+      <p:sp>
+        <p:nvSpPr>
+          <p:cNvPr id="34" name="Shape 32"/>
+          <p:cNvSpPr/>
+          <p:nvPr/>
+        </p:nvSpPr>
+        <p:spPr>
+          <a:xfrm>
+            <a:off x="6428232" y="3364992"/>
+            <a:ext cx="1645920" cy="475488"/>
+          </a:xfrm>
+          <a:prstGeom prst="rect">
+            <a:avLst>
+              <a:gd name="adj" fmla="val 9615"/>
+            </a:avLst>
+          </a:prstGeom>
+          <a:solidFill>
+            <a:srgbClr val="FFFFFF"/>
+          </a:solidFill>
+          <a:ln w="12700">
+            <a:solidFill>
+              <a:srgbClr val="0D9488"/>
+            </a:solidFill>
+            <a:prstDash val="solid"/>
+          </a:ln>
+        </p:spPr>
+      </p:sp>
+      <p:sp>
+        <p:nvSpPr>
+          <p:cNvPr id="35" name="Text 33"/>
+          <p:cNvSpPr/>
+          <p:nvPr/>
+        </p:nvSpPr>
+        <p:spPr>
+          <a:xfrm>
+            <a:off x="6428232" y="3364992"/>
+            <a:ext cx="1645920" cy="475488"/>
+          </a:xfrm>
+          <a:prstGeom prst="rect">
+            <a:avLst/>
+          </a:prstGeom>
+          <a:noFill/>
+          <a:ln/>
+        </p:spPr>
+        <p:txBody>
+          <a:bodyPr wrap="square" lIns="0" tIns="0" rIns="0" bIns="0" rtlCol="0" anchor="ctr"/>
+          <a:lstStyle/>
+          <a:p>
+            <a:pPr algn="ctr" indent="0" marL="0">
+              <a:buNone/>
+            </a:pPr>
+            <a:r>
+              <a:rPr lang="en-US" sz="1400" b="1" dirty="0">
+                <a:solidFill>
+                  <a:srgbClr val="0D9488"/>
+                </a:solidFill>
+                <a:latin typeface="Trebuchet MS" pitchFamily="34" charset="0"/>
+                <a:ea typeface="Trebuchet MS" pitchFamily="34" charset="-122"/>
+                <a:cs typeface="Trebuchet MS" pitchFamily="34" charset="-120"/>
+              </a:rPr>
+              <a:t>ly</a:t>
+            </a:r>
+            <a:endParaRPr lang="en-US" sz="1400" dirty="0"/>
+          </a:p>
+        </p:txBody>
+      </p:sp>
+      <p:sp>
+        <p:nvSpPr>
+          <p:cNvPr id="36" name="Shape 34"/>
           <p:cNvSpPr/>
           <p:nvPr/>
         </p:nvSpPr>
@@ -21313,7 +21859,7 @@
       </p:sp>
       <p:sp>
         <p:nvSpPr>
-          <p:cNvPr id="31" name="Text 29"/>
+          <p:cNvPr id="37" name="Text 35"/>
           <p:cNvSpPr/>
           <p:nvPr/>
         </p:nvSpPr>
@@ -21352,7 +21898,7 @@
       </p:sp>
       <p:sp>
         <p:nvSpPr>
-          <p:cNvPr id="32" name="Shape 30"/>
+          <p:cNvPr id="38" name="Shape 36"/>
           <p:cNvSpPr/>
           <p:nvPr/>
         </p:nvSpPr>
@@ -21379,13 +21925,13 @@
       </p:sp>
       <p:sp>
         <p:nvSpPr>
-          <p:cNvPr id="33" name="Shape 31"/>
-          <p:cNvSpPr/>
-          <p:nvPr/>
-        </p:nvSpPr>
-        <p:spPr>
-          <a:xfrm>
-            <a:off x="2023872" y="4169664"/>
+          <p:cNvPr id="39" name="Shape 37"/>
+          <p:cNvSpPr/>
+          <p:nvPr/>
+        </p:nvSpPr>
+        <p:spPr>
+          <a:xfrm>
+            <a:off x="2124837" y="4169664"/>
             <a:ext cx="685800" cy="475488"/>
           </a:xfrm>
           <a:prstGeom prst="rect">
@@ -21406,13 +21952,13 @@
       </p:sp>
       <p:sp>
         <p:nvSpPr>
-          <p:cNvPr id="34" name="Text 32"/>
-          <p:cNvSpPr/>
-          <p:nvPr/>
-        </p:nvSpPr>
-        <p:spPr>
-          <a:xfrm>
-            <a:off x="2023872" y="4169664"/>
+          <p:cNvPr id="40" name="Text 38"/>
+          <p:cNvSpPr/>
+          <p:nvPr/>
+        </p:nvSpPr>
+        <p:spPr>
+          <a:xfrm>
+            <a:off x="2124837" y="4169664"/>
             <a:ext cx="685800" cy="475488"/>
           </a:xfrm>
           <a:prstGeom prst="rect">
@@ -21437,7 +21983,7 @@
                 <a:ea typeface="Trebuchet MS" pitchFamily="34" charset="-122"/>
                 <a:cs typeface="Trebuchet MS" pitchFamily="34" charset="-120"/>
               </a:rPr>
-              <a:t>s</a:t>
+              <a:t>u</a:t>
             </a:r>
             <a:endParaRPr lang="en-US" sz="900" dirty="0"/>
           </a:p>
@@ -21445,13 +21991,13 @@
       </p:sp>
       <p:sp>
         <p:nvSpPr>
-          <p:cNvPr id="35" name="Shape 33"/>
-          <p:cNvSpPr/>
-          <p:nvPr/>
-        </p:nvSpPr>
-        <p:spPr>
-          <a:xfrm>
-            <a:off x="2831592" y="4169664"/>
+          <p:cNvPr id="41" name="Shape 39"/>
+          <p:cNvSpPr/>
+          <p:nvPr/>
+        </p:nvSpPr>
+        <p:spPr>
+          <a:xfrm>
+            <a:off x="3033522" y="4169664"/>
             <a:ext cx="685800" cy="475488"/>
           </a:xfrm>
           <a:prstGeom prst="rect">
@@ -21472,13 +22018,13 @@
       </p:sp>
       <p:sp>
         <p:nvSpPr>
-          <p:cNvPr id="36" name="Text 34"/>
-          <p:cNvSpPr/>
-          <p:nvPr/>
-        </p:nvSpPr>
-        <p:spPr>
-          <a:xfrm>
-            <a:off x="2831592" y="4169664"/>
+          <p:cNvPr id="42" name="Text 40"/>
+          <p:cNvSpPr/>
+          <p:nvPr/>
+        </p:nvSpPr>
+        <p:spPr>
+          <a:xfrm>
+            <a:off x="3033522" y="4169664"/>
             <a:ext cx="685800" cy="475488"/>
           </a:xfrm>
           <a:prstGeom prst="rect">
@@ -21503,7 +22049,7 @@
                 <a:ea typeface="Trebuchet MS" pitchFamily="34" charset="-122"/>
                 <a:cs typeface="Trebuchet MS" pitchFamily="34" charset="-120"/>
               </a:rPr>
-              <a:t>a</a:t>
+              <a:t>n</a:t>
             </a:r>
             <a:endParaRPr lang="en-US" sz="900" dirty="0"/>
           </a:p>
@@ -21511,13 +22057,13 @@
       </p:sp>
       <p:sp>
         <p:nvSpPr>
-          <p:cNvPr id="37" name="Shape 35"/>
-          <p:cNvSpPr/>
-          <p:nvPr/>
-        </p:nvSpPr>
-        <p:spPr>
-          <a:xfrm>
-            <a:off x="3639312" y="4169664"/>
+          <p:cNvPr id="43" name="Shape 41"/>
+          <p:cNvSpPr/>
+          <p:nvPr/>
+        </p:nvSpPr>
+        <p:spPr>
+          <a:xfrm>
+            <a:off x="3942207" y="4169664"/>
             <a:ext cx="685800" cy="475488"/>
           </a:xfrm>
           <a:prstGeom prst="rect">
@@ -21538,13 +22084,13 @@
       </p:sp>
       <p:sp>
         <p:nvSpPr>
-          <p:cNvPr id="38" name="Text 36"/>
-          <p:cNvSpPr/>
-          <p:nvPr/>
-        </p:nvSpPr>
-        <p:spPr>
-          <a:xfrm>
-            <a:off x="3639312" y="4169664"/>
+          <p:cNvPr id="44" name="Text 42"/>
+          <p:cNvSpPr/>
+          <p:nvPr/>
+        </p:nvSpPr>
+        <p:spPr>
+          <a:xfrm>
+            <a:off x="3942207" y="4169664"/>
             <a:ext cx="685800" cy="475488"/>
           </a:xfrm>
           <a:prstGeom prst="rect">
@@ -21569,7 +22115,7 @@
                 <a:ea typeface="Trebuchet MS" pitchFamily="34" charset="-122"/>
                 <a:cs typeface="Trebuchet MS" pitchFamily="34" charset="-120"/>
               </a:rPr>
-              <a:t>f</a:t>
+              <a:t>s</a:t>
             </a:r>
             <a:endParaRPr lang="en-US" sz="900" dirty="0"/>
           </a:p>
@@ -21577,13 +22123,13 @@
       </p:sp>
       <p:sp>
         <p:nvSpPr>
-          <p:cNvPr id="39" name="Shape 37"/>
-          <p:cNvSpPr/>
-          <p:nvPr/>
-        </p:nvSpPr>
-        <p:spPr>
-          <a:xfrm>
-            <a:off x="4447032" y="4169664"/>
+          <p:cNvPr id="45" name="Shape 43"/>
+          <p:cNvSpPr/>
+          <p:nvPr/>
+        </p:nvSpPr>
+        <p:spPr>
+          <a:xfrm>
+            <a:off x="4850892" y="4169664"/>
             <a:ext cx="685800" cy="475488"/>
           </a:xfrm>
           <a:prstGeom prst="rect">
@@ -21604,13 +22150,13 @@
       </p:sp>
       <p:sp>
         <p:nvSpPr>
-          <p:cNvPr id="40" name="Text 38"/>
-          <p:cNvSpPr/>
-          <p:nvPr/>
-        </p:nvSpPr>
-        <p:spPr>
-          <a:xfrm>
-            <a:off x="4447032" y="4169664"/>
+          <p:cNvPr id="46" name="Text 44"/>
+          <p:cNvSpPr/>
+          <p:nvPr/>
+        </p:nvSpPr>
+        <p:spPr>
+          <a:xfrm>
+            <a:off x="4850892" y="4169664"/>
             <a:ext cx="685800" cy="475488"/>
           </a:xfrm>
           <a:prstGeom prst="rect">
@@ -21635,7 +22181,7 @@
                 <a:ea typeface="Trebuchet MS" pitchFamily="34" charset="-122"/>
                 <a:cs typeface="Trebuchet MS" pitchFamily="34" charset="-120"/>
               </a:rPr>
-              <a:t>e</a:t>
+              <a:t>a_e</a:t>
             </a:r>
             <a:endParaRPr lang="en-US" sz="900" dirty="0"/>
           </a:p>
@@ -21643,13 +22189,13 @@
       </p:sp>
       <p:sp>
         <p:nvSpPr>
-          <p:cNvPr id="41" name="Shape 39"/>
-          <p:cNvSpPr/>
-          <p:nvPr/>
-        </p:nvSpPr>
-        <p:spPr>
-          <a:xfrm>
-            <a:off x="5254752" y="4169664"/>
+          <p:cNvPr id="47" name="Shape 45"/>
+          <p:cNvSpPr/>
+          <p:nvPr/>
+        </p:nvSpPr>
+        <p:spPr>
+          <a:xfrm>
+            <a:off x="5759577" y="4169664"/>
             <a:ext cx="685800" cy="475488"/>
           </a:xfrm>
           <a:prstGeom prst="rect">
@@ -21670,13 +22216,13 @@
       </p:sp>
       <p:sp>
         <p:nvSpPr>
-          <p:cNvPr id="42" name="Text 40"/>
-          <p:cNvSpPr/>
-          <p:nvPr/>
-        </p:nvSpPr>
-        <p:spPr>
-          <a:xfrm>
-            <a:off x="5254752" y="4169664"/>
+          <p:cNvPr id="48" name="Text 46"/>
+          <p:cNvSpPr/>
+          <p:nvPr/>
+        </p:nvSpPr>
+        <p:spPr>
+          <a:xfrm>
+            <a:off x="5759577" y="4169664"/>
             <a:ext cx="685800" cy="475488"/>
           </a:xfrm>
           <a:prstGeom prst="rect">
@@ -21701,7 +22247,7 @@
                 <a:ea typeface="Trebuchet MS" pitchFamily="34" charset="-122"/>
                 <a:cs typeface="Trebuchet MS" pitchFamily="34" charset="-120"/>
               </a:rPr>
-              <a:t>g</a:t>
+              <a:t>f</a:t>
             </a:r>
             <a:endParaRPr lang="en-US" sz="900" dirty="0"/>
           </a:p>
@@ -21709,13 +22255,13 @@
       </p:sp>
       <p:sp>
         <p:nvSpPr>
-          <p:cNvPr id="43" name="Shape 41"/>
-          <p:cNvSpPr/>
-          <p:nvPr/>
-        </p:nvSpPr>
-        <p:spPr>
-          <a:xfrm>
-            <a:off x="6062472" y="4169664"/>
+          <p:cNvPr id="49" name="Shape 47"/>
+          <p:cNvSpPr/>
+          <p:nvPr/>
+        </p:nvSpPr>
+        <p:spPr>
+          <a:xfrm>
+            <a:off x="6668262" y="4169664"/>
             <a:ext cx="685800" cy="475488"/>
           </a:xfrm>
           <a:prstGeom prst="rect">
@@ -21736,13 +22282,13 @@
       </p:sp>
       <p:sp>
         <p:nvSpPr>
-          <p:cNvPr id="44" name="Text 42"/>
-          <p:cNvSpPr/>
-          <p:nvPr/>
-        </p:nvSpPr>
-        <p:spPr>
-          <a:xfrm>
-            <a:off x="6062472" y="4169664"/>
+          <p:cNvPr id="50" name="Text 48"/>
+          <p:cNvSpPr/>
+          <p:nvPr/>
+        </p:nvSpPr>
+        <p:spPr>
+          <a:xfrm>
+            <a:off x="6668262" y="4169664"/>
             <a:ext cx="685800" cy="475488"/>
           </a:xfrm>
           <a:prstGeom prst="rect">
@@ -21767,7 +22313,7 @@
                 <a:ea typeface="Trebuchet MS" pitchFamily="34" charset="-122"/>
                 <a:cs typeface="Trebuchet MS" pitchFamily="34" charset="-120"/>
               </a:rPr>
-              <a:t>u</a:t>
+              <a:t>l</a:t>
             </a:r>
             <a:endParaRPr lang="en-US" sz="900" dirty="0"/>
           </a:p>
@@ -21775,13 +22321,13 @@
       </p:sp>
       <p:sp>
         <p:nvSpPr>
-          <p:cNvPr id="45" name="Shape 43"/>
-          <p:cNvSpPr/>
-          <p:nvPr/>
-        </p:nvSpPr>
-        <p:spPr>
-          <a:xfrm>
-            <a:off x="6870192" y="4169664"/>
+          <p:cNvPr id="51" name="Shape 49"/>
+          <p:cNvSpPr/>
+          <p:nvPr/>
+        </p:nvSpPr>
+        <p:spPr>
+          <a:xfrm>
+            <a:off x="7576947" y="4169664"/>
             <a:ext cx="685800" cy="475488"/>
           </a:xfrm>
           <a:prstGeom prst="rect">
@@ -21802,13 +22348,13 @@
       </p:sp>
       <p:sp>
         <p:nvSpPr>
-          <p:cNvPr id="46" name="Text 44"/>
-          <p:cNvSpPr/>
-          <p:nvPr/>
-        </p:nvSpPr>
-        <p:spPr>
-          <a:xfrm>
-            <a:off x="6870192" y="4169664"/>
+          <p:cNvPr id="52" name="Text 50"/>
+          <p:cNvSpPr/>
+          <p:nvPr/>
+        </p:nvSpPr>
+        <p:spPr>
+          <a:xfrm>
+            <a:off x="7576947" y="4169664"/>
             <a:ext cx="685800" cy="475488"/>
           </a:xfrm>
           <a:prstGeom prst="rect">
@@ -21833,73 +22379,7 @@
                 <a:ea typeface="Trebuchet MS" pitchFamily="34" charset="-122"/>
                 <a:cs typeface="Trebuchet MS" pitchFamily="34" charset="-120"/>
               </a:rPr>
-              <a:t>ar</a:t>
-            </a:r>
-            <a:endParaRPr lang="en-US" sz="900" dirty="0"/>
-          </a:p>
-        </p:txBody>
-      </p:sp>
-      <p:sp>
-        <p:nvSpPr>
-          <p:cNvPr id="47" name="Shape 45"/>
-          <p:cNvSpPr/>
-          <p:nvPr/>
-        </p:nvSpPr>
-        <p:spPr>
-          <a:xfrm>
-            <a:off x="7677912" y="4169664"/>
-            <a:ext cx="685800" cy="475488"/>
-          </a:xfrm>
-          <a:prstGeom prst="rect">
-            <a:avLst>
-              <a:gd name="adj" fmla="val 7692"/>
-            </a:avLst>
-          </a:prstGeom>
-          <a:solidFill>
-            <a:srgbClr val="FFFFFF"/>
-          </a:solidFill>
-          <a:ln w="12700">
-            <a:solidFill>
-              <a:srgbClr val="DB2777"/>
-            </a:solidFill>
-            <a:prstDash val="solid"/>
-          </a:ln>
-        </p:spPr>
-      </p:sp>
-      <p:sp>
-        <p:nvSpPr>
-          <p:cNvPr id="48" name="Text 46"/>
-          <p:cNvSpPr/>
-          <p:nvPr/>
-        </p:nvSpPr>
-        <p:spPr>
-          <a:xfrm>
-            <a:off x="7677912" y="4169664"/>
-            <a:ext cx="685800" cy="475488"/>
-          </a:xfrm>
-          <a:prstGeom prst="rect">
-            <a:avLst/>
-          </a:prstGeom>
-          <a:noFill/>
-          <a:ln/>
-        </p:spPr>
-        <p:txBody>
-          <a:bodyPr wrap="square" lIns="0" tIns="0" rIns="0" bIns="0" rtlCol="0" anchor="ctr"/>
-          <a:lstStyle/>
-          <a:p>
-            <a:pPr algn="ctr" indent="0" marL="0">
-              <a:buNone/>
-            </a:pPr>
-            <a:r>
-              <a:rPr lang="en-US" sz="900" b="1" dirty="0">
-                <a:solidFill>
-                  <a:srgbClr val="9D174D"/>
-                </a:solidFill>
-                <a:latin typeface="Trebuchet MS" pitchFamily="34" charset="0"/>
-                <a:ea typeface="Trebuchet MS" pitchFamily="34" charset="-122"/>
-                <a:cs typeface="Trebuchet MS" pitchFamily="34" charset="-120"/>
-              </a:rPr>
-              <a:t>d</a:t>
+              <a:t>y</a:t>
             </a:r>
             <a:endParaRPr lang="en-US" sz="900" dirty="0"/>
           </a:p>
@@ -22191,7 +22671,7 @@
                 <a:ea typeface="Calibri" pitchFamily="34" charset="-122"/>
                 <a:cs typeface="Calibri" pitchFamily="34" charset="-120"/>
               </a:rPr>
-              <a:t>Word Labs  •  wordlabs.app  •  Root: 'safe' = free from harm or danger</a:t>
+              <a:t>Word Labs  •  wordlabs.app  •  Root: 'safe' = free from danger</a:t>
             </a:r>
             <a:endParaRPr lang="en-US" sz="800" dirty="0"/>
           </a:p>
@@ -22330,7 +22810,7 @@
                 <a:ea typeface="Trebuchet MS" pitchFamily="34" charset="-122"/>
                 <a:cs typeface="Trebuchet MS" pitchFamily="34" charset="-120"/>
               </a:rPr>
-              <a:t>unsafe</a:t>
+              <a:t>safety</a:t>
             </a:r>
             <a:endParaRPr lang="en-US" sz="2800" dirty="0"/>
           </a:p>
@@ -23018,7 +23498,7 @@
                 <a:ea typeface="Calibri" pitchFamily="34" charset="-122"/>
                 <a:cs typeface="Calibri" pitchFamily="34" charset="-120"/>
               </a:rPr>
-              <a:t>Word Labs  •  wordlabs.app  •  Root: 'safe' = free from harm or danger</a:t>
+              <a:t>Word Labs  •  wordlabs.app  •  Root: 'safe' = free from danger</a:t>
             </a:r>
             <a:endParaRPr lang="en-US" sz="800" dirty="0"/>
           </a:p>
@@ -23157,7 +23637,7 @@
                 <a:ea typeface="Trebuchet MS" pitchFamily="34" charset="-122"/>
                 <a:cs typeface="Trebuchet MS" pitchFamily="34" charset="-120"/>
               </a:rPr>
-              <a:t>unsafe</a:t>
+              <a:t>safety</a:t>
             </a:r>
             <a:endParaRPr lang="en-US" sz="2800" dirty="0"/>
           </a:p>
@@ -23246,11 +23726,11 @@
             </a:avLst>
           </a:prstGeom>
           <a:solidFill>
-            <a:srgbClr val="DDD6FE"/>
+            <a:srgbClr val="CCFBF1"/>
           </a:solidFill>
           <a:ln w="19050">
             <a:solidFill>
-              <a:srgbClr val="7C3AED"/>
+              <a:srgbClr val="0D9488"/>
             </a:solidFill>
             <a:prstDash val="solid"/>
           </a:ln>
@@ -23290,13 +23770,13 @@
             <a:r>
               <a:rPr lang="en-US" sz="1300" b="1" dirty="0">
                 <a:solidFill>
-                  <a:srgbClr val="4C1D95"/>
+                  <a:srgbClr val="0F766E"/>
                 </a:solidFill>
                 <a:latin typeface="Trebuchet MS" pitchFamily="34" charset="0"/>
                 <a:ea typeface="Trebuchet MS" pitchFamily="34" charset="-122"/>
                 <a:cs typeface="Trebuchet MS" pitchFamily="34" charset="-120"/>
               </a:rPr>
-              <a:t>un</a:t>
+              <a:t>safe</a:t>
             </a:r>
             <a:endParaRPr lang="en-US" sz="1300" dirty="0"/>
           </a:p>
@@ -23335,7 +23815,7 @@
                 <a:ea typeface="Calibri" pitchFamily="34" charset="-122"/>
                 <a:cs typeface="Calibri" pitchFamily="34" charset="-120"/>
               </a:rPr>
-              <a:t>not</a:t>
+              <a:t>free from danger</a:t>
             </a:r>
             <a:endParaRPr lang="en-US" sz="850" dirty="0"/>
           </a:p>
@@ -23358,11 +23838,11 @@
             </a:avLst>
           </a:prstGeom>
           <a:solidFill>
-            <a:srgbClr val="CCFBF1"/>
+            <a:srgbClr val="FCE7F3"/>
           </a:solidFill>
           <a:ln w="19050">
             <a:solidFill>
-              <a:srgbClr val="0D9488"/>
+              <a:srgbClr val="DB2777"/>
             </a:solidFill>
             <a:prstDash val="solid"/>
           </a:ln>
@@ -23402,13 +23882,13 @@
             <a:r>
               <a:rPr lang="en-US" sz="1300" b="1" dirty="0">
                 <a:solidFill>
-                  <a:srgbClr val="0F766E"/>
+                  <a:srgbClr val="9D174D"/>
                 </a:solidFill>
                 <a:latin typeface="Trebuchet MS" pitchFamily="34" charset="0"/>
                 <a:ea typeface="Trebuchet MS" pitchFamily="34" charset="-122"/>
                 <a:cs typeface="Trebuchet MS" pitchFamily="34" charset="-120"/>
               </a:rPr>
-              <a:t>safe</a:t>
+              <a:t>ty</a:t>
             </a:r>
             <a:endParaRPr lang="en-US" sz="1300" dirty="0"/>
           </a:p>
@@ -23447,7 +23927,7 @@
                 <a:ea typeface="Calibri" pitchFamily="34" charset="-122"/>
                 <a:cs typeface="Calibri" pitchFamily="34" charset="-120"/>
               </a:rPr>
-              <a:t>free from harm</a:t>
+              <a:t>state or quality</a:t>
             </a:r>
             <a:endParaRPr lang="en-US" sz="850" dirty="0"/>
           </a:p>
@@ -24003,7 +24483,7 @@
                 <a:ea typeface="Calibri" pitchFamily="34" charset="-122"/>
                 <a:cs typeface="Calibri" pitchFamily="34" charset="-120"/>
               </a:rPr>
-              <a:t>Word Labs  •  wordlabs.app  •  Root: 'safe' = free from harm or danger</a:t>
+              <a:t>Word Labs  •  wordlabs.app  •  Root: 'safe' = free from danger</a:t>
             </a:r>
             <a:endParaRPr lang="en-US" sz="800" dirty="0"/>
           </a:p>
@@ -24076,7 +24556,7 @@
                 <a:ea typeface="Trebuchet MS" pitchFamily="34" charset="-122"/>
                 <a:cs typeface="Trebuchet MS" pitchFamily="34" charset="-120"/>
               </a:rPr>
-              <a:t>We are learning that the root 'safe' means 'free from harm or danger'.</a:t>
+              <a:t>We are learning that the root 'safe' means 'free from danger'.</a:t>
             </a:r>
             <a:endParaRPr lang="en-US" sz="2000" dirty="0"/>
           </a:p>
@@ -24722,7 +25202,7 @@
                 <a:ea typeface="Calibri" pitchFamily="34" charset="-122"/>
                 <a:cs typeface="Calibri" pitchFamily="34" charset="-120"/>
               </a:rPr>
-              <a:t>Word Labs  •  wordlabs.app  •  Root: 'safe' = free from harm or danger</a:t>
+              <a:t>Word Labs  •  wordlabs.app  •  Root: 'safe' = free from danger</a:t>
             </a:r>
             <a:endParaRPr lang="en-US" sz="800" dirty="0"/>
           </a:p>
@@ -24861,7 +25341,7 @@
                 <a:ea typeface="Trebuchet MS" pitchFamily="34" charset="-122"/>
                 <a:cs typeface="Trebuchet MS" pitchFamily="34" charset="-120"/>
               </a:rPr>
-              <a:t>unsafe</a:t>
+              <a:t>safety</a:t>
             </a:r>
             <a:endParaRPr lang="en-US" sz="2800" dirty="0"/>
           </a:p>
@@ -24950,11 +25430,11 @@
             </a:avLst>
           </a:prstGeom>
           <a:solidFill>
-            <a:srgbClr val="DDD6FE"/>
+            <a:srgbClr val="CCFBF1"/>
           </a:solidFill>
           <a:ln w="19050">
             <a:solidFill>
-              <a:srgbClr val="7C3AED"/>
+              <a:srgbClr val="0D9488"/>
             </a:solidFill>
             <a:prstDash val="solid"/>
           </a:ln>
@@ -24994,13 +25474,13 @@
             <a:r>
               <a:rPr lang="en-US" sz="1300" b="1" dirty="0">
                 <a:solidFill>
-                  <a:srgbClr val="4C1D95"/>
+                  <a:srgbClr val="0F766E"/>
                 </a:solidFill>
                 <a:latin typeface="Trebuchet MS" pitchFamily="34" charset="0"/>
                 <a:ea typeface="Trebuchet MS" pitchFamily="34" charset="-122"/>
                 <a:cs typeface="Trebuchet MS" pitchFamily="34" charset="-120"/>
               </a:rPr>
-              <a:t>un</a:t>
+              <a:t>safe</a:t>
             </a:r>
             <a:endParaRPr lang="en-US" sz="1300" dirty="0"/>
           </a:p>
@@ -25039,7 +25519,7 @@
                 <a:ea typeface="Calibri" pitchFamily="34" charset="-122"/>
                 <a:cs typeface="Calibri" pitchFamily="34" charset="-120"/>
               </a:rPr>
-              <a:t>not</a:t>
+              <a:t>free from danger</a:t>
             </a:r>
             <a:endParaRPr lang="en-US" sz="850" dirty="0"/>
           </a:p>
@@ -25062,11 +25542,11 @@
             </a:avLst>
           </a:prstGeom>
           <a:solidFill>
-            <a:srgbClr val="CCFBF1"/>
+            <a:srgbClr val="FCE7F3"/>
           </a:solidFill>
           <a:ln w="19050">
             <a:solidFill>
-              <a:srgbClr val="0D9488"/>
+              <a:srgbClr val="DB2777"/>
             </a:solidFill>
             <a:prstDash val="solid"/>
           </a:ln>
@@ -25106,13 +25586,13 @@
             <a:r>
               <a:rPr lang="en-US" sz="1300" b="1" dirty="0">
                 <a:solidFill>
-                  <a:srgbClr val="0F766E"/>
+                  <a:srgbClr val="9D174D"/>
                 </a:solidFill>
                 <a:latin typeface="Trebuchet MS" pitchFamily="34" charset="0"/>
                 <a:ea typeface="Trebuchet MS" pitchFamily="34" charset="-122"/>
                 <a:cs typeface="Trebuchet MS" pitchFamily="34" charset="-120"/>
               </a:rPr>
-              <a:t>safe</a:t>
+              <a:t>ty</a:t>
             </a:r>
             <a:endParaRPr lang="en-US" sz="1300" dirty="0"/>
           </a:p>
@@ -25151,7 +25631,7 @@
                 <a:ea typeface="Calibri" pitchFamily="34" charset="-122"/>
                 <a:cs typeface="Calibri" pitchFamily="34" charset="-120"/>
               </a:rPr>
-              <a:t>free from harm</a:t>
+              <a:t>state or quality</a:t>
             </a:r>
             <a:endParaRPr lang="en-US" sz="850" dirty="0"/>
           </a:p>
@@ -25310,7 +25790,7 @@
                 <a:ea typeface="Trebuchet MS" pitchFamily="34" charset="-122"/>
                 <a:cs typeface="Trebuchet MS" pitchFamily="34" charset="-120"/>
               </a:rPr>
-              <a:t>un</a:t>
+              <a:t>safe</a:t>
             </a:r>
             <a:endParaRPr lang="en-US" sz="1400" dirty="0"/>
           </a:p>
@@ -25415,7 +25895,7 @@
                 <a:ea typeface="Trebuchet MS" pitchFamily="34" charset="-122"/>
                 <a:cs typeface="Trebuchet MS" pitchFamily="34" charset="-120"/>
               </a:rPr>
-              <a:t>safe</a:t>
+              <a:t>ty</a:t>
             </a:r>
             <a:endParaRPr lang="en-US" sz="1400" dirty="0"/>
           </a:p>
@@ -25839,7 +26319,7 @@
                 <a:ea typeface="Calibri" pitchFamily="34" charset="-122"/>
                 <a:cs typeface="Calibri" pitchFamily="34" charset="-120"/>
               </a:rPr>
-              <a:t>Word Labs  •  wordlabs.app  •  Root: 'safe' = free from harm or danger</a:t>
+              <a:t>Word Labs  •  wordlabs.app  •  Root: 'safe' = free from danger</a:t>
             </a:r>
             <a:endParaRPr lang="en-US" sz="800" dirty="0"/>
           </a:p>
@@ -25978,7 +26458,7 @@
                 <a:ea typeface="Trebuchet MS" pitchFamily="34" charset="-122"/>
                 <a:cs typeface="Trebuchet MS" pitchFamily="34" charset="-120"/>
               </a:rPr>
-              <a:t>unsafe</a:t>
+              <a:t>safety</a:t>
             </a:r>
             <a:endParaRPr lang="en-US" sz="2800" dirty="0"/>
           </a:p>
@@ -26067,11 +26547,11 @@
             </a:avLst>
           </a:prstGeom>
           <a:solidFill>
-            <a:srgbClr val="DDD6FE"/>
+            <a:srgbClr val="CCFBF1"/>
           </a:solidFill>
           <a:ln w="19050">
             <a:solidFill>
-              <a:srgbClr val="7C3AED"/>
+              <a:srgbClr val="0D9488"/>
             </a:solidFill>
             <a:prstDash val="solid"/>
           </a:ln>
@@ -26111,13 +26591,13 @@
             <a:r>
               <a:rPr lang="en-US" sz="1300" b="1" dirty="0">
                 <a:solidFill>
-                  <a:srgbClr val="4C1D95"/>
+                  <a:srgbClr val="0F766E"/>
                 </a:solidFill>
                 <a:latin typeface="Trebuchet MS" pitchFamily="34" charset="0"/>
                 <a:ea typeface="Trebuchet MS" pitchFamily="34" charset="-122"/>
                 <a:cs typeface="Trebuchet MS" pitchFamily="34" charset="-120"/>
               </a:rPr>
-              <a:t>un</a:t>
+              <a:t>safe</a:t>
             </a:r>
             <a:endParaRPr lang="en-US" sz="1300" dirty="0"/>
           </a:p>
@@ -26156,7 +26636,7 @@
                 <a:ea typeface="Calibri" pitchFamily="34" charset="-122"/>
                 <a:cs typeface="Calibri" pitchFamily="34" charset="-120"/>
               </a:rPr>
-              <a:t>not</a:t>
+              <a:t>free from danger</a:t>
             </a:r>
             <a:endParaRPr lang="en-US" sz="850" dirty="0"/>
           </a:p>
@@ -26179,11 +26659,11 @@
             </a:avLst>
           </a:prstGeom>
           <a:solidFill>
-            <a:srgbClr val="CCFBF1"/>
+            <a:srgbClr val="FCE7F3"/>
           </a:solidFill>
           <a:ln w="19050">
             <a:solidFill>
-              <a:srgbClr val="0D9488"/>
+              <a:srgbClr val="DB2777"/>
             </a:solidFill>
             <a:prstDash val="solid"/>
           </a:ln>
@@ -26223,13 +26703,13 @@
             <a:r>
               <a:rPr lang="en-US" sz="1300" b="1" dirty="0">
                 <a:solidFill>
-                  <a:srgbClr val="0F766E"/>
+                  <a:srgbClr val="9D174D"/>
                 </a:solidFill>
                 <a:latin typeface="Trebuchet MS" pitchFamily="34" charset="0"/>
                 <a:ea typeface="Trebuchet MS" pitchFamily="34" charset="-122"/>
                 <a:cs typeface="Trebuchet MS" pitchFamily="34" charset="-120"/>
               </a:rPr>
-              <a:t>safe</a:t>
+              <a:t>ty</a:t>
             </a:r>
             <a:endParaRPr lang="en-US" sz="1300" dirty="0"/>
           </a:p>
@@ -26268,7 +26748,7 @@
                 <a:ea typeface="Calibri" pitchFamily="34" charset="-122"/>
                 <a:cs typeface="Calibri" pitchFamily="34" charset="-120"/>
               </a:rPr>
-              <a:t>free from harm</a:t>
+              <a:t>state or quality</a:t>
             </a:r>
             <a:endParaRPr lang="en-US" sz="850" dirty="0"/>
           </a:p>
@@ -26427,7 +26907,7 @@
                 <a:ea typeface="Trebuchet MS" pitchFamily="34" charset="-122"/>
                 <a:cs typeface="Trebuchet MS" pitchFamily="34" charset="-120"/>
               </a:rPr>
-              <a:t>un</a:t>
+              <a:t>safe</a:t>
             </a:r>
             <a:endParaRPr lang="en-US" sz="1400" dirty="0"/>
           </a:p>
@@ -26532,7 +27012,7 @@
                 <a:ea typeface="Trebuchet MS" pitchFamily="34" charset="-122"/>
                 <a:cs typeface="Trebuchet MS" pitchFamily="34" charset="-120"/>
               </a:rPr>
-              <a:t>safe</a:t>
+              <a:t>ty</a:t>
             </a:r>
             <a:endParaRPr lang="en-US" sz="1400" dirty="0"/>
           </a:p>
@@ -26639,7 +27119,7 @@
         </p:nvSpPr>
         <p:spPr>
           <a:xfrm>
-            <a:off x="2254649" y="4169664"/>
+            <a:off x="2427732" y="4169664"/>
             <a:ext cx="685800" cy="475488"/>
           </a:xfrm>
           <a:prstGeom prst="rect">
@@ -26666,7 +27146,7 @@
         </p:nvSpPr>
         <p:spPr>
           <a:xfrm>
-            <a:off x="2254649" y="4169664"/>
+            <a:off x="2427732" y="4169664"/>
             <a:ext cx="685800" cy="475488"/>
           </a:xfrm>
           <a:prstGeom prst="rect">
@@ -26691,7 +27171,7 @@
                 <a:ea typeface="Trebuchet MS" pitchFamily="34" charset="-122"/>
                 <a:cs typeface="Trebuchet MS" pitchFamily="34" charset="-120"/>
               </a:rPr>
-              <a:t>u</a:t>
+              <a:t>s</a:t>
             </a:r>
             <a:endParaRPr lang="en-US" sz="900" dirty="0"/>
           </a:p>
@@ -26705,7 +27185,7 @@
         </p:nvSpPr>
         <p:spPr>
           <a:xfrm>
-            <a:off x="3293146" y="4169664"/>
+            <a:off x="3639312" y="4169664"/>
             <a:ext cx="685800" cy="475488"/>
           </a:xfrm>
           <a:prstGeom prst="rect">
@@ -26732,7 +27212,7 @@
         </p:nvSpPr>
         <p:spPr>
           <a:xfrm>
-            <a:off x="3293146" y="4169664"/>
+            <a:off x="3639312" y="4169664"/>
             <a:ext cx="685800" cy="475488"/>
           </a:xfrm>
           <a:prstGeom prst="rect">
@@ -26757,7 +27237,7 @@
                 <a:ea typeface="Trebuchet MS" pitchFamily="34" charset="-122"/>
                 <a:cs typeface="Trebuchet MS" pitchFamily="34" charset="-120"/>
               </a:rPr>
-              <a:t>n</a:t>
+              <a:t>a_e</a:t>
             </a:r>
             <a:endParaRPr lang="en-US" sz="900" dirty="0"/>
           </a:p>
@@ -26771,7 +27251,7 @@
         </p:nvSpPr>
         <p:spPr>
           <a:xfrm>
-            <a:off x="4331643" y="4169664"/>
+            <a:off x="4850892" y="4169664"/>
             <a:ext cx="685800" cy="475488"/>
           </a:xfrm>
           <a:prstGeom prst="rect">
@@ -26798,7 +27278,7 @@
         </p:nvSpPr>
         <p:spPr>
           <a:xfrm>
-            <a:off x="4331643" y="4169664"/>
+            <a:off x="4850892" y="4169664"/>
             <a:ext cx="685800" cy="475488"/>
           </a:xfrm>
           <a:prstGeom prst="rect">
@@ -26823,7 +27303,7 @@
                 <a:ea typeface="Trebuchet MS" pitchFamily="34" charset="-122"/>
                 <a:cs typeface="Trebuchet MS" pitchFamily="34" charset="-120"/>
               </a:rPr>
-              <a:t>s</a:t>
+              <a:t>f</a:t>
             </a:r>
             <a:endParaRPr lang="en-US" sz="900" dirty="0"/>
           </a:p>
@@ -26837,7 +27317,7 @@
         </p:nvSpPr>
         <p:spPr>
           <a:xfrm>
-            <a:off x="5370141" y="4169664"/>
+            <a:off x="6062472" y="4169664"/>
             <a:ext cx="685800" cy="475488"/>
           </a:xfrm>
           <a:prstGeom prst="rect">
@@ -26864,7 +27344,7 @@
         </p:nvSpPr>
         <p:spPr>
           <a:xfrm>
-            <a:off x="5370141" y="4169664"/>
+            <a:off x="6062472" y="4169664"/>
             <a:ext cx="685800" cy="475488"/>
           </a:xfrm>
           <a:prstGeom prst="rect">
@@ -26889,7 +27369,7 @@
                 <a:ea typeface="Trebuchet MS" pitchFamily="34" charset="-122"/>
                 <a:cs typeface="Trebuchet MS" pitchFamily="34" charset="-120"/>
               </a:rPr>
-              <a:t>a</a:t>
+              <a:t>t</a:t>
             </a:r>
             <a:endParaRPr lang="en-US" sz="900" dirty="0"/>
           </a:p>
@@ -26903,7 +27383,7 @@
         </p:nvSpPr>
         <p:spPr>
           <a:xfrm>
-            <a:off x="6408638" y="4169664"/>
+            <a:off x="7274052" y="4169664"/>
             <a:ext cx="685800" cy="475488"/>
           </a:xfrm>
           <a:prstGeom prst="rect">
@@ -26930,7 +27410,7 @@
         </p:nvSpPr>
         <p:spPr>
           <a:xfrm>
-            <a:off x="6408638" y="4169664"/>
+            <a:off x="7274052" y="4169664"/>
             <a:ext cx="685800" cy="475488"/>
           </a:xfrm>
           <a:prstGeom prst="rect">
@@ -26955,73 +27435,7 @@
                 <a:ea typeface="Trebuchet MS" pitchFamily="34" charset="-122"/>
                 <a:cs typeface="Trebuchet MS" pitchFamily="34" charset="-120"/>
               </a:rPr>
-              <a:t>f</a:t>
-            </a:r>
-            <a:endParaRPr lang="en-US" sz="900" dirty="0"/>
-          </a:p>
-        </p:txBody>
-      </p:sp>
-      <p:sp>
-        <p:nvSpPr>
-          <p:cNvPr id="43" name="Shape 41"/>
-          <p:cNvSpPr/>
-          <p:nvPr/>
-        </p:nvSpPr>
-        <p:spPr>
-          <a:xfrm>
-            <a:off x="7447135" y="4169664"/>
-            <a:ext cx="685800" cy="475488"/>
-          </a:xfrm>
-          <a:prstGeom prst="rect">
-            <a:avLst>
-              <a:gd name="adj" fmla="val 7692"/>
-            </a:avLst>
-          </a:prstGeom>
-          <a:solidFill>
-            <a:srgbClr val="FFFFFF"/>
-          </a:solidFill>
-          <a:ln w="12700">
-            <a:solidFill>
-              <a:srgbClr val="DB2777"/>
-            </a:solidFill>
-            <a:prstDash val="solid"/>
-          </a:ln>
-        </p:spPr>
-      </p:sp>
-      <p:sp>
-        <p:nvSpPr>
-          <p:cNvPr id="44" name="Text 42"/>
-          <p:cNvSpPr/>
-          <p:nvPr/>
-        </p:nvSpPr>
-        <p:spPr>
-          <a:xfrm>
-            <a:off x="7447135" y="4169664"/>
-            <a:ext cx="685800" cy="475488"/>
-          </a:xfrm>
-          <a:prstGeom prst="rect">
-            <a:avLst/>
-          </a:prstGeom>
-          <a:noFill/>
-          <a:ln/>
-        </p:spPr>
-        <p:txBody>
-          <a:bodyPr wrap="square" lIns="0" tIns="0" rIns="0" bIns="0" rtlCol="0" anchor="ctr"/>
-          <a:lstStyle/>
-          <a:p>
-            <a:pPr algn="ctr" indent="0" marL="0">
-              <a:buNone/>
-            </a:pPr>
-            <a:r>
-              <a:rPr lang="en-US" sz="900" b="1" dirty="0">
-                <a:solidFill>
-                  <a:srgbClr val="9D174D"/>
-                </a:solidFill>
-                <a:latin typeface="Trebuchet MS" pitchFamily="34" charset="0"/>
-                <a:ea typeface="Trebuchet MS" pitchFamily="34" charset="-122"/>
-                <a:cs typeface="Trebuchet MS" pitchFamily="34" charset="-120"/>
-              </a:rPr>
-              <a:t>e</a:t>
+              <a:t>y</a:t>
             </a:r>
             <a:endParaRPr lang="en-US" sz="900" dirty="0"/>
           </a:p>
@@ -27313,7 +27727,7 @@
                 <a:ea typeface="Calibri" pitchFamily="34" charset="-122"/>
                 <a:cs typeface="Calibri" pitchFamily="34" charset="-120"/>
               </a:rPr>
-              <a:t>Word Labs  •  wordlabs.app  •  Root: 'safe' = free from harm or danger</a:t>
+              <a:t>Word Labs  •  wordlabs.app  •  Root: 'safe' = free from danger</a:t>
             </a:r>
             <a:endParaRPr lang="en-US" sz="800" dirty="0"/>
           </a:p>
@@ -27452,7 +27866,7 @@
                 <a:ea typeface="Trebuchet MS" pitchFamily="34" charset="-122"/>
                 <a:cs typeface="Trebuchet MS" pitchFamily="34" charset="-120"/>
               </a:rPr>
-              <a:t>safest</a:t>
+              <a:t>safaris</a:t>
             </a:r>
             <a:endParaRPr lang="en-US" sz="2800" dirty="0"/>
           </a:p>
@@ -28140,7 +28554,7 @@
                 <a:ea typeface="Calibri" pitchFamily="34" charset="-122"/>
                 <a:cs typeface="Calibri" pitchFamily="34" charset="-120"/>
               </a:rPr>
-              <a:t>Word Labs  •  wordlabs.app  •  Root: 'safe' = free from harm or danger</a:t>
+              <a:t>Word Labs  •  wordlabs.app  •  Root: 'safe' = free from danger</a:t>
             </a:r>
             <a:endParaRPr lang="en-US" sz="800" dirty="0"/>
           </a:p>
@@ -28279,7 +28693,7 @@
                 <a:ea typeface="Trebuchet MS" pitchFamily="34" charset="-122"/>
                 <a:cs typeface="Trebuchet MS" pitchFamily="34" charset="-120"/>
               </a:rPr>
-              <a:t>safest</a:t>
+              <a:t>safaris</a:t>
             </a:r>
             <a:endParaRPr lang="en-US" sz="2800" dirty="0"/>
           </a:p>
@@ -28359,7 +28773,7 @@
         </p:nvSpPr>
         <p:spPr>
           <a:xfrm>
-            <a:off x="2938272" y="2258568"/>
+            <a:off x="2221992" y="2258568"/>
             <a:ext cx="1828800" cy="292608"/>
           </a:xfrm>
           <a:prstGeom prst="rect">
@@ -28393,7 +28807,7 @@
         </p:nvSpPr>
         <p:spPr>
           <a:xfrm>
-            <a:off x="2938272" y="2258568"/>
+            <a:off x="2221992" y="2258568"/>
             <a:ext cx="1828800" cy="292608"/>
           </a:xfrm>
           <a:prstGeom prst="rect">
@@ -28432,7 +28846,7 @@
         </p:nvSpPr>
         <p:spPr>
           <a:xfrm>
-            <a:off x="2938272" y="2569464"/>
+            <a:off x="2221992" y="2569464"/>
             <a:ext cx="1828800" cy="201168"/>
           </a:xfrm>
           <a:prstGeom prst="rect">
@@ -28457,7 +28871,7 @@
                 <a:ea typeface="Calibri" pitchFamily="34" charset="-122"/>
                 <a:cs typeface="Calibri" pitchFamily="34" charset="-120"/>
               </a:rPr>
-              <a:t>free from harm</a:t>
+              <a:t>free from danger</a:t>
             </a:r>
             <a:endParaRPr lang="en-US" sz="850" dirty="0"/>
           </a:p>
@@ -28471,7 +28885,7 @@
         </p:nvSpPr>
         <p:spPr>
           <a:xfrm>
-            <a:off x="5803392" y="2258568"/>
+            <a:off x="4370832" y="2258568"/>
             <a:ext cx="1828800" cy="292608"/>
           </a:xfrm>
           <a:prstGeom prst="rect">
@@ -28480,11 +28894,11 @@
             </a:avLst>
           </a:prstGeom>
           <a:solidFill>
-            <a:srgbClr val="FCE7F3"/>
+            <a:srgbClr val="DDD6FE"/>
           </a:solidFill>
           <a:ln w="19050">
             <a:solidFill>
-              <a:srgbClr val="DB2777"/>
+              <a:srgbClr val="7C3AED"/>
             </a:solidFill>
             <a:prstDash val="solid"/>
           </a:ln>
@@ -28505,7 +28919,7 @@
         </p:nvSpPr>
         <p:spPr>
           <a:xfrm>
-            <a:off x="5803392" y="2258568"/>
+            <a:off x="4370832" y="2258568"/>
             <a:ext cx="1828800" cy="292608"/>
           </a:xfrm>
           <a:prstGeom prst="rect">
@@ -28524,13 +28938,13 @@
             <a:r>
               <a:rPr lang="en-US" sz="1300" b="1" dirty="0">
                 <a:solidFill>
-                  <a:srgbClr val="9D174D"/>
+                  <a:srgbClr val="4C1D95"/>
                 </a:solidFill>
                 <a:latin typeface="Trebuchet MS" pitchFamily="34" charset="0"/>
                 <a:ea typeface="Trebuchet MS" pitchFamily="34" charset="-122"/>
                 <a:cs typeface="Trebuchet MS" pitchFamily="34" charset="-120"/>
               </a:rPr>
-              <a:t>st</a:t>
+              <a:t>ary</a:t>
             </a:r>
             <a:endParaRPr lang="en-US" sz="1300" dirty="0"/>
           </a:p>
@@ -28544,7 +28958,7 @@
         </p:nvSpPr>
         <p:spPr>
           <a:xfrm>
-            <a:off x="5803392" y="2569464"/>
+            <a:off x="4370832" y="2569464"/>
             <a:ext cx="1828800" cy="201168"/>
           </a:xfrm>
           <a:prstGeom prst="rect">
@@ -28569,7 +28983,7 @@
                 <a:ea typeface="Calibri" pitchFamily="34" charset="-122"/>
                 <a:cs typeface="Calibri" pitchFamily="34" charset="-120"/>
               </a:rPr>
-              <a:t>most (superlative)</a:t>
+              <a:t>relating to; place associated with</a:t>
             </a:r>
             <a:endParaRPr lang="en-US" sz="850" dirty="0"/>
           </a:p>
@@ -28578,6 +28992,118 @@
       <p:sp>
         <p:nvSpPr>
           <p:cNvPr id="22" name="Shape 20"/>
+          <p:cNvSpPr/>
+          <p:nvPr/>
+        </p:nvSpPr>
+        <p:spPr>
+          <a:xfrm>
+            <a:off x="6519672" y="2258568"/>
+            <a:ext cx="1828800" cy="292608"/>
+          </a:xfrm>
+          <a:prstGeom prst="rect">
+            <a:avLst>
+              <a:gd name="adj" fmla="val 25000"/>
+            </a:avLst>
+          </a:prstGeom>
+          <a:solidFill>
+            <a:srgbClr val="FCE7F3"/>
+          </a:solidFill>
+          <a:ln w="19050">
+            <a:solidFill>
+              <a:srgbClr val="DB2777"/>
+            </a:solidFill>
+            <a:prstDash val="solid"/>
+          </a:ln>
+          <a:effectLst>
+            <a:outerShdw sx="100000" sy="100000" kx="0" ky="0" algn="bl" rotWithShape="0" blurRad="101600" dist="38100" dir="8100000">
+              <a:srgbClr val="000000">
+                <a:alpha val="12000"/>
+              </a:srgbClr>
+            </a:outerShdw>
+          </a:effectLst>
+        </p:spPr>
+      </p:sp>
+      <p:sp>
+        <p:nvSpPr>
+          <p:cNvPr id="23" name="Text 21"/>
+          <p:cNvSpPr/>
+          <p:nvPr/>
+        </p:nvSpPr>
+        <p:spPr>
+          <a:xfrm>
+            <a:off x="6519672" y="2258568"/>
+            <a:ext cx="1828800" cy="292608"/>
+          </a:xfrm>
+          <a:prstGeom prst="rect">
+            <a:avLst/>
+          </a:prstGeom>
+          <a:noFill/>
+          <a:ln/>
+        </p:spPr>
+        <p:txBody>
+          <a:bodyPr wrap="square" lIns="0" tIns="0" rIns="0" bIns="0" rtlCol="0" anchor="ctr"/>
+          <a:lstStyle/>
+          <a:p>
+            <a:pPr algn="ctr" indent="0" marL="0">
+              <a:buNone/>
+            </a:pPr>
+            <a:r>
+              <a:rPr lang="en-US" sz="1300" b="1" dirty="0">
+                <a:solidFill>
+                  <a:srgbClr val="9D174D"/>
+                </a:solidFill>
+                <a:latin typeface="Trebuchet MS" pitchFamily="34" charset="0"/>
+                <a:ea typeface="Trebuchet MS" pitchFamily="34" charset="-122"/>
+                <a:cs typeface="Trebuchet MS" pitchFamily="34" charset="-120"/>
+              </a:rPr>
+              <a:t>s</a:t>
+            </a:r>
+            <a:endParaRPr lang="en-US" sz="1300" dirty="0"/>
+          </a:p>
+        </p:txBody>
+      </p:sp>
+      <p:sp>
+        <p:nvSpPr>
+          <p:cNvPr id="24" name="Text 22"/>
+          <p:cNvSpPr/>
+          <p:nvPr/>
+        </p:nvSpPr>
+        <p:spPr>
+          <a:xfrm>
+            <a:off x="6519672" y="2569464"/>
+            <a:ext cx="1828800" cy="201168"/>
+          </a:xfrm>
+          <a:prstGeom prst="rect">
+            <a:avLst/>
+          </a:prstGeom>
+          <a:noFill/>
+          <a:ln/>
+        </p:spPr>
+        <p:txBody>
+          <a:bodyPr wrap="square" lIns="0" tIns="0" rIns="0" bIns="0" rtlCol="0" anchor="t"/>
+          <a:lstStyle/>
+          <a:p>
+            <a:pPr algn="ctr" indent="0" marL="0">
+              <a:buNone/>
+            </a:pPr>
+            <a:r>
+              <a:rPr lang="en-US" sz="850" dirty="0">
+                <a:solidFill>
+                  <a:srgbClr val="475569"/>
+                </a:solidFill>
+                <a:latin typeface="Calibri" pitchFamily="34" charset="0"/>
+                <a:ea typeface="Calibri" pitchFamily="34" charset="-122"/>
+                <a:cs typeface="Calibri" pitchFamily="34" charset="-120"/>
+              </a:rPr>
+              <a:t>plural or present tense</a:t>
+            </a:r>
+            <a:endParaRPr lang="en-US" sz="850" dirty="0"/>
+          </a:p>
+        </p:txBody>
+      </p:sp>
+      <p:sp>
+        <p:nvSpPr>
+          <p:cNvPr id="25" name="Shape 23"/>
           <p:cNvSpPr/>
           <p:nvPr/>
         </p:nvSpPr>
@@ -28604,7 +29130,7 @@
       </p:sp>
       <p:sp>
         <p:nvSpPr>
-          <p:cNvPr id="23" name="Text 21"/>
+          <p:cNvPr id="26" name="Text 24"/>
           <p:cNvSpPr/>
           <p:nvPr/>
         </p:nvSpPr>
@@ -28643,7 +29169,7 @@
       </p:sp>
       <p:sp>
         <p:nvSpPr>
-          <p:cNvPr id="24" name="Shape 22"/>
+          <p:cNvPr id="27" name="Shape 25"/>
           <p:cNvSpPr/>
           <p:nvPr/>
         </p:nvSpPr>
@@ -28670,7 +29196,7 @@
       </p:sp>
       <p:sp>
         <p:nvSpPr>
-          <p:cNvPr id="25" name="Text 23"/>
+          <p:cNvPr id="28" name="Text 26"/>
           <p:cNvSpPr/>
           <p:nvPr/>
         </p:nvSpPr>
@@ -28709,7 +29235,7 @@
       </p:sp>
       <p:sp>
         <p:nvSpPr>
-          <p:cNvPr id="26" name="Shape 24"/>
+          <p:cNvPr id="29" name="Shape 27"/>
           <p:cNvSpPr/>
           <p:nvPr/>
         </p:nvSpPr>
@@ -28736,7 +29262,7 @@
       </p:sp>
       <p:sp>
         <p:nvSpPr>
-          <p:cNvPr id="27" name="Text 25"/>
+          <p:cNvPr id="30" name="Text 28"/>
           <p:cNvSpPr/>
           <p:nvPr/>
         </p:nvSpPr>
@@ -28775,7 +29301,7 @@
       </p:sp>
       <p:sp>
         <p:nvSpPr>
-          <p:cNvPr id="28" name="Shape 26"/>
+          <p:cNvPr id="31" name="Shape 29"/>
           <p:cNvSpPr/>
           <p:nvPr/>
         </p:nvSpPr>
@@ -28802,7 +29328,7 @@
       </p:sp>
       <p:sp>
         <p:nvSpPr>
-          <p:cNvPr id="29" name="Text 27"/>
+          <p:cNvPr id="32" name="Text 30"/>
           <p:cNvSpPr/>
           <p:nvPr/>
         </p:nvSpPr>
@@ -29125,7 +29651,7 @@
                 <a:ea typeface="Calibri" pitchFamily="34" charset="-122"/>
                 <a:cs typeface="Calibri" pitchFamily="34" charset="-120"/>
               </a:rPr>
-              <a:t>Word Labs  •  wordlabs.app  •  Root: 'safe' = free from harm or danger</a:t>
+              <a:t>Word Labs  •  wordlabs.app  •  Root: 'safe' = free from danger</a:t>
             </a:r>
             <a:endParaRPr lang="en-US" sz="800" dirty="0"/>
           </a:p>
@@ -29264,7 +29790,7 @@
                 <a:ea typeface="Trebuchet MS" pitchFamily="34" charset="-122"/>
                 <a:cs typeface="Trebuchet MS" pitchFamily="34" charset="-120"/>
               </a:rPr>
-              <a:t>safest</a:t>
+              <a:t>safaris</a:t>
             </a:r>
             <a:endParaRPr lang="en-US" sz="2800" dirty="0"/>
           </a:p>
@@ -29344,7 +29870,7 @@
         </p:nvSpPr>
         <p:spPr>
           <a:xfrm>
-            <a:off x="2938272" y="2258568"/>
+            <a:off x="2221992" y="2258568"/>
             <a:ext cx="1828800" cy="292608"/>
           </a:xfrm>
           <a:prstGeom prst="rect">
@@ -29378,7 +29904,7 @@
         </p:nvSpPr>
         <p:spPr>
           <a:xfrm>
-            <a:off x="2938272" y="2258568"/>
+            <a:off x="2221992" y="2258568"/>
             <a:ext cx="1828800" cy="292608"/>
           </a:xfrm>
           <a:prstGeom prst="rect">
@@ -29417,7 +29943,7 @@
         </p:nvSpPr>
         <p:spPr>
           <a:xfrm>
-            <a:off x="2938272" y="2569464"/>
+            <a:off x="2221992" y="2569464"/>
             <a:ext cx="1828800" cy="201168"/>
           </a:xfrm>
           <a:prstGeom prst="rect">
@@ -29442,7 +29968,7 @@
                 <a:ea typeface="Calibri" pitchFamily="34" charset="-122"/>
                 <a:cs typeface="Calibri" pitchFamily="34" charset="-120"/>
               </a:rPr>
-              <a:t>free from harm</a:t>
+              <a:t>free from danger</a:t>
             </a:r>
             <a:endParaRPr lang="en-US" sz="850" dirty="0"/>
           </a:p>
@@ -29456,7 +29982,7 @@
         </p:nvSpPr>
         <p:spPr>
           <a:xfrm>
-            <a:off x="5803392" y="2258568"/>
+            <a:off x="4370832" y="2258568"/>
             <a:ext cx="1828800" cy="292608"/>
           </a:xfrm>
           <a:prstGeom prst="rect">
@@ -29465,11 +29991,11 @@
             </a:avLst>
           </a:prstGeom>
           <a:solidFill>
-            <a:srgbClr val="FCE7F3"/>
+            <a:srgbClr val="DDD6FE"/>
           </a:solidFill>
           <a:ln w="19050">
             <a:solidFill>
-              <a:srgbClr val="DB2777"/>
+              <a:srgbClr val="7C3AED"/>
             </a:solidFill>
             <a:prstDash val="solid"/>
           </a:ln>
@@ -29490,7 +30016,7 @@
         </p:nvSpPr>
         <p:spPr>
           <a:xfrm>
-            <a:off x="5803392" y="2258568"/>
+            <a:off x="4370832" y="2258568"/>
             <a:ext cx="1828800" cy="292608"/>
           </a:xfrm>
           <a:prstGeom prst="rect">
@@ -29509,13 +30035,13 @@
             <a:r>
               <a:rPr lang="en-US" sz="1300" b="1" dirty="0">
                 <a:solidFill>
-                  <a:srgbClr val="9D174D"/>
+                  <a:srgbClr val="4C1D95"/>
                 </a:solidFill>
                 <a:latin typeface="Trebuchet MS" pitchFamily="34" charset="0"/>
                 <a:ea typeface="Trebuchet MS" pitchFamily="34" charset="-122"/>
                 <a:cs typeface="Trebuchet MS" pitchFamily="34" charset="-120"/>
               </a:rPr>
-              <a:t>st</a:t>
+              <a:t>ary</a:t>
             </a:r>
             <a:endParaRPr lang="en-US" sz="1300" dirty="0"/>
           </a:p>
@@ -29529,7 +30055,7 @@
         </p:nvSpPr>
         <p:spPr>
           <a:xfrm>
-            <a:off x="5803392" y="2569464"/>
+            <a:off x="4370832" y="2569464"/>
             <a:ext cx="1828800" cy="201168"/>
           </a:xfrm>
           <a:prstGeom prst="rect">
@@ -29554,7 +30080,7 @@
                 <a:ea typeface="Calibri" pitchFamily="34" charset="-122"/>
                 <a:cs typeface="Calibri" pitchFamily="34" charset="-120"/>
               </a:rPr>
-              <a:t>most (superlative)</a:t>
+              <a:t>relating to; place associated with</a:t>
             </a:r>
             <a:endParaRPr lang="en-US" sz="850" dirty="0"/>
           </a:p>
@@ -29563,6 +30089,118 @@
       <p:sp>
         <p:nvSpPr>
           <p:cNvPr id="22" name="Shape 20"/>
+          <p:cNvSpPr/>
+          <p:nvPr/>
+        </p:nvSpPr>
+        <p:spPr>
+          <a:xfrm>
+            <a:off x="6519672" y="2258568"/>
+            <a:ext cx="1828800" cy="292608"/>
+          </a:xfrm>
+          <a:prstGeom prst="rect">
+            <a:avLst>
+              <a:gd name="adj" fmla="val 25000"/>
+            </a:avLst>
+          </a:prstGeom>
+          <a:solidFill>
+            <a:srgbClr val="FCE7F3"/>
+          </a:solidFill>
+          <a:ln w="19050">
+            <a:solidFill>
+              <a:srgbClr val="DB2777"/>
+            </a:solidFill>
+            <a:prstDash val="solid"/>
+          </a:ln>
+          <a:effectLst>
+            <a:outerShdw sx="100000" sy="100000" kx="0" ky="0" algn="bl" rotWithShape="0" blurRad="101600" dist="38100" dir="8100000">
+              <a:srgbClr val="000000">
+                <a:alpha val="12000"/>
+              </a:srgbClr>
+            </a:outerShdw>
+          </a:effectLst>
+        </p:spPr>
+      </p:sp>
+      <p:sp>
+        <p:nvSpPr>
+          <p:cNvPr id="23" name="Text 21"/>
+          <p:cNvSpPr/>
+          <p:nvPr/>
+        </p:nvSpPr>
+        <p:spPr>
+          <a:xfrm>
+            <a:off x="6519672" y="2258568"/>
+            <a:ext cx="1828800" cy="292608"/>
+          </a:xfrm>
+          <a:prstGeom prst="rect">
+            <a:avLst/>
+          </a:prstGeom>
+          <a:noFill/>
+          <a:ln/>
+        </p:spPr>
+        <p:txBody>
+          <a:bodyPr wrap="square" lIns="0" tIns="0" rIns="0" bIns="0" rtlCol="0" anchor="ctr"/>
+          <a:lstStyle/>
+          <a:p>
+            <a:pPr algn="ctr" indent="0" marL="0">
+              <a:buNone/>
+            </a:pPr>
+            <a:r>
+              <a:rPr lang="en-US" sz="1300" b="1" dirty="0">
+                <a:solidFill>
+                  <a:srgbClr val="9D174D"/>
+                </a:solidFill>
+                <a:latin typeface="Trebuchet MS" pitchFamily="34" charset="0"/>
+                <a:ea typeface="Trebuchet MS" pitchFamily="34" charset="-122"/>
+                <a:cs typeface="Trebuchet MS" pitchFamily="34" charset="-120"/>
+              </a:rPr>
+              <a:t>s</a:t>
+            </a:r>
+            <a:endParaRPr lang="en-US" sz="1300" dirty="0"/>
+          </a:p>
+        </p:txBody>
+      </p:sp>
+      <p:sp>
+        <p:nvSpPr>
+          <p:cNvPr id="24" name="Text 22"/>
+          <p:cNvSpPr/>
+          <p:nvPr/>
+        </p:nvSpPr>
+        <p:spPr>
+          <a:xfrm>
+            <a:off x="6519672" y="2569464"/>
+            <a:ext cx="1828800" cy="201168"/>
+          </a:xfrm>
+          <a:prstGeom prst="rect">
+            <a:avLst/>
+          </a:prstGeom>
+          <a:noFill/>
+          <a:ln/>
+        </p:spPr>
+        <p:txBody>
+          <a:bodyPr wrap="square" lIns="0" tIns="0" rIns="0" bIns="0" rtlCol="0" anchor="t"/>
+          <a:lstStyle/>
+          <a:p>
+            <a:pPr algn="ctr" indent="0" marL="0">
+              <a:buNone/>
+            </a:pPr>
+            <a:r>
+              <a:rPr lang="en-US" sz="850" dirty="0">
+                <a:solidFill>
+                  <a:srgbClr val="475569"/>
+                </a:solidFill>
+                <a:latin typeface="Calibri" pitchFamily="34" charset="0"/>
+                <a:ea typeface="Calibri" pitchFamily="34" charset="-122"/>
+                <a:cs typeface="Calibri" pitchFamily="34" charset="-120"/>
+              </a:rPr>
+              <a:t>plural or present tense</a:t>
+            </a:r>
+            <a:endParaRPr lang="en-US" sz="850" dirty="0"/>
+          </a:p>
+        </p:txBody>
+      </p:sp>
+      <p:sp>
+        <p:nvSpPr>
+          <p:cNvPr id="25" name="Shape 23"/>
           <p:cNvSpPr/>
           <p:nvPr/>
         </p:nvSpPr>
@@ -29589,7 +30227,7 @@
       </p:sp>
       <p:sp>
         <p:nvSpPr>
-          <p:cNvPr id="23" name="Text 21"/>
+          <p:cNvPr id="26" name="Text 24"/>
           <p:cNvSpPr/>
           <p:nvPr/>
         </p:nvSpPr>
@@ -29628,7 +30266,7 @@
       </p:sp>
       <p:sp>
         <p:nvSpPr>
-          <p:cNvPr id="24" name="Shape 22"/>
+          <p:cNvPr id="27" name="Shape 25"/>
           <p:cNvSpPr/>
           <p:nvPr/>
         </p:nvSpPr>
@@ -29655,13 +30293,13 @@
       </p:sp>
       <p:sp>
         <p:nvSpPr>
-          <p:cNvPr id="25" name="Shape 23"/>
-          <p:cNvSpPr/>
-          <p:nvPr/>
-        </p:nvSpPr>
-        <p:spPr>
-          <a:xfrm>
-            <a:off x="2999232" y="3364992"/>
+          <p:cNvPr id="28" name="Shape 26"/>
+          <p:cNvSpPr/>
+          <p:nvPr/>
+        </p:nvSpPr>
+        <p:spPr>
+          <a:xfrm>
+            <a:off x="2313432" y="3364992"/>
             <a:ext cx="1645920" cy="475488"/>
           </a:xfrm>
           <a:prstGeom prst="rect">
@@ -29682,13 +30320,13 @@
       </p:sp>
       <p:sp>
         <p:nvSpPr>
-          <p:cNvPr id="26" name="Text 24"/>
-          <p:cNvSpPr/>
-          <p:nvPr/>
-        </p:nvSpPr>
-        <p:spPr>
-          <a:xfrm>
-            <a:off x="2999232" y="3364992"/>
+          <p:cNvPr id="29" name="Text 27"/>
+          <p:cNvSpPr/>
+          <p:nvPr/>
+        </p:nvSpPr>
+        <p:spPr>
+          <a:xfrm>
+            <a:off x="2313432" y="3364992"/>
             <a:ext cx="1645920" cy="475488"/>
           </a:xfrm>
           <a:prstGeom prst="rect">
@@ -29713,7 +30351,7 @@
                 <a:ea typeface="Trebuchet MS" pitchFamily="34" charset="-122"/>
                 <a:cs typeface="Trebuchet MS" pitchFamily="34" charset="-120"/>
               </a:rPr>
-              <a:t>saf</a:t>
+              <a:t>sa</a:t>
             </a:r>
             <a:endParaRPr lang="en-US" sz="1400" dirty="0"/>
           </a:p>
@@ -29721,14 +30359,14 @@
       </p:sp>
       <p:sp>
         <p:nvSpPr>
-          <p:cNvPr id="27" name="Text 25"/>
-          <p:cNvSpPr/>
-          <p:nvPr/>
-        </p:nvSpPr>
-        <p:spPr>
-          <a:xfrm>
-            <a:off x="4645152" y="3364992"/>
-            <a:ext cx="1097280" cy="475488"/>
+          <p:cNvPr id="30" name="Text 28"/>
+          <p:cNvSpPr/>
+          <p:nvPr/>
+        </p:nvSpPr>
+        <p:spPr>
+          <a:xfrm>
+            <a:off x="3959352" y="3364992"/>
+            <a:ext cx="411480" cy="475488"/>
           </a:xfrm>
           <a:prstGeom prst="rect">
             <a:avLst/>
@@ -29760,13 +30398,13 @@
       </p:sp>
       <p:sp>
         <p:nvSpPr>
-          <p:cNvPr id="28" name="Shape 26"/>
-          <p:cNvSpPr/>
-          <p:nvPr/>
-        </p:nvSpPr>
-        <p:spPr>
-          <a:xfrm>
-            <a:off x="5742432" y="3364992"/>
+          <p:cNvPr id="31" name="Shape 29"/>
+          <p:cNvSpPr/>
+          <p:nvPr/>
+        </p:nvSpPr>
+        <p:spPr>
+          <a:xfrm>
+            <a:off x="4370832" y="3364992"/>
             <a:ext cx="1645920" cy="475488"/>
           </a:xfrm>
           <a:prstGeom prst="rect">
@@ -29787,13 +30425,13 @@
       </p:sp>
       <p:sp>
         <p:nvSpPr>
-          <p:cNvPr id="29" name="Text 27"/>
-          <p:cNvSpPr/>
-          <p:nvPr/>
-        </p:nvSpPr>
-        <p:spPr>
-          <a:xfrm>
-            <a:off x="5742432" y="3364992"/>
+          <p:cNvPr id="32" name="Text 30"/>
+          <p:cNvSpPr/>
+          <p:nvPr/>
+        </p:nvSpPr>
+        <p:spPr>
+          <a:xfrm>
+            <a:off x="4370832" y="3364992"/>
             <a:ext cx="1645920" cy="475488"/>
           </a:xfrm>
           <a:prstGeom prst="rect">
@@ -29818,7 +30456,7 @@
                 <a:ea typeface="Trebuchet MS" pitchFamily="34" charset="-122"/>
                 <a:cs typeface="Trebuchet MS" pitchFamily="34" charset="-120"/>
               </a:rPr>
-              <a:t>est</a:t>
+              <a:t>fa</a:t>
             </a:r>
             <a:endParaRPr lang="en-US" sz="1400" dirty="0"/>
           </a:p>
@@ -29826,7 +30464,112 @@
       </p:sp>
       <p:sp>
         <p:nvSpPr>
-          <p:cNvPr id="30" name="Shape 28"/>
+          <p:cNvPr id="33" name="Text 31"/>
+          <p:cNvSpPr/>
+          <p:nvPr/>
+        </p:nvSpPr>
+        <p:spPr>
+          <a:xfrm>
+            <a:off x="6016752" y="3364992"/>
+            <a:ext cx="411480" cy="475488"/>
+          </a:xfrm>
+          <a:prstGeom prst="rect">
+            <a:avLst/>
+          </a:prstGeom>
+          <a:noFill/>
+          <a:ln/>
+        </p:spPr>
+        <p:txBody>
+          <a:bodyPr wrap="square" lIns="0" tIns="0" rIns="0" bIns="0" rtlCol="0" anchor="ctr"/>
+          <a:lstStyle/>
+          <a:p>
+            <a:pPr algn="ctr" indent="0" marL="0">
+              <a:buNone/>
+            </a:pPr>
+            <a:r>
+              <a:rPr lang="en-US" sz="1600" b="1" dirty="0">
+                <a:solidFill>
+                  <a:srgbClr val="0D9488"/>
+                </a:solidFill>
+                <a:latin typeface="Trebuchet MS" pitchFamily="34" charset="0"/>
+                <a:ea typeface="Trebuchet MS" pitchFamily="34" charset="-122"/>
+                <a:cs typeface="Trebuchet MS" pitchFamily="34" charset="-120"/>
+              </a:rPr>
+              <a:t>·</a:t>
+            </a:r>
+            <a:endParaRPr lang="en-US" sz="1600" dirty="0"/>
+          </a:p>
+        </p:txBody>
+      </p:sp>
+      <p:sp>
+        <p:nvSpPr>
+          <p:cNvPr id="34" name="Shape 32"/>
+          <p:cNvSpPr/>
+          <p:nvPr/>
+        </p:nvSpPr>
+        <p:spPr>
+          <a:xfrm>
+            <a:off x="6428232" y="3364992"/>
+            <a:ext cx="1645920" cy="475488"/>
+          </a:xfrm>
+          <a:prstGeom prst="rect">
+            <a:avLst>
+              <a:gd name="adj" fmla="val 9615"/>
+            </a:avLst>
+          </a:prstGeom>
+          <a:solidFill>
+            <a:srgbClr val="FFFFFF"/>
+          </a:solidFill>
+          <a:ln w="12700">
+            <a:solidFill>
+              <a:srgbClr val="0D9488"/>
+            </a:solidFill>
+            <a:prstDash val="solid"/>
+          </a:ln>
+        </p:spPr>
+      </p:sp>
+      <p:sp>
+        <p:nvSpPr>
+          <p:cNvPr id="35" name="Text 33"/>
+          <p:cNvSpPr/>
+          <p:nvPr/>
+        </p:nvSpPr>
+        <p:spPr>
+          <a:xfrm>
+            <a:off x="6428232" y="3364992"/>
+            <a:ext cx="1645920" cy="475488"/>
+          </a:xfrm>
+          <a:prstGeom prst="rect">
+            <a:avLst/>
+          </a:prstGeom>
+          <a:noFill/>
+          <a:ln/>
+        </p:spPr>
+        <p:txBody>
+          <a:bodyPr wrap="square" lIns="0" tIns="0" rIns="0" bIns="0" rtlCol="0" anchor="ctr"/>
+          <a:lstStyle/>
+          <a:p>
+            <a:pPr algn="ctr" indent="0" marL="0">
+              <a:buNone/>
+            </a:pPr>
+            <a:r>
+              <a:rPr lang="en-US" sz="1400" b="1" dirty="0">
+                <a:solidFill>
+                  <a:srgbClr val="0D9488"/>
+                </a:solidFill>
+                <a:latin typeface="Trebuchet MS" pitchFamily="34" charset="0"/>
+                <a:ea typeface="Trebuchet MS" pitchFamily="34" charset="-122"/>
+                <a:cs typeface="Trebuchet MS" pitchFamily="34" charset="-120"/>
+              </a:rPr>
+              <a:t>ris</a:t>
+            </a:r>
+            <a:endParaRPr lang="en-US" sz="1400" dirty="0"/>
+          </a:p>
+        </p:txBody>
+      </p:sp>
+      <p:sp>
+        <p:nvSpPr>
+          <p:cNvPr id="36" name="Shape 34"/>
           <p:cNvSpPr/>
           <p:nvPr/>
         </p:nvSpPr>
@@ -29853,7 +30596,7 @@
       </p:sp>
       <p:sp>
         <p:nvSpPr>
-          <p:cNvPr id="31" name="Text 29"/>
+          <p:cNvPr id="37" name="Text 35"/>
           <p:cNvSpPr/>
           <p:nvPr/>
         </p:nvSpPr>
@@ -29892,7 +30635,7 @@
       </p:sp>
       <p:sp>
         <p:nvSpPr>
-          <p:cNvPr id="32" name="Shape 30"/>
+          <p:cNvPr id="38" name="Shape 36"/>
           <p:cNvSpPr/>
           <p:nvPr/>
         </p:nvSpPr>
@@ -29919,7 +30662,7 @@
       </p:sp>
       <p:sp>
         <p:nvSpPr>
-          <p:cNvPr id="33" name="Text 31"/>
+          <p:cNvPr id="39" name="Text 37"/>
           <p:cNvSpPr/>
           <p:nvPr/>
         </p:nvSpPr>
@@ -30242,7 +30985,7 @@
                 <a:ea typeface="Calibri" pitchFamily="34" charset="-122"/>
                 <a:cs typeface="Calibri" pitchFamily="34" charset="-120"/>
               </a:rPr>
-              <a:t>Word Labs  •  wordlabs.app  •  Root: 'safe' = free from harm or danger</a:t>
+              <a:t>Word Labs  •  wordlabs.app  •  Root: 'safe' = free from danger</a:t>
             </a:r>
             <a:endParaRPr lang="en-US" sz="800" dirty="0"/>
           </a:p>
@@ -30381,7 +31124,7 @@
                 <a:ea typeface="Trebuchet MS" pitchFamily="34" charset="-122"/>
                 <a:cs typeface="Trebuchet MS" pitchFamily="34" charset="-120"/>
               </a:rPr>
-              <a:t>safest</a:t>
+              <a:t>safaris</a:t>
             </a:r>
             <a:endParaRPr lang="en-US" sz="2800" dirty="0"/>
           </a:p>
@@ -30461,7 +31204,7 @@
         </p:nvSpPr>
         <p:spPr>
           <a:xfrm>
-            <a:off x="2938272" y="2258568"/>
+            <a:off x="2221992" y="2258568"/>
             <a:ext cx="1828800" cy="292608"/>
           </a:xfrm>
           <a:prstGeom prst="rect">
@@ -30495,7 +31238,7 @@
         </p:nvSpPr>
         <p:spPr>
           <a:xfrm>
-            <a:off x="2938272" y="2258568"/>
+            <a:off x="2221992" y="2258568"/>
             <a:ext cx="1828800" cy="292608"/>
           </a:xfrm>
           <a:prstGeom prst="rect">
@@ -30534,7 +31277,7 @@
         </p:nvSpPr>
         <p:spPr>
           <a:xfrm>
-            <a:off x="2938272" y="2569464"/>
+            <a:off x="2221992" y="2569464"/>
             <a:ext cx="1828800" cy="201168"/>
           </a:xfrm>
           <a:prstGeom prst="rect">
@@ -30559,7 +31302,7 @@
                 <a:ea typeface="Calibri" pitchFamily="34" charset="-122"/>
                 <a:cs typeface="Calibri" pitchFamily="34" charset="-120"/>
               </a:rPr>
-              <a:t>free from harm</a:t>
+              <a:t>free from danger</a:t>
             </a:r>
             <a:endParaRPr lang="en-US" sz="850" dirty="0"/>
           </a:p>
@@ -30573,7 +31316,7 @@
         </p:nvSpPr>
         <p:spPr>
           <a:xfrm>
-            <a:off x="5803392" y="2258568"/>
+            <a:off x="4370832" y="2258568"/>
             <a:ext cx="1828800" cy="292608"/>
           </a:xfrm>
           <a:prstGeom prst="rect">
@@ -30582,11 +31325,11 @@
             </a:avLst>
           </a:prstGeom>
           <a:solidFill>
-            <a:srgbClr val="FCE7F3"/>
+            <a:srgbClr val="DDD6FE"/>
           </a:solidFill>
           <a:ln w="19050">
             <a:solidFill>
-              <a:srgbClr val="DB2777"/>
+              <a:srgbClr val="7C3AED"/>
             </a:solidFill>
             <a:prstDash val="solid"/>
           </a:ln>
@@ -30607,7 +31350,7 @@
         </p:nvSpPr>
         <p:spPr>
           <a:xfrm>
-            <a:off x="5803392" y="2258568"/>
+            <a:off x="4370832" y="2258568"/>
             <a:ext cx="1828800" cy="292608"/>
           </a:xfrm>
           <a:prstGeom prst="rect">
@@ -30626,13 +31369,13 @@
             <a:r>
               <a:rPr lang="en-US" sz="1300" b="1" dirty="0">
                 <a:solidFill>
-                  <a:srgbClr val="9D174D"/>
+                  <a:srgbClr val="4C1D95"/>
                 </a:solidFill>
                 <a:latin typeface="Trebuchet MS" pitchFamily="34" charset="0"/>
                 <a:ea typeface="Trebuchet MS" pitchFamily="34" charset="-122"/>
                 <a:cs typeface="Trebuchet MS" pitchFamily="34" charset="-120"/>
               </a:rPr>
-              <a:t>st</a:t>
+              <a:t>ary</a:t>
             </a:r>
             <a:endParaRPr lang="en-US" sz="1300" dirty="0"/>
           </a:p>
@@ -30646,7 +31389,7 @@
         </p:nvSpPr>
         <p:spPr>
           <a:xfrm>
-            <a:off x="5803392" y="2569464"/>
+            <a:off x="4370832" y="2569464"/>
             <a:ext cx="1828800" cy="201168"/>
           </a:xfrm>
           <a:prstGeom prst="rect">
@@ -30671,7 +31414,7 @@
                 <a:ea typeface="Calibri" pitchFamily="34" charset="-122"/>
                 <a:cs typeface="Calibri" pitchFamily="34" charset="-120"/>
               </a:rPr>
-              <a:t>most (superlative)</a:t>
+              <a:t>relating to; place associated with</a:t>
             </a:r>
             <a:endParaRPr lang="en-US" sz="850" dirty="0"/>
           </a:p>
@@ -30680,6 +31423,118 @@
       <p:sp>
         <p:nvSpPr>
           <p:cNvPr id="22" name="Shape 20"/>
+          <p:cNvSpPr/>
+          <p:nvPr/>
+        </p:nvSpPr>
+        <p:spPr>
+          <a:xfrm>
+            <a:off x="6519672" y="2258568"/>
+            <a:ext cx="1828800" cy="292608"/>
+          </a:xfrm>
+          <a:prstGeom prst="rect">
+            <a:avLst>
+              <a:gd name="adj" fmla="val 25000"/>
+            </a:avLst>
+          </a:prstGeom>
+          <a:solidFill>
+            <a:srgbClr val="FCE7F3"/>
+          </a:solidFill>
+          <a:ln w="19050">
+            <a:solidFill>
+              <a:srgbClr val="DB2777"/>
+            </a:solidFill>
+            <a:prstDash val="solid"/>
+          </a:ln>
+          <a:effectLst>
+            <a:outerShdw sx="100000" sy="100000" kx="0" ky="0" algn="bl" rotWithShape="0" blurRad="101600" dist="38100" dir="8100000">
+              <a:srgbClr val="000000">
+                <a:alpha val="12000"/>
+              </a:srgbClr>
+            </a:outerShdw>
+          </a:effectLst>
+        </p:spPr>
+      </p:sp>
+      <p:sp>
+        <p:nvSpPr>
+          <p:cNvPr id="23" name="Text 21"/>
+          <p:cNvSpPr/>
+          <p:nvPr/>
+        </p:nvSpPr>
+        <p:spPr>
+          <a:xfrm>
+            <a:off x="6519672" y="2258568"/>
+            <a:ext cx="1828800" cy="292608"/>
+          </a:xfrm>
+          <a:prstGeom prst="rect">
+            <a:avLst/>
+          </a:prstGeom>
+          <a:noFill/>
+          <a:ln/>
+        </p:spPr>
+        <p:txBody>
+          <a:bodyPr wrap="square" lIns="0" tIns="0" rIns="0" bIns="0" rtlCol="0" anchor="ctr"/>
+          <a:lstStyle/>
+          <a:p>
+            <a:pPr algn="ctr" indent="0" marL="0">
+              <a:buNone/>
+            </a:pPr>
+            <a:r>
+              <a:rPr lang="en-US" sz="1300" b="1" dirty="0">
+                <a:solidFill>
+                  <a:srgbClr val="9D174D"/>
+                </a:solidFill>
+                <a:latin typeface="Trebuchet MS" pitchFamily="34" charset="0"/>
+                <a:ea typeface="Trebuchet MS" pitchFamily="34" charset="-122"/>
+                <a:cs typeface="Trebuchet MS" pitchFamily="34" charset="-120"/>
+              </a:rPr>
+              <a:t>s</a:t>
+            </a:r>
+            <a:endParaRPr lang="en-US" sz="1300" dirty="0"/>
+          </a:p>
+        </p:txBody>
+      </p:sp>
+      <p:sp>
+        <p:nvSpPr>
+          <p:cNvPr id="24" name="Text 22"/>
+          <p:cNvSpPr/>
+          <p:nvPr/>
+        </p:nvSpPr>
+        <p:spPr>
+          <a:xfrm>
+            <a:off x="6519672" y="2569464"/>
+            <a:ext cx="1828800" cy="201168"/>
+          </a:xfrm>
+          <a:prstGeom prst="rect">
+            <a:avLst/>
+          </a:prstGeom>
+          <a:noFill/>
+          <a:ln/>
+        </p:spPr>
+        <p:txBody>
+          <a:bodyPr wrap="square" lIns="0" tIns="0" rIns="0" bIns="0" rtlCol="0" anchor="t"/>
+          <a:lstStyle/>
+          <a:p>
+            <a:pPr algn="ctr" indent="0" marL="0">
+              <a:buNone/>
+            </a:pPr>
+            <a:r>
+              <a:rPr lang="en-US" sz="850" dirty="0">
+                <a:solidFill>
+                  <a:srgbClr val="475569"/>
+                </a:solidFill>
+                <a:latin typeface="Calibri" pitchFamily="34" charset="0"/>
+                <a:ea typeface="Calibri" pitchFamily="34" charset="-122"/>
+                <a:cs typeface="Calibri" pitchFamily="34" charset="-120"/>
+              </a:rPr>
+              <a:t>plural or present tense</a:t>
+            </a:r>
+            <a:endParaRPr lang="en-US" sz="850" dirty="0"/>
+          </a:p>
+        </p:txBody>
+      </p:sp>
+      <p:sp>
+        <p:nvSpPr>
+          <p:cNvPr id="25" name="Shape 23"/>
           <p:cNvSpPr/>
           <p:nvPr/>
         </p:nvSpPr>
@@ -30706,7 +31561,7 @@
       </p:sp>
       <p:sp>
         <p:nvSpPr>
-          <p:cNvPr id="23" name="Text 21"/>
+          <p:cNvPr id="26" name="Text 24"/>
           <p:cNvSpPr/>
           <p:nvPr/>
         </p:nvSpPr>
@@ -30745,7 +31600,7 @@
       </p:sp>
       <p:sp>
         <p:nvSpPr>
-          <p:cNvPr id="24" name="Shape 22"/>
+          <p:cNvPr id="27" name="Shape 25"/>
           <p:cNvSpPr/>
           <p:nvPr/>
         </p:nvSpPr>
@@ -30772,13 +31627,13 @@
       </p:sp>
       <p:sp>
         <p:nvSpPr>
-          <p:cNvPr id="25" name="Shape 23"/>
-          <p:cNvSpPr/>
-          <p:nvPr/>
-        </p:nvSpPr>
-        <p:spPr>
-          <a:xfrm>
-            <a:off x="2999232" y="3364992"/>
+          <p:cNvPr id="28" name="Shape 26"/>
+          <p:cNvSpPr/>
+          <p:nvPr/>
+        </p:nvSpPr>
+        <p:spPr>
+          <a:xfrm>
+            <a:off x="2313432" y="3364992"/>
             <a:ext cx="1645920" cy="475488"/>
           </a:xfrm>
           <a:prstGeom prst="rect">
@@ -30799,13 +31654,13 @@
       </p:sp>
       <p:sp>
         <p:nvSpPr>
-          <p:cNvPr id="26" name="Text 24"/>
-          <p:cNvSpPr/>
-          <p:nvPr/>
-        </p:nvSpPr>
-        <p:spPr>
-          <a:xfrm>
-            <a:off x="2999232" y="3364992"/>
+          <p:cNvPr id="29" name="Text 27"/>
+          <p:cNvSpPr/>
+          <p:nvPr/>
+        </p:nvSpPr>
+        <p:spPr>
+          <a:xfrm>
+            <a:off x="2313432" y="3364992"/>
             <a:ext cx="1645920" cy="475488"/>
           </a:xfrm>
           <a:prstGeom prst="rect">
@@ -30830,7 +31685,7 @@
                 <a:ea typeface="Trebuchet MS" pitchFamily="34" charset="-122"/>
                 <a:cs typeface="Trebuchet MS" pitchFamily="34" charset="-120"/>
               </a:rPr>
-              <a:t>saf</a:t>
+              <a:t>sa</a:t>
             </a:r>
             <a:endParaRPr lang="en-US" sz="1400" dirty="0"/>
           </a:p>
@@ -30838,14 +31693,14 @@
       </p:sp>
       <p:sp>
         <p:nvSpPr>
-          <p:cNvPr id="27" name="Text 25"/>
-          <p:cNvSpPr/>
-          <p:nvPr/>
-        </p:nvSpPr>
-        <p:spPr>
-          <a:xfrm>
-            <a:off x="4645152" y="3364992"/>
-            <a:ext cx="1097280" cy="475488"/>
+          <p:cNvPr id="30" name="Text 28"/>
+          <p:cNvSpPr/>
+          <p:nvPr/>
+        </p:nvSpPr>
+        <p:spPr>
+          <a:xfrm>
+            <a:off x="3959352" y="3364992"/>
+            <a:ext cx="411480" cy="475488"/>
           </a:xfrm>
           <a:prstGeom prst="rect">
             <a:avLst/>
@@ -30877,13 +31732,13 @@
       </p:sp>
       <p:sp>
         <p:nvSpPr>
-          <p:cNvPr id="28" name="Shape 26"/>
-          <p:cNvSpPr/>
-          <p:nvPr/>
-        </p:nvSpPr>
-        <p:spPr>
-          <a:xfrm>
-            <a:off x="5742432" y="3364992"/>
+          <p:cNvPr id="31" name="Shape 29"/>
+          <p:cNvSpPr/>
+          <p:nvPr/>
+        </p:nvSpPr>
+        <p:spPr>
+          <a:xfrm>
+            <a:off x="4370832" y="3364992"/>
             <a:ext cx="1645920" cy="475488"/>
           </a:xfrm>
           <a:prstGeom prst="rect">
@@ -30904,13 +31759,13 @@
       </p:sp>
       <p:sp>
         <p:nvSpPr>
-          <p:cNvPr id="29" name="Text 27"/>
-          <p:cNvSpPr/>
-          <p:nvPr/>
-        </p:nvSpPr>
-        <p:spPr>
-          <a:xfrm>
-            <a:off x="5742432" y="3364992"/>
+          <p:cNvPr id="32" name="Text 30"/>
+          <p:cNvSpPr/>
+          <p:nvPr/>
+        </p:nvSpPr>
+        <p:spPr>
+          <a:xfrm>
+            <a:off x="4370832" y="3364992"/>
             <a:ext cx="1645920" cy="475488"/>
           </a:xfrm>
           <a:prstGeom prst="rect">
@@ -30935,7 +31790,7 @@
                 <a:ea typeface="Trebuchet MS" pitchFamily="34" charset="-122"/>
                 <a:cs typeface="Trebuchet MS" pitchFamily="34" charset="-120"/>
               </a:rPr>
-              <a:t>est</a:t>
+              <a:t>fa</a:t>
             </a:r>
             <a:endParaRPr lang="en-US" sz="1400" dirty="0"/>
           </a:p>
@@ -30943,7 +31798,112 @@
       </p:sp>
       <p:sp>
         <p:nvSpPr>
-          <p:cNvPr id="30" name="Shape 28"/>
+          <p:cNvPr id="33" name="Text 31"/>
+          <p:cNvSpPr/>
+          <p:nvPr/>
+        </p:nvSpPr>
+        <p:spPr>
+          <a:xfrm>
+            <a:off x="6016752" y="3364992"/>
+            <a:ext cx="411480" cy="475488"/>
+          </a:xfrm>
+          <a:prstGeom prst="rect">
+            <a:avLst/>
+          </a:prstGeom>
+          <a:noFill/>
+          <a:ln/>
+        </p:spPr>
+        <p:txBody>
+          <a:bodyPr wrap="square" lIns="0" tIns="0" rIns="0" bIns="0" rtlCol="0" anchor="ctr"/>
+          <a:lstStyle/>
+          <a:p>
+            <a:pPr algn="ctr" indent="0" marL="0">
+              <a:buNone/>
+            </a:pPr>
+            <a:r>
+              <a:rPr lang="en-US" sz="1600" b="1" dirty="0">
+                <a:solidFill>
+                  <a:srgbClr val="0D9488"/>
+                </a:solidFill>
+                <a:latin typeface="Trebuchet MS" pitchFamily="34" charset="0"/>
+                <a:ea typeface="Trebuchet MS" pitchFamily="34" charset="-122"/>
+                <a:cs typeface="Trebuchet MS" pitchFamily="34" charset="-120"/>
+              </a:rPr>
+              <a:t>·</a:t>
+            </a:r>
+            <a:endParaRPr lang="en-US" sz="1600" dirty="0"/>
+          </a:p>
+        </p:txBody>
+      </p:sp>
+      <p:sp>
+        <p:nvSpPr>
+          <p:cNvPr id="34" name="Shape 32"/>
+          <p:cNvSpPr/>
+          <p:nvPr/>
+        </p:nvSpPr>
+        <p:spPr>
+          <a:xfrm>
+            <a:off x="6428232" y="3364992"/>
+            <a:ext cx="1645920" cy="475488"/>
+          </a:xfrm>
+          <a:prstGeom prst="rect">
+            <a:avLst>
+              <a:gd name="adj" fmla="val 9615"/>
+            </a:avLst>
+          </a:prstGeom>
+          <a:solidFill>
+            <a:srgbClr val="FFFFFF"/>
+          </a:solidFill>
+          <a:ln w="12700">
+            <a:solidFill>
+              <a:srgbClr val="0D9488"/>
+            </a:solidFill>
+            <a:prstDash val="solid"/>
+          </a:ln>
+        </p:spPr>
+      </p:sp>
+      <p:sp>
+        <p:nvSpPr>
+          <p:cNvPr id="35" name="Text 33"/>
+          <p:cNvSpPr/>
+          <p:nvPr/>
+        </p:nvSpPr>
+        <p:spPr>
+          <a:xfrm>
+            <a:off x="6428232" y="3364992"/>
+            <a:ext cx="1645920" cy="475488"/>
+          </a:xfrm>
+          <a:prstGeom prst="rect">
+            <a:avLst/>
+          </a:prstGeom>
+          <a:noFill/>
+          <a:ln/>
+        </p:spPr>
+        <p:txBody>
+          <a:bodyPr wrap="square" lIns="0" tIns="0" rIns="0" bIns="0" rtlCol="0" anchor="ctr"/>
+          <a:lstStyle/>
+          <a:p>
+            <a:pPr algn="ctr" indent="0" marL="0">
+              <a:buNone/>
+            </a:pPr>
+            <a:r>
+              <a:rPr lang="en-US" sz="1400" b="1" dirty="0">
+                <a:solidFill>
+                  <a:srgbClr val="0D9488"/>
+                </a:solidFill>
+                <a:latin typeface="Trebuchet MS" pitchFamily="34" charset="0"/>
+                <a:ea typeface="Trebuchet MS" pitchFamily="34" charset="-122"/>
+                <a:cs typeface="Trebuchet MS" pitchFamily="34" charset="-120"/>
+              </a:rPr>
+              <a:t>ris</a:t>
+            </a:r>
+            <a:endParaRPr lang="en-US" sz="1400" dirty="0"/>
+          </a:p>
+        </p:txBody>
+      </p:sp>
+      <p:sp>
+        <p:nvSpPr>
+          <p:cNvPr id="36" name="Shape 34"/>
           <p:cNvSpPr/>
           <p:nvPr/>
         </p:nvSpPr>
@@ -30970,7 +31930,7 @@
       </p:sp>
       <p:sp>
         <p:nvSpPr>
-          <p:cNvPr id="31" name="Text 29"/>
+          <p:cNvPr id="37" name="Text 35"/>
           <p:cNvSpPr/>
           <p:nvPr/>
         </p:nvSpPr>
@@ -31009,7 +31969,7 @@
       </p:sp>
       <p:sp>
         <p:nvSpPr>
-          <p:cNvPr id="32" name="Shape 30"/>
+          <p:cNvPr id="38" name="Shape 36"/>
           <p:cNvSpPr/>
           <p:nvPr/>
         </p:nvSpPr>
@@ -31036,13 +31996,13 @@
       </p:sp>
       <p:sp>
         <p:nvSpPr>
-          <p:cNvPr id="33" name="Shape 31"/>
-          <p:cNvSpPr/>
-          <p:nvPr/>
-        </p:nvSpPr>
-        <p:spPr>
-          <a:xfrm>
-            <a:off x="2254649" y="4169664"/>
+          <p:cNvPr id="39" name="Shape 37"/>
+          <p:cNvSpPr/>
+          <p:nvPr/>
+        </p:nvSpPr>
+        <p:spPr>
+          <a:xfrm>
+            <a:off x="2124837" y="4169664"/>
             <a:ext cx="685800" cy="475488"/>
           </a:xfrm>
           <a:prstGeom prst="rect">
@@ -31063,13 +32023,13 @@
       </p:sp>
       <p:sp>
         <p:nvSpPr>
-          <p:cNvPr id="34" name="Text 32"/>
-          <p:cNvSpPr/>
-          <p:nvPr/>
-        </p:nvSpPr>
-        <p:spPr>
-          <a:xfrm>
-            <a:off x="2254649" y="4169664"/>
+          <p:cNvPr id="40" name="Text 38"/>
+          <p:cNvSpPr/>
+          <p:nvPr/>
+        </p:nvSpPr>
+        <p:spPr>
+          <a:xfrm>
+            <a:off x="2124837" y="4169664"/>
             <a:ext cx="685800" cy="475488"/>
           </a:xfrm>
           <a:prstGeom prst="rect">
@@ -31102,13 +32062,13 @@
       </p:sp>
       <p:sp>
         <p:nvSpPr>
-          <p:cNvPr id="35" name="Shape 33"/>
-          <p:cNvSpPr/>
-          <p:nvPr/>
-        </p:nvSpPr>
-        <p:spPr>
-          <a:xfrm>
-            <a:off x="3293146" y="4169664"/>
+          <p:cNvPr id="41" name="Shape 39"/>
+          <p:cNvSpPr/>
+          <p:nvPr/>
+        </p:nvSpPr>
+        <p:spPr>
+          <a:xfrm>
+            <a:off x="3033522" y="4169664"/>
             <a:ext cx="685800" cy="475488"/>
           </a:xfrm>
           <a:prstGeom prst="rect">
@@ -31129,13 +32089,13 @@
       </p:sp>
       <p:sp>
         <p:nvSpPr>
-          <p:cNvPr id="36" name="Text 34"/>
-          <p:cNvSpPr/>
-          <p:nvPr/>
-        </p:nvSpPr>
-        <p:spPr>
-          <a:xfrm>
-            <a:off x="3293146" y="4169664"/>
+          <p:cNvPr id="42" name="Text 40"/>
+          <p:cNvSpPr/>
+          <p:nvPr/>
+        </p:nvSpPr>
+        <p:spPr>
+          <a:xfrm>
+            <a:off x="3033522" y="4169664"/>
             <a:ext cx="685800" cy="475488"/>
           </a:xfrm>
           <a:prstGeom prst="rect">
@@ -31168,13 +32128,13 @@
       </p:sp>
       <p:sp>
         <p:nvSpPr>
-          <p:cNvPr id="37" name="Shape 35"/>
-          <p:cNvSpPr/>
-          <p:nvPr/>
-        </p:nvSpPr>
-        <p:spPr>
-          <a:xfrm>
-            <a:off x="4331643" y="4169664"/>
+          <p:cNvPr id="43" name="Shape 41"/>
+          <p:cNvSpPr/>
+          <p:nvPr/>
+        </p:nvSpPr>
+        <p:spPr>
+          <a:xfrm>
+            <a:off x="3942207" y="4169664"/>
             <a:ext cx="685800" cy="475488"/>
           </a:xfrm>
           <a:prstGeom prst="rect">
@@ -31195,13 +32155,13 @@
       </p:sp>
       <p:sp>
         <p:nvSpPr>
-          <p:cNvPr id="38" name="Text 36"/>
-          <p:cNvSpPr/>
-          <p:nvPr/>
-        </p:nvSpPr>
-        <p:spPr>
-          <a:xfrm>
-            <a:off x="4331643" y="4169664"/>
+          <p:cNvPr id="44" name="Text 42"/>
+          <p:cNvSpPr/>
+          <p:nvPr/>
+        </p:nvSpPr>
+        <p:spPr>
+          <a:xfrm>
+            <a:off x="3942207" y="4169664"/>
             <a:ext cx="685800" cy="475488"/>
           </a:xfrm>
           <a:prstGeom prst="rect">
@@ -31234,13 +32194,13 @@
       </p:sp>
       <p:sp>
         <p:nvSpPr>
-          <p:cNvPr id="39" name="Shape 37"/>
-          <p:cNvSpPr/>
-          <p:nvPr/>
-        </p:nvSpPr>
-        <p:spPr>
-          <a:xfrm>
-            <a:off x="5370141" y="4169664"/>
+          <p:cNvPr id="45" name="Shape 43"/>
+          <p:cNvSpPr/>
+          <p:nvPr/>
+        </p:nvSpPr>
+        <p:spPr>
+          <a:xfrm>
+            <a:off x="4850892" y="4169664"/>
             <a:ext cx="685800" cy="475488"/>
           </a:xfrm>
           <a:prstGeom prst="rect">
@@ -31261,13 +32221,13 @@
       </p:sp>
       <p:sp>
         <p:nvSpPr>
-          <p:cNvPr id="40" name="Text 38"/>
-          <p:cNvSpPr/>
-          <p:nvPr/>
-        </p:nvSpPr>
-        <p:spPr>
-          <a:xfrm>
-            <a:off x="5370141" y="4169664"/>
+          <p:cNvPr id="46" name="Text 44"/>
+          <p:cNvSpPr/>
+          <p:nvPr/>
+        </p:nvSpPr>
+        <p:spPr>
+          <a:xfrm>
+            <a:off x="4850892" y="4169664"/>
             <a:ext cx="685800" cy="475488"/>
           </a:xfrm>
           <a:prstGeom prst="rect">
@@ -31292,7 +32252,7 @@
                 <a:ea typeface="Trebuchet MS" pitchFamily="34" charset="-122"/>
                 <a:cs typeface="Trebuchet MS" pitchFamily="34" charset="-120"/>
               </a:rPr>
-              <a:t>e</a:t>
+              <a:t>a</a:t>
             </a:r>
             <a:endParaRPr lang="en-US" sz="900" dirty="0"/>
           </a:p>
@@ -31300,13 +32260,13 @@
       </p:sp>
       <p:sp>
         <p:nvSpPr>
-          <p:cNvPr id="41" name="Shape 39"/>
-          <p:cNvSpPr/>
-          <p:nvPr/>
-        </p:nvSpPr>
-        <p:spPr>
-          <a:xfrm>
-            <a:off x="6408638" y="4169664"/>
+          <p:cNvPr id="47" name="Shape 45"/>
+          <p:cNvSpPr/>
+          <p:nvPr/>
+        </p:nvSpPr>
+        <p:spPr>
+          <a:xfrm>
+            <a:off x="5759577" y="4169664"/>
             <a:ext cx="685800" cy="475488"/>
           </a:xfrm>
           <a:prstGeom prst="rect">
@@ -31327,13 +32287,13 @@
       </p:sp>
       <p:sp>
         <p:nvSpPr>
-          <p:cNvPr id="42" name="Text 40"/>
-          <p:cNvSpPr/>
-          <p:nvPr/>
-        </p:nvSpPr>
-        <p:spPr>
-          <a:xfrm>
-            <a:off x="6408638" y="4169664"/>
+          <p:cNvPr id="48" name="Text 46"/>
+          <p:cNvSpPr/>
+          <p:nvPr/>
+        </p:nvSpPr>
+        <p:spPr>
+          <a:xfrm>
+            <a:off x="5759577" y="4169664"/>
             <a:ext cx="685800" cy="475488"/>
           </a:xfrm>
           <a:prstGeom prst="rect">
@@ -31358,7 +32318,7 @@
                 <a:ea typeface="Trebuchet MS" pitchFamily="34" charset="-122"/>
                 <a:cs typeface="Trebuchet MS" pitchFamily="34" charset="-120"/>
               </a:rPr>
-              <a:t>s</a:t>
+              <a:t>r</a:t>
             </a:r>
             <a:endParaRPr lang="en-US" sz="900" dirty="0"/>
           </a:p>
@@ -31366,13 +32326,13 @@
       </p:sp>
       <p:sp>
         <p:nvSpPr>
-          <p:cNvPr id="43" name="Shape 41"/>
-          <p:cNvSpPr/>
-          <p:nvPr/>
-        </p:nvSpPr>
-        <p:spPr>
-          <a:xfrm>
-            <a:off x="7447135" y="4169664"/>
+          <p:cNvPr id="49" name="Shape 47"/>
+          <p:cNvSpPr/>
+          <p:nvPr/>
+        </p:nvSpPr>
+        <p:spPr>
+          <a:xfrm>
+            <a:off x="6668262" y="4169664"/>
             <a:ext cx="685800" cy="475488"/>
           </a:xfrm>
           <a:prstGeom prst="rect">
@@ -31393,13 +32353,13 @@
       </p:sp>
       <p:sp>
         <p:nvSpPr>
-          <p:cNvPr id="44" name="Text 42"/>
-          <p:cNvSpPr/>
-          <p:nvPr/>
-        </p:nvSpPr>
-        <p:spPr>
-          <a:xfrm>
-            <a:off x="7447135" y="4169664"/>
+          <p:cNvPr id="50" name="Text 48"/>
+          <p:cNvSpPr/>
+          <p:nvPr/>
+        </p:nvSpPr>
+        <p:spPr>
+          <a:xfrm>
+            <a:off x="6668262" y="4169664"/>
             <a:ext cx="685800" cy="475488"/>
           </a:xfrm>
           <a:prstGeom prst="rect">
@@ -31424,7 +32384,73 @@
                 <a:ea typeface="Trebuchet MS" pitchFamily="34" charset="-122"/>
                 <a:cs typeface="Trebuchet MS" pitchFamily="34" charset="-120"/>
               </a:rPr>
-              <a:t>t</a:t>
+              <a:t>i</a:t>
+            </a:r>
+            <a:endParaRPr lang="en-US" sz="900" dirty="0"/>
+          </a:p>
+        </p:txBody>
+      </p:sp>
+      <p:sp>
+        <p:nvSpPr>
+          <p:cNvPr id="51" name="Shape 49"/>
+          <p:cNvSpPr/>
+          <p:nvPr/>
+        </p:nvSpPr>
+        <p:spPr>
+          <a:xfrm>
+            <a:off x="7576947" y="4169664"/>
+            <a:ext cx="685800" cy="475488"/>
+          </a:xfrm>
+          <a:prstGeom prst="rect">
+            <a:avLst>
+              <a:gd name="adj" fmla="val 7692"/>
+            </a:avLst>
+          </a:prstGeom>
+          <a:solidFill>
+            <a:srgbClr val="FFFFFF"/>
+          </a:solidFill>
+          <a:ln w="12700">
+            <a:solidFill>
+              <a:srgbClr val="DB2777"/>
+            </a:solidFill>
+            <a:prstDash val="solid"/>
+          </a:ln>
+        </p:spPr>
+      </p:sp>
+      <p:sp>
+        <p:nvSpPr>
+          <p:cNvPr id="52" name="Text 50"/>
+          <p:cNvSpPr/>
+          <p:nvPr/>
+        </p:nvSpPr>
+        <p:spPr>
+          <a:xfrm>
+            <a:off x="7576947" y="4169664"/>
+            <a:ext cx="685800" cy="475488"/>
+          </a:xfrm>
+          <a:prstGeom prst="rect">
+            <a:avLst/>
+          </a:prstGeom>
+          <a:noFill/>
+          <a:ln/>
+        </p:spPr>
+        <p:txBody>
+          <a:bodyPr wrap="square" lIns="0" tIns="0" rIns="0" bIns="0" rtlCol="0" anchor="ctr"/>
+          <a:lstStyle/>
+          <a:p>
+            <a:pPr algn="ctr" indent="0" marL="0">
+              <a:buNone/>
+            </a:pPr>
+            <a:r>
+              <a:rPr lang="en-US" sz="900" b="1" dirty="0">
+                <a:solidFill>
+                  <a:srgbClr val="9D174D"/>
+                </a:solidFill>
+                <a:latin typeface="Trebuchet MS" pitchFamily="34" charset="0"/>
+                <a:ea typeface="Trebuchet MS" pitchFamily="34" charset="-122"/>
+                <a:cs typeface="Trebuchet MS" pitchFamily="34" charset="-120"/>
+              </a:rPr>
+              <a:t>s</a:t>
             </a:r>
             <a:endParaRPr lang="en-US" sz="900" dirty="0"/>
           </a:p>
@@ -31716,7 +32742,7 @@
                 <a:ea typeface="Calibri" pitchFamily="34" charset="-122"/>
                 <a:cs typeface="Calibri" pitchFamily="34" charset="-120"/>
               </a:rPr>
-              <a:t>Word Labs  •  wordlabs.app  •  Root: 'safe' = free from harm or danger</a:t>
+              <a:t>Word Labs  •  wordlabs.app  •  Root: 'safe' = free from danger</a:t>
             </a:r>
             <a:endParaRPr lang="en-US" sz="800" dirty="0"/>
           </a:p>
@@ -32885,7 +33911,7 @@
                 <a:ea typeface="Calibri" pitchFamily="34" charset="-122"/>
                 <a:cs typeface="Calibri" pitchFamily="34" charset="-120"/>
               </a:rPr>
-              <a:t>Word Labs  •  wordlabs.app  •  Root: 'safe' = free from harm or danger</a:t>
+              <a:t>Word Labs  •  wordlabs.app  •  Root: 'safe' = free from danger</a:t>
             </a:r>
             <a:endParaRPr lang="en-US" sz="800" dirty="0"/>
           </a:p>
@@ -33314,7 +34340,7 @@
                 <a:ea typeface="Trebuchet MS" pitchFamily="34" charset="-122"/>
                 <a:cs typeface="Trebuchet MS" pitchFamily="34" charset="-120"/>
               </a:rPr>
-              <a:t>-ly</a:t>
+              <a:t>-ary</a:t>
             </a:r>
             <a:endParaRPr lang="en-US" sz="1300" dirty="0"/>
           </a:p>
@@ -33335,7 +34361,7 @@
             <a:avLst/>
           </a:prstGeom>
           <a:solidFill>
-            <a:srgbClr val="DDD6FE"/>
+            <a:srgbClr val="F1F5F9"/>
           </a:solidFill>
           <a:ln w="12700">
             <a:solidFill>
@@ -33347,14 +34373,64 @@
       </p:sp>
       <p:sp>
         <p:nvSpPr>
-          <p:cNvPr id="24" name="Text 22"/>
-          <p:cNvSpPr/>
-          <p:nvPr/>
-        </p:nvSpPr>
-        <p:spPr>
-          <a:xfrm>
-            <a:off x="365760" y="1984248"/>
-            <a:ext cx="2468880" cy="402336"/>
+          <p:cNvPr id="24" name="Shape 22"/>
+          <p:cNvSpPr/>
+          <p:nvPr/>
+        </p:nvSpPr>
+        <p:spPr>
+          <a:xfrm>
+            <a:off x="2971800" y="1984248"/>
+            <a:ext cx="2834640" cy="402336"/>
+          </a:xfrm>
+          <a:prstGeom prst="rect">
+            <a:avLst/>
+          </a:prstGeom>
+          <a:solidFill>
+            <a:srgbClr val="F1F5F9"/>
+          </a:solidFill>
+          <a:ln w="12700">
+            <a:solidFill>
+              <a:srgbClr val="E2E8F0"/>
+            </a:solidFill>
+            <a:prstDash val="solid"/>
+          </a:ln>
+        </p:spPr>
+      </p:sp>
+      <p:sp>
+        <p:nvSpPr>
+          <p:cNvPr id="25" name="Shape 23"/>
+          <p:cNvSpPr/>
+          <p:nvPr/>
+        </p:nvSpPr>
+        <p:spPr>
+          <a:xfrm>
+            <a:off x="5943600" y="1984248"/>
+            <a:ext cx="2834640" cy="402336"/>
+          </a:xfrm>
+          <a:prstGeom prst="rect">
+            <a:avLst/>
+          </a:prstGeom>
+          <a:solidFill>
+            <a:srgbClr val="FCE7F3"/>
+          </a:solidFill>
+          <a:ln w="12700">
+            <a:solidFill>
+              <a:srgbClr val="E2E8F0"/>
+            </a:solidFill>
+            <a:prstDash val="solid"/>
+          </a:ln>
+        </p:spPr>
+      </p:sp>
+      <p:sp>
+        <p:nvSpPr>
+          <p:cNvPr id="26" name="Text 24"/>
+          <p:cNvSpPr/>
+          <p:nvPr/>
+        </p:nvSpPr>
+        <p:spPr>
+          <a:xfrm>
+            <a:off x="5943600" y="1984248"/>
+            <a:ext cx="2834640" cy="402336"/>
           </a:xfrm>
           <a:prstGeom prst="rect">
             <a:avLst/>
@@ -33372,13 +34448,13 @@
             <a:r>
               <a:rPr lang="en-US" sz="1300" b="1" dirty="0">
                 <a:solidFill>
-                  <a:srgbClr val="4C1D95"/>
+                  <a:srgbClr val="9D174D"/>
                 </a:solidFill>
                 <a:latin typeface="Trebuchet MS" pitchFamily="34" charset="0"/>
                 <a:ea typeface="Trebuchet MS" pitchFamily="34" charset="-122"/>
                 <a:cs typeface="Trebuchet MS" pitchFamily="34" charset="-120"/>
               </a:rPr>
-              <a:t>re-</a:t>
+              <a:t>-ly</a:t>
             </a:r>
             <a:endParaRPr lang="en-US" sz="1300" dirty="0"/>
           </a:p>
@@ -33386,20 +34462,45 @@
       </p:sp>
       <p:sp>
         <p:nvSpPr>
-          <p:cNvPr id="25" name="Shape 23"/>
-          <p:cNvSpPr/>
-          <p:nvPr/>
-        </p:nvSpPr>
-        <p:spPr>
-          <a:xfrm>
-            <a:off x="2971800" y="1984248"/>
+          <p:cNvPr id="27" name="Shape 25"/>
+          <p:cNvSpPr/>
+          <p:nvPr/>
+        </p:nvSpPr>
+        <p:spPr>
+          <a:xfrm>
+            <a:off x="365760" y="2404872"/>
+            <a:ext cx="2468880" cy="402336"/>
+          </a:xfrm>
+          <a:prstGeom prst="rect">
+            <a:avLst/>
+          </a:prstGeom>
+          <a:solidFill>
+            <a:srgbClr val="F8FAFC"/>
+          </a:solidFill>
+          <a:ln w="12700">
+            <a:solidFill>
+              <a:srgbClr val="E2E8F0"/>
+            </a:solidFill>
+            <a:prstDash val="solid"/>
+          </a:ln>
+        </p:spPr>
+      </p:sp>
+      <p:sp>
+        <p:nvSpPr>
+          <p:cNvPr id="28" name="Shape 26"/>
+          <p:cNvSpPr/>
+          <p:nvPr/>
+        </p:nvSpPr>
+        <p:spPr>
+          <a:xfrm>
+            <a:off x="2971800" y="2404872"/>
             <a:ext cx="2834640" cy="402336"/>
           </a:xfrm>
           <a:prstGeom prst="rect">
             <a:avLst/>
           </a:prstGeom>
           <a:solidFill>
-            <a:srgbClr val="F1F5F9"/>
+            <a:srgbClr val="F8FAFC"/>
           </a:solidFill>
           <a:ln w="12700">
             <a:solidFill>
@@ -33411,13 +34512,13 @@
       </p:sp>
       <p:sp>
         <p:nvSpPr>
-          <p:cNvPr id="26" name="Shape 24"/>
-          <p:cNvSpPr/>
-          <p:nvPr/>
-        </p:nvSpPr>
-        <p:spPr>
-          <a:xfrm>
-            <a:off x="5943600" y="1984248"/>
+          <p:cNvPr id="29" name="Shape 27"/>
+          <p:cNvSpPr/>
+          <p:nvPr/>
+        </p:nvSpPr>
+        <p:spPr>
+          <a:xfrm>
+            <a:off x="5943600" y="2404872"/>
             <a:ext cx="2834640" cy="402336"/>
           </a:xfrm>
           <a:prstGeom prst="rect">
@@ -33436,13 +34537,13 @@
       </p:sp>
       <p:sp>
         <p:nvSpPr>
-          <p:cNvPr id="27" name="Text 25"/>
-          <p:cNvSpPr/>
-          <p:nvPr/>
-        </p:nvSpPr>
-        <p:spPr>
-          <a:xfrm>
-            <a:off x="5943600" y="1984248"/>
+          <p:cNvPr id="30" name="Text 28"/>
+          <p:cNvSpPr/>
+          <p:nvPr/>
+        </p:nvSpPr>
+        <p:spPr>
+          <a:xfrm>
+            <a:off x="5943600" y="2404872"/>
             <a:ext cx="2834640" cy="402336"/>
           </a:xfrm>
           <a:prstGeom prst="rect">
@@ -33467,7 +34568,7 @@
                 <a:ea typeface="Trebuchet MS" pitchFamily="34" charset="-122"/>
                 <a:cs typeface="Trebuchet MS" pitchFamily="34" charset="-120"/>
               </a:rPr>
-              <a:t>-ty</a:t>
+              <a:t>-ness</a:t>
             </a:r>
             <a:endParaRPr lang="en-US" sz="1300" dirty="0"/>
           </a:p>
@@ -33475,20 +34576,20 @@
       </p:sp>
       <p:sp>
         <p:nvSpPr>
-          <p:cNvPr id="28" name="Shape 26"/>
-          <p:cNvSpPr/>
-          <p:nvPr/>
-        </p:nvSpPr>
-        <p:spPr>
-          <a:xfrm>
-            <a:off x="365760" y="2404872"/>
+          <p:cNvPr id="31" name="Shape 29"/>
+          <p:cNvSpPr/>
+          <p:nvPr/>
+        </p:nvSpPr>
+        <p:spPr>
+          <a:xfrm>
+            <a:off x="365760" y="2825496"/>
             <a:ext cx="2468880" cy="402336"/>
           </a:xfrm>
           <a:prstGeom prst="rect">
             <a:avLst/>
           </a:prstGeom>
           <a:solidFill>
-            <a:srgbClr val="DDD6FE"/>
+            <a:srgbClr val="F1F5F9"/>
           </a:solidFill>
           <a:ln w="12700">
             <a:solidFill>
@@ -33500,14 +34601,64 @@
       </p:sp>
       <p:sp>
         <p:nvSpPr>
-          <p:cNvPr id="29" name="Text 27"/>
-          <p:cNvSpPr/>
-          <p:nvPr/>
-        </p:nvSpPr>
-        <p:spPr>
-          <a:xfrm>
-            <a:off x="365760" y="2404872"/>
-            <a:ext cx="2468880" cy="402336"/>
+          <p:cNvPr id="32" name="Shape 30"/>
+          <p:cNvSpPr/>
+          <p:nvPr/>
+        </p:nvSpPr>
+        <p:spPr>
+          <a:xfrm>
+            <a:off x="2971800" y="2825496"/>
+            <a:ext cx="2834640" cy="402336"/>
+          </a:xfrm>
+          <a:prstGeom prst="rect">
+            <a:avLst/>
+          </a:prstGeom>
+          <a:solidFill>
+            <a:srgbClr val="F1F5F9"/>
+          </a:solidFill>
+          <a:ln w="12700">
+            <a:solidFill>
+              <a:srgbClr val="E2E8F0"/>
+            </a:solidFill>
+            <a:prstDash val="solid"/>
+          </a:ln>
+        </p:spPr>
+      </p:sp>
+      <p:sp>
+        <p:nvSpPr>
+          <p:cNvPr id="33" name="Shape 31"/>
+          <p:cNvSpPr/>
+          <p:nvPr/>
+        </p:nvSpPr>
+        <p:spPr>
+          <a:xfrm>
+            <a:off x="5943600" y="2825496"/>
+            <a:ext cx="2834640" cy="402336"/>
+          </a:xfrm>
+          <a:prstGeom prst="rect">
+            <a:avLst/>
+          </a:prstGeom>
+          <a:solidFill>
+            <a:srgbClr val="FCE7F3"/>
+          </a:solidFill>
+          <a:ln w="12700">
+            <a:solidFill>
+              <a:srgbClr val="E2E8F0"/>
+            </a:solidFill>
+            <a:prstDash val="solid"/>
+          </a:ln>
+        </p:spPr>
+      </p:sp>
+      <p:sp>
+        <p:nvSpPr>
+          <p:cNvPr id="34" name="Text 32"/>
+          <p:cNvSpPr/>
+          <p:nvPr/>
+        </p:nvSpPr>
+        <p:spPr>
+          <a:xfrm>
+            <a:off x="5943600" y="2825496"/>
+            <a:ext cx="2834640" cy="402336"/>
           </a:xfrm>
           <a:prstGeom prst="rect">
             <a:avLst/>
@@ -33525,13 +34676,13 @@
             <a:r>
               <a:rPr lang="en-US" sz="1300" b="1" dirty="0">
                 <a:solidFill>
-                  <a:srgbClr val="4C1D95"/>
+                  <a:srgbClr val="9D174D"/>
                 </a:solidFill>
                 <a:latin typeface="Trebuchet MS" pitchFamily="34" charset="0"/>
                 <a:ea typeface="Trebuchet MS" pitchFamily="34" charset="-122"/>
                 <a:cs typeface="Trebuchet MS" pitchFamily="34" charset="-120"/>
               </a:rPr>
-              <a:t>fire-</a:t>
+              <a:t>-er</a:t>
             </a:r>
             <a:endParaRPr lang="en-US" sz="1300" dirty="0"/>
           </a:p>
@@ -33539,13 +34690,38 @@
       </p:sp>
       <p:sp>
         <p:nvSpPr>
-          <p:cNvPr id="30" name="Shape 28"/>
-          <p:cNvSpPr/>
-          <p:nvPr/>
-        </p:nvSpPr>
-        <p:spPr>
-          <a:xfrm>
-            <a:off x="2971800" y="2404872"/>
+          <p:cNvPr id="35" name="Shape 33"/>
+          <p:cNvSpPr/>
+          <p:nvPr/>
+        </p:nvSpPr>
+        <p:spPr>
+          <a:xfrm>
+            <a:off x="365760" y="3246120"/>
+            <a:ext cx="2468880" cy="402336"/>
+          </a:xfrm>
+          <a:prstGeom prst="rect">
+            <a:avLst/>
+          </a:prstGeom>
+          <a:solidFill>
+            <a:srgbClr val="F8FAFC"/>
+          </a:solidFill>
+          <a:ln w="12700">
+            <a:solidFill>
+              <a:srgbClr val="E2E8F0"/>
+            </a:solidFill>
+            <a:prstDash val="solid"/>
+          </a:ln>
+        </p:spPr>
+      </p:sp>
+      <p:sp>
+        <p:nvSpPr>
+          <p:cNvPr id="36" name="Shape 34"/>
+          <p:cNvSpPr/>
+          <p:nvPr/>
+        </p:nvSpPr>
+        <p:spPr>
+          <a:xfrm>
+            <a:off x="2971800" y="3246120"/>
             <a:ext cx="2834640" cy="402336"/>
           </a:xfrm>
           <a:prstGeom prst="rect">
@@ -33564,13 +34740,13 @@
       </p:sp>
       <p:sp>
         <p:nvSpPr>
-          <p:cNvPr id="31" name="Shape 29"/>
-          <p:cNvSpPr/>
-          <p:nvPr/>
-        </p:nvSpPr>
-        <p:spPr>
-          <a:xfrm>
-            <a:off x="5943600" y="2404872"/>
+          <p:cNvPr id="37" name="Shape 35"/>
+          <p:cNvSpPr/>
+          <p:nvPr/>
+        </p:nvSpPr>
+        <p:spPr>
+          <a:xfrm>
+            <a:off x="5943600" y="3246120"/>
             <a:ext cx="2834640" cy="402336"/>
           </a:xfrm>
           <a:prstGeom prst="rect">
@@ -33589,13 +34765,13 @@
       </p:sp>
       <p:sp>
         <p:nvSpPr>
-          <p:cNvPr id="32" name="Text 30"/>
-          <p:cNvSpPr/>
-          <p:nvPr/>
-        </p:nvSpPr>
-        <p:spPr>
-          <a:xfrm>
-            <a:off x="5943600" y="2404872"/>
+          <p:cNvPr id="38" name="Text 36"/>
+          <p:cNvSpPr/>
+          <p:nvPr/>
+        </p:nvSpPr>
+        <p:spPr>
+          <a:xfrm>
+            <a:off x="5943600" y="3246120"/>
             <a:ext cx="2834640" cy="402336"/>
           </a:xfrm>
           <a:prstGeom prst="rect">
@@ -33620,7 +34796,7 @@
                 <a:ea typeface="Trebuchet MS" pitchFamily="34" charset="-122"/>
                 <a:cs typeface="Trebuchet MS" pitchFamily="34" charset="-120"/>
               </a:rPr>
-              <a:t>-guard</a:t>
+              <a:t>-est</a:t>
             </a:r>
             <a:endParaRPr lang="en-US" sz="1300" dirty="0"/>
           </a:p>
@@ -33628,20 +34804,20 @@
       </p:sp>
       <p:sp>
         <p:nvSpPr>
-          <p:cNvPr id="33" name="Shape 31"/>
-          <p:cNvSpPr/>
-          <p:nvPr/>
-        </p:nvSpPr>
-        <p:spPr>
-          <a:xfrm>
-            <a:off x="365760" y="2825496"/>
+          <p:cNvPr id="39" name="Shape 37"/>
+          <p:cNvSpPr/>
+          <p:nvPr/>
+        </p:nvSpPr>
+        <p:spPr>
+          <a:xfrm>
+            <a:off x="365760" y="3666744"/>
             <a:ext cx="2468880" cy="402336"/>
           </a:xfrm>
           <a:prstGeom prst="rect">
             <a:avLst/>
           </a:prstGeom>
           <a:solidFill>
-            <a:srgbClr val="DDD6FE"/>
+            <a:srgbClr val="F1F5F9"/>
           </a:solidFill>
           <a:ln w="12700">
             <a:solidFill>
@@ -33653,14 +34829,64 @@
       </p:sp>
       <p:sp>
         <p:nvSpPr>
-          <p:cNvPr id="34" name="Text 32"/>
-          <p:cNvSpPr/>
-          <p:nvPr/>
-        </p:nvSpPr>
-        <p:spPr>
-          <a:xfrm>
-            <a:off x="365760" y="2825496"/>
-            <a:ext cx="2468880" cy="402336"/>
+          <p:cNvPr id="40" name="Shape 38"/>
+          <p:cNvSpPr/>
+          <p:nvPr/>
+        </p:nvSpPr>
+        <p:spPr>
+          <a:xfrm>
+            <a:off x="2971800" y="3666744"/>
+            <a:ext cx="2834640" cy="402336"/>
+          </a:xfrm>
+          <a:prstGeom prst="rect">
+            <a:avLst/>
+          </a:prstGeom>
+          <a:solidFill>
+            <a:srgbClr val="F1F5F9"/>
+          </a:solidFill>
+          <a:ln w="12700">
+            <a:solidFill>
+              <a:srgbClr val="E2E8F0"/>
+            </a:solidFill>
+            <a:prstDash val="solid"/>
+          </a:ln>
+        </p:spPr>
+      </p:sp>
+      <p:sp>
+        <p:nvSpPr>
+          <p:cNvPr id="41" name="Shape 39"/>
+          <p:cNvSpPr/>
+          <p:nvPr/>
+        </p:nvSpPr>
+        <p:spPr>
+          <a:xfrm>
+            <a:off x="5943600" y="3666744"/>
+            <a:ext cx="2834640" cy="402336"/>
+          </a:xfrm>
+          <a:prstGeom prst="rect">
+            <a:avLst/>
+          </a:prstGeom>
+          <a:solidFill>
+            <a:srgbClr val="FCE7F3"/>
+          </a:solidFill>
+          <a:ln w="12700">
+            <a:solidFill>
+              <a:srgbClr val="E2E8F0"/>
+            </a:solidFill>
+            <a:prstDash val="solid"/>
+          </a:ln>
+        </p:spPr>
+      </p:sp>
+      <p:sp>
+        <p:nvSpPr>
+          <p:cNvPr id="42" name="Text 40"/>
+          <p:cNvSpPr/>
+          <p:nvPr/>
+        </p:nvSpPr>
+        <p:spPr>
+          <a:xfrm>
+            <a:off x="5943600" y="3666744"/>
+            <a:ext cx="2834640" cy="402336"/>
           </a:xfrm>
           <a:prstGeom prst="rect">
             <a:avLst/>
@@ -33678,13 +34904,13 @@
             <a:r>
               <a:rPr lang="en-US" sz="1300" b="1" dirty="0">
                 <a:solidFill>
-                  <a:srgbClr val="4C1D95"/>
+                  <a:srgbClr val="9D174D"/>
                 </a:solidFill>
                 <a:latin typeface="Trebuchet MS" pitchFamily="34" charset="0"/>
                 <a:ea typeface="Trebuchet MS" pitchFamily="34" charset="-122"/>
                 <a:cs typeface="Trebuchet MS" pitchFamily="34" charset="-120"/>
               </a:rPr>
-              <a:t>food-</a:t>
+              <a:t>-ty</a:t>
             </a:r>
             <a:endParaRPr lang="en-US" sz="1300" dirty="0"/>
           </a:p>
@@ -33692,64 +34918,14 @@
       </p:sp>
       <p:sp>
         <p:nvSpPr>
-          <p:cNvPr id="35" name="Shape 33"/>
-          <p:cNvSpPr/>
-          <p:nvPr/>
-        </p:nvSpPr>
-        <p:spPr>
-          <a:xfrm>
-            <a:off x="2971800" y="2825496"/>
-            <a:ext cx="2834640" cy="402336"/>
-          </a:xfrm>
-          <a:prstGeom prst="rect">
-            <a:avLst/>
-          </a:prstGeom>
-          <a:solidFill>
-            <a:srgbClr val="F1F5F9"/>
-          </a:solidFill>
-          <a:ln w="12700">
-            <a:solidFill>
-              <a:srgbClr val="E2E8F0"/>
-            </a:solidFill>
-            <a:prstDash val="solid"/>
-          </a:ln>
-        </p:spPr>
-      </p:sp>
-      <p:sp>
-        <p:nvSpPr>
-          <p:cNvPr id="36" name="Shape 34"/>
-          <p:cNvSpPr/>
-          <p:nvPr/>
-        </p:nvSpPr>
-        <p:spPr>
-          <a:xfrm>
-            <a:off x="5943600" y="2825496"/>
-            <a:ext cx="2834640" cy="402336"/>
-          </a:xfrm>
-          <a:prstGeom prst="rect">
-            <a:avLst/>
-          </a:prstGeom>
-          <a:solidFill>
-            <a:srgbClr val="FCE7F3"/>
-          </a:solidFill>
-          <a:ln w="12700">
-            <a:solidFill>
-              <a:srgbClr val="E2E8F0"/>
-            </a:solidFill>
-            <a:prstDash val="solid"/>
-          </a:ln>
-        </p:spPr>
-      </p:sp>
-      <p:sp>
-        <p:nvSpPr>
-          <p:cNvPr id="37" name="Text 35"/>
-          <p:cNvSpPr/>
-          <p:nvPr/>
-        </p:nvSpPr>
-        <p:spPr>
-          <a:xfrm>
-            <a:off x="5943600" y="2825496"/>
-            <a:ext cx="2834640" cy="402336"/>
+          <p:cNvPr id="43" name="Text 41"/>
+          <p:cNvSpPr/>
+          <p:nvPr/>
+        </p:nvSpPr>
+        <p:spPr>
+          <a:xfrm>
+            <a:off x="365760" y="3611880"/>
+            <a:ext cx="1828800" cy="347472"/>
           </a:xfrm>
           <a:prstGeom prst="rect">
             <a:avLst/>
@@ -33761,59 +34937,61 @@
           <a:bodyPr wrap="square" lIns="0" tIns="0" rIns="0" bIns="0" rtlCol="0" anchor="ctr"/>
           <a:lstStyle/>
           <a:p>
-            <a:pPr algn="ctr" indent="0" marL="0">
-              <a:buNone/>
-            </a:pPr>
-            <a:r>
-              <a:rPr lang="en-US" sz="1300" b="1" dirty="0">
-                <a:solidFill>
-                  <a:srgbClr val="9D174D"/>
+            <a:pPr algn="l" indent="0" marL="0">
+              <a:buNone/>
+            </a:pPr>
+            <a:r>
+              <a:rPr lang="en-US" sz="1200" b="1" dirty="0">
+                <a:solidFill>
+                  <a:srgbClr val="0F172A"/>
                 </a:solidFill>
                 <a:latin typeface="Trebuchet MS" pitchFamily="34" charset="0"/>
                 <a:ea typeface="Trebuchet MS" pitchFamily="34" charset="-122"/>
                 <a:cs typeface="Trebuchet MS" pitchFamily="34" charset="-120"/>
               </a:rPr>
-              <a:t>-keep</a:t>
-            </a:r>
-            <a:endParaRPr lang="en-US" sz="1300" dirty="0"/>
-          </a:p>
-        </p:txBody>
-      </p:sp>
-      <p:sp>
-        <p:nvSpPr>
-          <p:cNvPr id="38" name="Shape 36"/>
-          <p:cNvSpPr/>
-          <p:nvPr/>
-        </p:nvSpPr>
-        <p:spPr>
-          <a:xfrm>
-            <a:off x="365760" y="3246120"/>
-            <a:ext cx="2468880" cy="402336"/>
-          </a:xfrm>
-          <a:prstGeom prst="rect">
-            <a:avLst/>
-          </a:prstGeom>
-          <a:solidFill>
-            <a:srgbClr val="DDD6FE"/>
-          </a:solidFill>
-          <a:ln w="12700">
-            <a:solidFill>
-              <a:srgbClr val="E2E8F0"/>
-            </a:solidFill>
-            <a:prstDash val="solid"/>
-          </a:ln>
-        </p:spPr>
-      </p:sp>
-      <p:sp>
-        <p:nvSpPr>
-          <p:cNvPr id="39" name="Text 37"/>
-          <p:cNvSpPr/>
-          <p:nvPr/>
-        </p:nvSpPr>
-        <p:spPr>
-          <a:xfrm>
-            <a:off x="365760" y="3246120"/>
-            <a:ext cx="2468880" cy="402336"/>
+              <a:t>Sample words:</a:t>
+            </a:r>
+            <a:endParaRPr lang="en-US" sz="1200" dirty="0"/>
+          </a:p>
+        </p:txBody>
+      </p:sp>
+      <p:sp>
+        <p:nvSpPr>
+          <p:cNvPr id="44" name="Shape 42"/>
+          <p:cNvSpPr/>
+          <p:nvPr/>
+        </p:nvSpPr>
+        <p:spPr>
+          <a:xfrm>
+            <a:off x="365760" y="4023360"/>
+            <a:ext cx="2011680" cy="402336"/>
+          </a:xfrm>
+          <a:prstGeom prst="rect">
+            <a:avLst>
+              <a:gd name="adj" fmla="val 13636"/>
+            </a:avLst>
+          </a:prstGeom>
+          <a:solidFill>
+            <a:srgbClr val="EEF2FF"/>
+          </a:solidFill>
+          <a:ln w="12700">
+            <a:solidFill>
+              <a:srgbClr val="6366F1"/>
+            </a:solidFill>
+            <a:prstDash val="solid"/>
+          </a:ln>
+        </p:spPr>
+      </p:sp>
+      <p:sp>
+        <p:nvSpPr>
+          <p:cNvPr id="45" name="Text 43"/>
+          <p:cNvSpPr/>
+          <p:nvPr/>
+        </p:nvSpPr>
+        <p:spPr>
+          <a:xfrm>
+            <a:off x="365760" y="4023360"/>
+            <a:ext cx="2011680" cy="402336"/>
           </a:xfrm>
           <a:prstGeom prst="rect">
             <a:avLst/>
@@ -33829,80 +35007,57 @@
               <a:buNone/>
             </a:pPr>
             <a:r>
-              <a:rPr lang="en-US" sz="1300" b="1" dirty="0">
-                <a:solidFill>
-                  <a:srgbClr val="4C1D95"/>
+              <a:rPr lang="en-US" sz="1200" b="1" dirty="0">
+                <a:solidFill>
+                  <a:srgbClr val="4338CA"/>
                 </a:solidFill>
                 <a:latin typeface="Trebuchet MS" pitchFamily="34" charset="0"/>
                 <a:ea typeface="Trebuchet MS" pitchFamily="34" charset="-122"/>
                 <a:cs typeface="Trebuchet MS" pitchFamily="34" charset="-120"/>
               </a:rPr>
-              <a:t>child-</a:t>
-            </a:r>
-            <a:endParaRPr lang="en-US" sz="1300" dirty="0"/>
-          </a:p>
-        </p:txBody>
-      </p:sp>
-      <p:sp>
-        <p:nvSpPr>
-          <p:cNvPr id="40" name="Shape 38"/>
-          <p:cNvSpPr/>
-          <p:nvPr/>
-        </p:nvSpPr>
-        <p:spPr>
-          <a:xfrm>
-            <a:off x="2971800" y="3246120"/>
-            <a:ext cx="2834640" cy="402336"/>
-          </a:xfrm>
-          <a:prstGeom prst="rect">
-            <a:avLst/>
-          </a:prstGeom>
-          <a:solidFill>
-            <a:srgbClr val="F8FAFC"/>
-          </a:solidFill>
-          <a:ln w="12700">
-            <a:solidFill>
-              <a:srgbClr val="E2E8F0"/>
-            </a:solidFill>
-            <a:prstDash val="solid"/>
-          </a:ln>
-        </p:spPr>
-      </p:sp>
-      <p:sp>
-        <p:nvSpPr>
-          <p:cNvPr id="41" name="Shape 39"/>
-          <p:cNvSpPr/>
-          <p:nvPr/>
-        </p:nvSpPr>
-        <p:spPr>
-          <a:xfrm>
-            <a:off x="5943600" y="3246120"/>
-            <a:ext cx="2834640" cy="402336"/>
-          </a:xfrm>
-          <a:prstGeom prst="rect">
-            <a:avLst/>
-          </a:prstGeom>
-          <a:solidFill>
-            <a:srgbClr val="FCE7F3"/>
-          </a:solidFill>
-          <a:ln w="12700">
-            <a:solidFill>
-              <a:srgbClr val="E2E8F0"/>
-            </a:solidFill>
-            <a:prstDash val="solid"/>
-          </a:ln>
-        </p:spPr>
-      </p:sp>
-      <p:sp>
-        <p:nvSpPr>
-          <p:cNvPr id="42" name="Text 40"/>
-          <p:cNvSpPr/>
-          <p:nvPr/>
-        </p:nvSpPr>
-        <p:spPr>
-          <a:xfrm>
-            <a:off x="5943600" y="3246120"/>
-            <a:ext cx="2834640" cy="402336"/>
+              <a:t>safe</a:t>
+            </a:r>
+            <a:endParaRPr lang="en-US" sz="1200" dirty="0"/>
+          </a:p>
+        </p:txBody>
+      </p:sp>
+      <p:sp>
+        <p:nvSpPr>
+          <p:cNvPr id="46" name="Shape 44"/>
+          <p:cNvSpPr/>
+          <p:nvPr/>
+        </p:nvSpPr>
+        <p:spPr>
+          <a:xfrm>
+            <a:off x="2542032" y="4023360"/>
+            <a:ext cx="2011680" cy="402336"/>
+          </a:xfrm>
+          <a:prstGeom prst="rect">
+            <a:avLst>
+              <a:gd name="adj" fmla="val 13636"/>
+            </a:avLst>
+          </a:prstGeom>
+          <a:solidFill>
+            <a:srgbClr val="EEF2FF"/>
+          </a:solidFill>
+          <a:ln w="12700">
+            <a:solidFill>
+              <a:srgbClr val="6366F1"/>
+            </a:solidFill>
+            <a:prstDash val="solid"/>
+          </a:ln>
+        </p:spPr>
+      </p:sp>
+      <p:sp>
+        <p:nvSpPr>
+          <p:cNvPr id="47" name="Text 45"/>
+          <p:cNvSpPr/>
+          <p:nvPr/>
+        </p:nvSpPr>
+        <p:spPr>
+          <a:xfrm>
+            <a:off x="2542032" y="4023360"/>
+            <a:ext cx="2011680" cy="402336"/>
           </a:xfrm>
           <a:prstGeom prst="rect">
             <a:avLst/>
@@ -33918,30 +35073,57 @@
               <a:buNone/>
             </a:pPr>
             <a:r>
-              <a:rPr lang="en-US" sz="1300" b="1" dirty="0">
-                <a:solidFill>
-                  <a:srgbClr val="9D174D"/>
+              <a:rPr lang="en-US" sz="1200" b="1" dirty="0">
+                <a:solidFill>
+                  <a:srgbClr val="4338CA"/>
                 </a:solidFill>
                 <a:latin typeface="Trebuchet MS" pitchFamily="34" charset="0"/>
                 <a:ea typeface="Trebuchet MS" pitchFamily="34" charset="-122"/>
                 <a:cs typeface="Trebuchet MS" pitchFamily="34" charset="-120"/>
               </a:rPr>
-              <a:t>-r</a:t>
-            </a:r>
-            <a:endParaRPr lang="en-US" sz="1300" dirty="0"/>
-          </a:p>
-        </p:txBody>
-      </p:sp>
-      <p:sp>
-        <p:nvSpPr>
-          <p:cNvPr id="43" name="Text 41"/>
-          <p:cNvSpPr/>
-          <p:nvPr/>
-        </p:nvSpPr>
-        <p:spPr>
-          <a:xfrm>
-            <a:off x="365760" y="3611880"/>
-            <a:ext cx="1828800" cy="347472"/>
+              <a:t>safer</a:t>
+            </a:r>
+            <a:endParaRPr lang="en-US" sz="1200" dirty="0"/>
+          </a:p>
+        </p:txBody>
+      </p:sp>
+      <p:sp>
+        <p:nvSpPr>
+          <p:cNvPr id="48" name="Shape 46"/>
+          <p:cNvSpPr/>
+          <p:nvPr/>
+        </p:nvSpPr>
+        <p:spPr>
+          <a:xfrm>
+            <a:off x="4718304" y="4023360"/>
+            <a:ext cx="2011680" cy="402336"/>
+          </a:xfrm>
+          <a:prstGeom prst="rect">
+            <a:avLst>
+              <a:gd name="adj" fmla="val 13636"/>
+            </a:avLst>
+          </a:prstGeom>
+          <a:solidFill>
+            <a:srgbClr val="EEF2FF"/>
+          </a:solidFill>
+          <a:ln w="12700">
+            <a:solidFill>
+              <a:srgbClr val="6366F1"/>
+            </a:solidFill>
+            <a:prstDash val="solid"/>
+          </a:ln>
+        </p:spPr>
+      </p:sp>
+      <p:sp>
+        <p:nvSpPr>
+          <p:cNvPr id="49" name="Text 47"/>
+          <p:cNvSpPr/>
+          <p:nvPr/>
+        </p:nvSpPr>
+        <p:spPr>
+          <a:xfrm>
+            <a:off x="4718304" y="4023360"/>
+            <a:ext cx="2011680" cy="402336"/>
           </a:xfrm>
           <a:prstGeom prst="rect">
             <a:avLst/>
@@ -33953,19 +35135,19 @@
           <a:bodyPr wrap="square" lIns="0" tIns="0" rIns="0" bIns="0" rtlCol="0" anchor="ctr"/>
           <a:lstStyle/>
           <a:p>
-            <a:pPr algn="l" indent="0" marL="0">
+            <a:pPr algn="ctr" indent="0" marL="0">
               <a:buNone/>
             </a:pPr>
             <a:r>
               <a:rPr lang="en-US" sz="1200" b="1" dirty="0">
                 <a:solidFill>
-                  <a:srgbClr val="0F172A"/>
+                  <a:srgbClr val="4338CA"/>
                 </a:solidFill>
                 <a:latin typeface="Trebuchet MS" pitchFamily="34" charset="0"/>
                 <a:ea typeface="Trebuchet MS" pitchFamily="34" charset="-122"/>
                 <a:cs typeface="Trebuchet MS" pitchFamily="34" charset="-120"/>
               </a:rPr>
-              <a:t>Sample words:</a:t>
+              <a:t>safely</a:t>
             </a:r>
             <a:endParaRPr lang="en-US" sz="1200" dirty="0"/>
           </a:p>
@@ -33973,13 +35155,13 @@
       </p:sp>
       <p:sp>
         <p:nvSpPr>
-          <p:cNvPr id="44" name="Shape 42"/>
-          <p:cNvSpPr/>
-          <p:nvPr/>
-        </p:nvSpPr>
-        <p:spPr>
-          <a:xfrm>
-            <a:off x="365760" y="4023360"/>
+          <p:cNvPr id="50" name="Shape 48"/>
+          <p:cNvSpPr/>
+          <p:nvPr/>
+        </p:nvSpPr>
+        <p:spPr>
+          <a:xfrm>
+            <a:off x="6894576" y="4023360"/>
             <a:ext cx="2011680" cy="402336"/>
           </a:xfrm>
           <a:prstGeom prst="rect">
@@ -34000,13 +35182,13 @@
       </p:sp>
       <p:sp>
         <p:nvSpPr>
-          <p:cNvPr id="45" name="Text 43"/>
-          <p:cNvSpPr/>
-          <p:nvPr/>
-        </p:nvSpPr>
-        <p:spPr>
-          <a:xfrm>
-            <a:off x="365760" y="4023360"/>
+          <p:cNvPr id="51" name="Text 49"/>
+          <p:cNvSpPr/>
+          <p:nvPr/>
+        </p:nvSpPr>
+        <p:spPr>
+          <a:xfrm>
+            <a:off x="6894576" y="4023360"/>
             <a:ext cx="2011680" cy="402336"/>
           </a:xfrm>
           <a:prstGeom prst="rect">
@@ -34031,469 +35213,7 @@
                 <a:ea typeface="Trebuchet MS" pitchFamily="34" charset="-122"/>
                 <a:cs typeface="Trebuchet MS" pitchFamily="34" charset="-120"/>
               </a:rPr>
-              <a:t>safely</a:t>
-            </a:r>
-            <a:endParaRPr lang="en-US" sz="1200" dirty="0"/>
-          </a:p>
-        </p:txBody>
-      </p:sp>
-      <p:sp>
-        <p:nvSpPr>
-          <p:cNvPr id="46" name="Shape 44"/>
-          <p:cNvSpPr/>
-          <p:nvPr/>
-        </p:nvSpPr>
-        <p:spPr>
-          <a:xfrm>
-            <a:off x="2542032" y="4023360"/>
-            <a:ext cx="2011680" cy="402336"/>
-          </a:xfrm>
-          <a:prstGeom prst="rect">
-            <a:avLst>
-              <a:gd name="adj" fmla="val 13636"/>
-            </a:avLst>
-          </a:prstGeom>
-          <a:solidFill>
-            <a:srgbClr val="EEF2FF"/>
-          </a:solidFill>
-          <a:ln w="12700">
-            <a:solidFill>
-              <a:srgbClr val="6366F1"/>
-            </a:solidFill>
-            <a:prstDash val="solid"/>
-          </a:ln>
-        </p:spPr>
-      </p:sp>
-      <p:sp>
-        <p:nvSpPr>
-          <p:cNvPr id="47" name="Text 45"/>
-          <p:cNvSpPr/>
-          <p:nvPr/>
-        </p:nvSpPr>
-        <p:spPr>
-          <a:xfrm>
-            <a:off x="2542032" y="4023360"/>
-            <a:ext cx="2011680" cy="402336"/>
-          </a:xfrm>
-          <a:prstGeom prst="rect">
-            <a:avLst/>
-          </a:prstGeom>
-          <a:noFill/>
-          <a:ln/>
-        </p:spPr>
-        <p:txBody>
-          <a:bodyPr wrap="square" lIns="0" tIns="0" rIns="0" bIns="0" rtlCol="0" anchor="ctr"/>
-          <a:lstStyle/>
-          <a:p>
-            <a:pPr algn="ctr" indent="0" marL="0">
-              <a:buNone/>
-            </a:pPr>
-            <a:r>
-              <a:rPr lang="en-US" sz="1200" b="1" dirty="0">
-                <a:solidFill>
-                  <a:srgbClr val="4338CA"/>
-                </a:solidFill>
-                <a:latin typeface="Trebuchet MS" pitchFamily="34" charset="0"/>
-                <a:ea typeface="Trebuchet MS" pitchFamily="34" charset="-122"/>
-                <a:cs typeface="Trebuchet MS" pitchFamily="34" charset="-120"/>
-              </a:rPr>
-              <a:t>safety</a:t>
-            </a:r>
-            <a:endParaRPr lang="en-US" sz="1200" dirty="0"/>
-          </a:p>
-        </p:txBody>
-      </p:sp>
-      <p:sp>
-        <p:nvSpPr>
-          <p:cNvPr id="48" name="Shape 46"/>
-          <p:cNvSpPr/>
-          <p:nvPr/>
-        </p:nvSpPr>
-        <p:spPr>
-          <a:xfrm>
-            <a:off x="4718304" y="4023360"/>
-            <a:ext cx="2011680" cy="402336"/>
-          </a:xfrm>
-          <a:prstGeom prst="rect">
-            <a:avLst>
-              <a:gd name="adj" fmla="val 13636"/>
-            </a:avLst>
-          </a:prstGeom>
-          <a:solidFill>
-            <a:srgbClr val="EEF2FF"/>
-          </a:solidFill>
-          <a:ln w="12700">
-            <a:solidFill>
-              <a:srgbClr val="6366F1"/>
-            </a:solidFill>
-            <a:prstDash val="solid"/>
-          </a:ln>
-        </p:spPr>
-      </p:sp>
-      <p:sp>
-        <p:nvSpPr>
-          <p:cNvPr id="49" name="Text 47"/>
-          <p:cNvSpPr/>
-          <p:nvPr/>
-        </p:nvSpPr>
-        <p:spPr>
-          <a:xfrm>
-            <a:off x="4718304" y="4023360"/>
-            <a:ext cx="2011680" cy="402336"/>
-          </a:xfrm>
-          <a:prstGeom prst="rect">
-            <a:avLst/>
-          </a:prstGeom>
-          <a:noFill/>
-          <a:ln/>
-        </p:spPr>
-        <p:txBody>
-          <a:bodyPr wrap="square" lIns="0" tIns="0" rIns="0" bIns="0" rtlCol="0" anchor="ctr"/>
-          <a:lstStyle/>
-          <a:p>
-            <a:pPr algn="ctr" indent="0" marL="0">
-              <a:buNone/>
-            </a:pPr>
-            <a:r>
-              <a:rPr lang="en-US" sz="1200" b="1" dirty="0">
-                <a:solidFill>
-                  <a:srgbClr val="4338CA"/>
-                </a:solidFill>
-                <a:latin typeface="Trebuchet MS" pitchFamily="34" charset="0"/>
-                <a:ea typeface="Trebuchet MS" pitchFamily="34" charset="-122"/>
-                <a:cs typeface="Trebuchet MS" pitchFamily="34" charset="-120"/>
-              </a:rPr>
-              <a:t>safeguard</a:t>
-            </a:r>
-            <a:endParaRPr lang="en-US" sz="1200" dirty="0"/>
-          </a:p>
-        </p:txBody>
-      </p:sp>
-      <p:sp>
-        <p:nvSpPr>
-          <p:cNvPr id="50" name="Shape 48"/>
-          <p:cNvSpPr/>
-          <p:nvPr/>
-        </p:nvSpPr>
-        <p:spPr>
-          <a:xfrm>
-            <a:off x="6894576" y="4023360"/>
-            <a:ext cx="2011680" cy="402336"/>
-          </a:xfrm>
-          <a:prstGeom prst="rect">
-            <a:avLst>
-              <a:gd name="adj" fmla="val 13636"/>
-            </a:avLst>
-          </a:prstGeom>
-          <a:solidFill>
-            <a:srgbClr val="EEF2FF"/>
-          </a:solidFill>
-          <a:ln w="12700">
-            <a:solidFill>
-              <a:srgbClr val="6366F1"/>
-            </a:solidFill>
-            <a:prstDash val="solid"/>
-          </a:ln>
-        </p:spPr>
-      </p:sp>
-      <p:sp>
-        <p:nvSpPr>
-          <p:cNvPr id="51" name="Text 49"/>
-          <p:cNvSpPr/>
-          <p:nvPr/>
-        </p:nvSpPr>
-        <p:spPr>
-          <a:xfrm>
-            <a:off x="6894576" y="4023360"/>
-            <a:ext cx="2011680" cy="402336"/>
-          </a:xfrm>
-          <a:prstGeom prst="rect">
-            <a:avLst/>
-          </a:prstGeom>
-          <a:noFill/>
-          <a:ln/>
-        </p:spPr>
-        <p:txBody>
-          <a:bodyPr wrap="square" lIns="0" tIns="0" rIns="0" bIns="0" rtlCol="0" anchor="ctr"/>
-          <a:lstStyle/>
-          <a:p>
-            <a:pPr algn="ctr" indent="0" marL="0">
-              <a:buNone/>
-            </a:pPr>
-            <a:r>
-              <a:rPr lang="en-US" sz="1200" b="1" dirty="0">
-                <a:solidFill>
-                  <a:srgbClr val="4338CA"/>
-                </a:solidFill>
-                <a:latin typeface="Trebuchet MS" pitchFamily="34" charset="0"/>
-                <a:ea typeface="Trebuchet MS" pitchFamily="34" charset="-122"/>
-                <a:cs typeface="Trebuchet MS" pitchFamily="34" charset="-120"/>
-              </a:rPr>
-              <a:t>unsafe</a:t>
-            </a:r>
-            <a:endParaRPr lang="en-US" sz="1200" dirty="0"/>
-          </a:p>
-        </p:txBody>
-      </p:sp>
-      <p:sp>
-        <p:nvSpPr>
-          <p:cNvPr id="52" name="Shape 50"/>
-          <p:cNvSpPr/>
-          <p:nvPr/>
-        </p:nvSpPr>
-        <p:spPr>
-          <a:xfrm>
-            <a:off x="365760" y="4498848"/>
-            <a:ext cx="2011680" cy="402336"/>
-          </a:xfrm>
-          <a:prstGeom prst="rect">
-            <a:avLst>
-              <a:gd name="adj" fmla="val 13636"/>
-            </a:avLst>
-          </a:prstGeom>
-          <a:solidFill>
-            <a:srgbClr val="EEF2FF"/>
-          </a:solidFill>
-          <a:ln w="12700">
-            <a:solidFill>
-              <a:srgbClr val="6366F1"/>
-            </a:solidFill>
-            <a:prstDash val="solid"/>
-          </a:ln>
-        </p:spPr>
-      </p:sp>
-      <p:sp>
-        <p:nvSpPr>
-          <p:cNvPr id="53" name="Text 51"/>
-          <p:cNvSpPr/>
-          <p:nvPr/>
-        </p:nvSpPr>
-        <p:spPr>
-          <a:xfrm>
-            <a:off x="365760" y="4498848"/>
-            <a:ext cx="2011680" cy="402336"/>
-          </a:xfrm>
-          <a:prstGeom prst="rect">
-            <a:avLst/>
-          </a:prstGeom>
-          <a:noFill/>
-          <a:ln/>
-        </p:spPr>
-        <p:txBody>
-          <a:bodyPr wrap="square" lIns="0" tIns="0" rIns="0" bIns="0" rtlCol="0" anchor="ctr"/>
-          <a:lstStyle/>
-          <a:p>
-            <a:pPr algn="ctr" indent="0" marL="0">
-              <a:buNone/>
-            </a:pPr>
-            <a:r>
-              <a:rPr lang="en-US" sz="1200" b="1" dirty="0">
-                <a:solidFill>
-                  <a:srgbClr val="4338CA"/>
-                </a:solidFill>
-                <a:latin typeface="Trebuchet MS" pitchFamily="34" charset="0"/>
-                <a:ea typeface="Trebuchet MS" pitchFamily="34" charset="-122"/>
-                <a:cs typeface="Trebuchet MS" pitchFamily="34" charset="-120"/>
-              </a:rPr>
-              <a:t>safekeeper</a:t>
-            </a:r>
-            <a:endParaRPr lang="en-US" sz="1200" dirty="0"/>
-          </a:p>
-        </p:txBody>
-      </p:sp>
-      <p:sp>
-        <p:nvSpPr>
-          <p:cNvPr id="54" name="Shape 52"/>
-          <p:cNvSpPr/>
-          <p:nvPr/>
-        </p:nvSpPr>
-        <p:spPr>
-          <a:xfrm>
-            <a:off x="2542032" y="4498848"/>
-            <a:ext cx="2011680" cy="402336"/>
-          </a:xfrm>
-          <a:prstGeom prst="rect">
-            <a:avLst>
-              <a:gd name="adj" fmla="val 13636"/>
-            </a:avLst>
-          </a:prstGeom>
-          <a:solidFill>
-            <a:srgbClr val="EEF2FF"/>
-          </a:solidFill>
-          <a:ln w="12700">
-            <a:solidFill>
-              <a:srgbClr val="6366F1"/>
-            </a:solidFill>
-            <a:prstDash val="solid"/>
-          </a:ln>
-        </p:spPr>
-      </p:sp>
-      <p:sp>
-        <p:nvSpPr>
-          <p:cNvPr id="55" name="Text 53"/>
-          <p:cNvSpPr/>
-          <p:nvPr/>
-        </p:nvSpPr>
-        <p:spPr>
-          <a:xfrm>
-            <a:off x="2542032" y="4498848"/>
-            <a:ext cx="2011680" cy="402336"/>
-          </a:xfrm>
-          <a:prstGeom prst="rect">
-            <a:avLst/>
-          </a:prstGeom>
-          <a:noFill/>
-          <a:ln/>
-        </p:spPr>
-        <p:txBody>
-          <a:bodyPr wrap="square" lIns="0" tIns="0" rIns="0" bIns="0" rtlCol="0" anchor="ctr"/>
-          <a:lstStyle/>
-          <a:p>
-            <a:pPr algn="ctr" indent="0" marL="0">
-              <a:buNone/>
-            </a:pPr>
-            <a:r>
-              <a:rPr lang="en-US" sz="1200" b="1" dirty="0">
-                <a:solidFill>
-                  <a:srgbClr val="4338CA"/>
-                </a:solidFill>
-                <a:latin typeface="Trebuchet MS" pitchFamily="34" charset="0"/>
-                <a:ea typeface="Trebuchet MS" pitchFamily="34" charset="-122"/>
-                <a:cs typeface="Trebuchet MS" pitchFamily="34" charset="-120"/>
-              </a:rPr>
               <a:t>safest</a:t>
-            </a:r>
-            <a:endParaRPr lang="en-US" sz="1200" dirty="0"/>
-          </a:p>
-        </p:txBody>
-      </p:sp>
-      <p:sp>
-        <p:nvSpPr>
-          <p:cNvPr id="56" name="Shape 54"/>
-          <p:cNvSpPr/>
-          <p:nvPr/>
-        </p:nvSpPr>
-        <p:spPr>
-          <a:xfrm>
-            <a:off x="4718304" y="4498848"/>
-            <a:ext cx="2011680" cy="402336"/>
-          </a:xfrm>
-          <a:prstGeom prst="rect">
-            <a:avLst>
-              <a:gd name="adj" fmla="val 13636"/>
-            </a:avLst>
-          </a:prstGeom>
-          <a:solidFill>
-            <a:srgbClr val="EEF2FF"/>
-          </a:solidFill>
-          <a:ln w="12700">
-            <a:solidFill>
-              <a:srgbClr val="6366F1"/>
-            </a:solidFill>
-            <a:prstDash val="solid"/>
-          </a:ln>
-        </p:spPr>
-      </p:sp>
-      <p:sp>
-        <p:nvSpPr>
-          <p:cNvPr id="57" name="Text 55"/>
-          <p:cNvSpPr/>
-          <p:nvPr/>
-        </p:nvSpPr>
-        <p:spPr>
-          <a:xfrm>
-            <a:off x="4718304" y="4498848"/>
-            <a:ext cx="2011680" cy="402336"/>
-          </a:xfrm>
-          <a:prstGeom prst="rect">
-            <a:avLst/>
-          </a:prstGeom>
-          <a:noFill/>
-          <a:ln/>
-        </p:spPr>
-        <p:txBody>
-          <a:bodyPr wrap="square" lIns="0" tIns="0" rIns="0" bIns="0" rtlCol="0" anchor="ctr"/>
-          <a:lstStyle/>
-          <a:p>
-            <a:pPr algn="ctr" indent="0" marL="0">
-              <a:buNone/>
-            </a:pPr>
-            <a:r>
-              <a:rPr lang="en-US" sz="1200" b="1" dirty="0">
-                <a:solidFill>
-                  <a:srgbClr val="4338CA"/>
-                </a:solidFill>
-                <a:latin typeface="Trebuchet MS" pitchFamily="34" charset="0"/>
-                <a:ea typeface="Trebuchet MS" pitchFamily="34" charset="-122"/>
-                <a:cs typeface="Trebuchet MS" pitchFamily="34" charset="-120"/>
-              </a:rPr>
-              <a:t>resafe</a:t>
-            </a:r>
-            <a:endParaRPr lang="en-US" sz="1200" dirty="0"/>
-          </a:p>
-        </p:txBody>
-      </p:sp>
-      <p:sp>
-        <p:nvSpPr>
-          <p:cNvPr id="58" name="Shape 56"/>
-          <p:cNvSpPr/>
-          <p:nvPr/>
-        </p:nvSpPr>
-        <p:spPr>
-          <a:xfrm>
-            <a:off x="6894576" y="4498848"/>
-            <a:ext cx="2011680" cy="402336"/>
-          </a:xfrm>
-          <a:prstGeom prst="rect">
-            <a:avLst>
-              <a:gd name="adj" fmla="val 13636"/>
-            </a:avLst>
-          </a:prstGeom>
-          <a:solidFill>
-            <a:srgbClr val="EEF2FF"/>
-          </a:solidFill>
-          <a:ln w="12700">
-            <a:solidFill>
-              <a:srgbClr val="6366F1"/>
-            </a:solidFill>
-            <a:prstDash val="solid"/>
-          </a:ln>
-        </p:spPr>
-      </p:sp>
-      <p:sp>
-        <p:nvSpPr>
-          <p:cNvPr id="59" name="Text 57"/>
-          <p:cNvSpPr/>
-          <p:nvPr/>
-        </p:nvSpPr>
-        <p:spPr>
-          <a:xfrm>
-            <a:off x="6894576" y="4498848"/>
-            <a:ext cx="2011680" cy="402336"/>
-          </a:xfrm>
-          <a:prstGeom prst="rect">
-            <a:avLst/>
-          </a:prstGeom>
-          <a:noFill/>
-          <a:ln/>
-        </p:spPr>
-        <p:txBody>
-          <a:bodyPr wrap="square" lIns="0" tIns="0" rIns="0" bIns="0" rtlCol="0" anchor="ctr"/>
-          <a:lstStyle/>
-          <a:p>
-            <a:pPr algn="ctr" indent="0" marL="0">
-              <a:buNone/>
-            </a:pPr>
-            <a:r>
-              <a:rPr lang="en-US" sz="1200" b="1" dirty="0">
-                <a:solidFill>
-                  <a:srgbClr val="4338CA"/>
-                </a:solidFill>
-                <a:latin typeface="Trebuchet MS" pitchFamily="34" charset="0"/>
-                <a:ea typeface="Trebuchet MS" pitchFamily="34" charset="-122"/>
-                <a:cs typeface="Trebuchet MS" pitchFamily="34" charset="-120"/>
-              </a:rPr>
-              <a:t>safecracker</a:t>
             </a:r>
             <a:endParaRPr lang="en-US" sz="1200" dirty="0"/>
           </a:p>
@@ -34785,7 +35505,7 @@
                 <a:ea typeface="Calibri" pitchFamily="34" charset="-122"/>
                 <a:cs typeface="Calibri" pitchFamily="34" charset="-120"/>
               </a:rPr>
-              <a:t>Word Labs  •  wordlabs.app  •  Root: 'safe' = free from harm or danger</a:t>
+              <a:t>Word Labs  •  wordlabs.app  •  Root: 'safe' = free from danger</a:t>
             </a:r>
             <a:endParaRPr lang="en-US" sz="800" dirty="0"/>
           </a:p>
@@ -34949,7 +35669,7 @@
                 <a:ea typeface="Calibri" pitchFamily="34" charset="-122"/>
                 <a:cs typeface="Calibri" pitchFamily="34" charset="-120"/>
               </a:rPr>
-              <a:t>The core part of a word carrying its basic meaning. For example, 'safe' means 'free from harm or danger'.</a:t>
+              <a:t>The core part of a word carrying its basic meaning. For example, 'safe' means 'free from danger'.</a:t>
             </a:r>
             <a:endParaRPr lang="en-US" sz="1350" dirty="0"/>
           </a:p>
@@ -35569,7 +36289,7 @@
                 <a:ea typeface="Calibri" pitchFamily="34" charset="-122"/>
                 <a:cs typeface="Calibri" pitchFamily="34" charset="-120"/>
               </a:rPr>
-              <a:t>Word Labs  •  wordlabs.app  •  Root: 'safe' = free from harm or danger</a:t>
+              <a:t>Word Labs  •  wordlabs.app  •  Root: 'safe' = free from danger</a:t>
             </a:r>
             <a:endParaRPr lang="en-US" sz="800" dirty="0"/>
           </a:p>
@@ -35681,7 +36401,7 @@
                 <a:ea typeface="Calibri" pitchFamily="34" charset="-122"/>
                 <a:cs typeface="Calibri" pitchFamily="34" charset="-120"/>
               </a:rPr>
-              <a:t>1.  Adding '-ly' to 'safe' changes it into a noun.</a:t>
+              <a:t>1.  'safer' means 'more colourful than something else'.</a:t>
             </a:r>
             <a:endParaRPr lang="en-US" sz="1300" dirty="0"/>
           </a:p>
@@ -35820,7 +36540,7 @@
                 <a:ea typeface="Calibri" pitchFamily="34" charset="-122"/>
                 <a:cs typeface="Calibri" pitchFamily="34" charset="-120"/>
               </a:rPr>
-              <a:t>2.  The root 'safe' comes from an ancient Greek word.</a:t>
+              <a:t>2.  'safe' means 'extremely fast and energetic'.</a:t>
             </a:r>
             <a:endParaRPr lang="en-US" sz="1300" dirty="0"/>
           </a:p>
@@ -35959,7 +36679,7 @@
                 <a:ea typeface="Calibri" pitchFamily="34" charset="-122"/>
                 <a:cs typeface="Calibri" pitchFamily="34" charset="-120"/>
               </a:rPr>
-              <a:t>3.  The word 'unsafe' uses a prefix to give 'safe' the opposite meaning.</a:t>
+              <a:t>3.  'safe' means 'free from danger'.</a:t>
             </a:r>
             <a:endParaRPr lang="en-US" sz="1300" dirty="0"/>
           </a:p>
@@ -36098,7 +36818,7 @@
                 <a:ea typeface="Calibri" pitchFamily="34" charset="-122"/>
                 <a:cs typeface="Calibri" pitchFamily="34" charset="-120"/>
               </a:rPr>
-              <a:t>4.  A 'safeguard' is something that protects you from harm.</a:t>
+              <a:t>4.  'safe' means 'protected from danger or harm'.</a:t>
             </a:r>
             <a:endParaRPr lang="en-US" sz="1300" dirty="0"/>
           </a:p>
@@ -36237,7 +36957,7 @@
                 <a:ea typeface="Calibri" pitchFamily="34" charset="-122"/>
                 <a:cs typeface="Calibri" pitchFamily="34" charset="-120"/>
               </a:rPr>
-              <a:t>5.  The word 'safely' is formed by adding the suffix '-ly' to the root 'safe'.</a:t>
+              <a:t>5.  'safer' means 'less dangerous than something else'.</a:t>
             </a:r>
             <a:endParaRPr lang="en-US" sz="1300" dirty="0"/>
           </a:p>
@@ -36595,7 +37315,7 @@
                 <a:ea typeface="Calibri" pitchFamily="34" charset="-122"/>
                 <a:cs typeface="Calibri" pitchFamily="34" charset="-120"/>
               </a:rPr>
-              <a:t>Word Labs  •  wordlabs.app  •  Root: 'safe' = free from harm or danger</a:t>
+              <a:t>Word Labs  •  wordlabs.app  •  Root: 'safe' = free from danger</a:t>
             </a:r>
             <a:endParaRPr lang="en-US" sz="800" dirty="0"/>
           </a:p>
@@ -36732,7 +37452,7 @@
                 <a:ea typeface="Trebuchet MS" pitchFamily="34" charset="-122"/>
                 <a:cs typeface="Trebuchet MS" pitchFamily="34" charset="-120"/>
               </a:rPr>
-              <a:t>free from harm or danger</a:t>
+              <a:t>free from danger</a:t>
             </a:r>
             <a:endParaRPr lang="en-US" sz="2000" dirty="0"/>
           </a:p>
@@ -36771,7 +37491,7 @@
                 <a:ea typeface="Calibri" pitchFamily="34" charset="-122"/>
                 <a:cs typeface="Calibri" pitchFamily="34" charset="-120"/>
               </a:rPr>
-              <a:t>Origin: Latin: salvus</a:t>
+              <a:t>Origin: Anglo-Saxon (Old English) root</a:t>
             </a:r>
             <a:endParaRPr lang="en-US" sz="1100" dirty="0"/>
           </a:p>
@@ -36876,7 +37596,7 @@
                 <a:ea typeface="Trebuchet MS" pitchFamily="34" charset="-122"/>
                 <a:cs typeface="Trebuchet MS" pitchFamily="34" charset="-120"/>
               </a:rPr>
-              <a:t>safely</a:t>
+              <a:t>safe</a:t>
             </a:r>
             <a:endParaRPr lang="en-US" sz="1300" dirty="0"/>
           </a:p>
@@ -36942,7 +37662,7 @@
                 <a:ea typeface="Trebuchet MS" pitchFamily="34" charset="-122"/>
                 <a:cs typeface="Trebuchet MS" pitchFamily="34" charset="-120"/>
               </a:rPr>
-              <a:t>safety</a:t>
+              <a:t>safer</a:t>
             </a:r>
             <a:endParaRPr lang="en-US" sz="1300" dirty="0"/>
           </a:p>
@@ -37008,7 +37728,7 @@
                 <a:ea typeface="Trebuchet MS" pitchFamily="34" charset="-122"/>
                 <a:cs typeface="Trebuchet MS" pitchFamily="34" charset="-120"/>
               </a:rPr>
-              <a:t>safeguard</a:t>
+              <a:t>safely</a:t>
             </a:r>
             <a:endParaRPr lang="en-US" sz="1300" dirty="0"/>
           </a:p>
@@ -37074,205 +37794,7 @@
                 <a:ea typeface="Trebuchet MS" pitchFamily="34" charset="-122"/>
                 <a:cs typeface="Trebuchet MS" pitchFamily="34" charset="-120"/>
               </a:rPr>
-              <a:t>unsafe</a:t>
-            </a:r>
-            <a:endParaRPr lang="en-US" sz="1300" dirty="0"/>
-          </a:p>
-        </p:txBody>
-      </p:sp>
-      <p:sp>
-        <p:nvSpPr>
-          <p:cNvPr id="24" name="Shape 22"/>
-          <p:cNvSpPr/>
-          <p:nvPr/>
-        </p:nvSpPr>
-        <p:spPr>
-          <a:xfrm>
-            <a:off x="365760" y="3401568"/>
-            <a:ext cx="2011680" cy="502920"/>
-          </a:xfrm>
-          <a:prstGeom prst="rect">
-            <a:avLst>
-              <a:gd name="adj" fmla="val 14545"/>
-            </a:avLst>
-          </a:prstGeom>
-          <a:solidFill>
-            <a:srgbClr val="EEF2FF"/>
-          </a:solidFill>
-          <a:ln w="12700">
-            <a:solidFill>
-              <a:srgbClr val="6366F1"/>
-            </a:solidFill>
-            <a:prstDash val="solid"/>
-          </a:ln>
-        </p:spPr>
-      </p:sp>
-      <p:sp>
-        <p:nvSpPr>
-          <p:cNvPr id="25" name="Text 23"/>
-          <p:cNvSpPr/>
-          <p:nvPr/>
-        </p:nvSpPr>
-        <p:spPr>
-          <a:xfrm>
-            <a:off x="365760" y="3401568"/>
-            <a:ext cx="2011680" cy="502920"/>
-          </a:xfrm>
-          <a:prstGeom prst="rect">
-            <a:avLst/>
-          </a:prstGeom>
-          <a:noFill/>
-          <a:ln/>
-        </p:spPr>
-        <p:txBody>
-          <a:bodyPr wrap="square" lIns="0" tIns="0" rIns="0" bIns="0" rtlCol="0" anchor="ctr"/>
-          <a:lstStyle/>
-          <a:p>
-            <a:pPr algn="ctr" indent="0" marL="0">
-              <a:buNone/>
-            </a:pPr>
-            <a:r>
-              <a:rPr lang="en-US" sz="1300" b="1" dirty="0">
-                <a:solidFill>
-                  <a:srgbClr val="4338CA"/>
-                </a:solidFill>
-                <a:latin typeface="Trebuchet MS" pitchFamily="34" charset="0"/>
-                <a:ea typeface="Trebuchet MS" pitchFamily="34" charset="-122"/>
-                <a:cs typeface="Trebuchet MS" pitchFamily="34" charset="-120"/>
-              </a:rPr>
-              <a:t>safekeeper</a:t>
-            </a:r>
-            <a:endParaRPr lang="en-US" sz="1300" dirty="0"/>
-          </a:p>
-        </p:txBody>
-      </p:sp>
-      <p:sp>
-        <p:nvSpPr>
-          <p:cNvPr id="26" name="Shape 24"/>
-          <p:cNvSpPr/>
-          <p:nvPr/>
-        </p:nvSpPr>
-        <p:spPr>
-          <a:xfrm>
-            <a:off x="2514600" y="3401568"/>
-            <a:ext cx="2011680" cy="502920"/>
-          </a:xfrm>
-          <a:prstGeom prst="rect">
-            <a:avLst>
-              <a:gd name="adj" fmla="val 14545"/>
-            </a:avLst>
-          </a:prstGeom>
-          <a:solidFill>
-            <a:srgbClr val="EEF2FF"/>
-          </a:solidFill>
-          <a:ln w="12700">
-            <a:solidFill>
-              <a:srgbClr val="6366F1"/>
-            </a:solidFill>
-            <a:prstDash val="solid"/>
-          </a:ln>
-        </p:spPr>
-      </p:sp>
-      <p:sp>
-        <p:nvSpPr>
-          <p:cNvPr id="27" name="Text 25"/>
-          <p:cNvSpPr/>
-          <p:nvPr/>
-        </p:nvSpPr>
-        <p:spPr>
-          <a:xfrm>
-            <a:off x="2514600" y="3401568"/>
-            <a:ext cx="2011680" cy="502920"/>
-          </a:xfrm>
-          <a:prstGeom prst="rect">
-            <a:avLst/>
-          </a:prstGeom>
-          <a:noFill/>
-          <a:ln/>
-        </p:spPr>
-        <p:txBody>
-          <a:bodyPr wrap="square" lIns="0" tIns="0" rIns="0" bIns="0" rtlCol="0" anchor="ctr"/>
-          <a:lstStyle/>
-          <a:p>
-            <a:pPr algn="ctr" indent="0" marL="0">
-              <a:buNone/>
-            </a:pPr>
-            <a:r>
-              <a:rPr lang="en-US" sz="1300" b="1" dirty="0">
-                <a:solidFill>
-                  <a:srgbClr val="4338CA"/>
-                </a:solidFill>
-                <a:latin typeface="Trebuchet MS" pitchFamily="34" charset="0"/>
-                <a:ea typeface="Trebuchet MS" pitchFamily="34" charset="-122"/>
-                <a:cs typeface="Trebuchet MS" pitchFamily="34" charset="-120"/>
-              </a:rPr>
               <a:t>safest</a:t>
-            </a:r>
-            <a:endParaRPr lang="en-US" sz="1300" dirty="0"/>
-          </a:p>
-        </p:txBody>
-      </p:sp>
-      <p:sp>
-        <p:nvSpPr>
-          <p:cNvPr id="28" name="Shape 26"/>
-          <p:cNvSpPr/>
-          <p:nvPr/>
-        </p:nvSpPr>
-        <p:spPr>
-          <a:xfrm>
-            <a:off x="4663440" y="3401568"/>
-            <a:ext cx="2011680" cy="502920"/>
-          </a:xfrm>
-          <a:prstGeom prst="rect">
-            <a:avLst>
-              <a:gd name="adj" fmla="val 14545"/>
-            </a:avLst>
-          </a:prstGeom>
-          <a:solidFill>
-            <a:srgbClr val="EEF2FF"/>
-          </a:solidFill>
-          <a:ln w="12700">
-            <a:solidFill>
-              <a:srgbClr val="6366F1"/>
-            </a:solidFill>
-            <a:prstDash val="solid"/>
-          </a:ln>
-        </p:spPr>
-      </p:sp>
-      <p:sp>
-        <p:nvSpPr>
-          <p:cNvPr id="29" name="Text 27"/>
-          <p:cNvSpPr/>
-          <p:nvPr/>
-        </p:nvSpPr>
-        <p:spPr>
-          <a:xfrm>
-            <a:off x="4663440" y="3401568"/>
-            <a:ext cx="2011680" cy="502920"/>
-          </a:xfrm>
-          <a:prstGeom prst="rect">
-            <a:avLst/>
-          </a:prstGeom>
-          <a:noFill/>
-          <a:ln/>
-        </p:spPr>
-        <p:txBody>
-          <a:bodyPr wrap="square" lIns="0" tIns="0" rIns="0" bIns="0" rtlCol="0" anchor="ctr"/>
-          <a:lstStyle/>
-          <a:p>
-            <a:pPr algn="ctr" indent="0" marL="0">
-              <a:buNone/>
-            </a:pPr>
-            <a:r>
-              <a:rPr lang="en-US" sz="1300" b="1" dirty="0">
-                <a:solidFill>
-                  <a:srgbClr val="4338CA"/>
-                </a:solidFill>
-                <a:latin typeface="Trebuchet MS" pitchFamily="34" charset="0"/>
-                <a:ea typeface="Trebuchet MS" pitchFamily="34" charset="-122"/>
-                <a:cs typeface="Trebuchet MS" pitchFamily="34" charset="-120"/>
-              </a:rPr>
-              <a:t>resafe</a:t>
             </a:r>
             <a:endParaRPr lang="en-US" sz="1300" dirty="0"/>
           </a:p>
@@ -37564,7 +38086,7 @@
                 <a:ea typeface="Calibri" pitchFamily="34" charset="-122"/>
                 <a:cs typeface="Calibri" pitchFamily="34" charset="-120"/>
               </a:rPr>
-              <a:t>Word Labs  •  wordlabs.app  •  Root: 'safe' = free from harm or danger</a:t>
+              <a:t>Word Labs  •  wordlabs.app  •  Root: 'safe' = free from danger</a:t>
             </a:r>
             <a:endParaRPr lang="en-US" sz="800" dirty="0"/>
           </a:p>
@@ -37993,7 +38515,7 @@
                 <a:ea typeface="Trebuchet MS" pitchFamily="34" charset="-122"/>
                 <a:cs typeface="Trebuchet MS" pitchFamily="34" charset="-120"/>
               </a:rPr>
-              <a:t>-ly</a:t>
+              <a:t>-ary</a:t>
             </a:r>
             <a:endParaRPr lang="en-US" sz="1300" dirty="0"/>
           </a:p>
@@ -38014,7 +38536,7 @@
             <a:avLst/>
           </a:prstGeom>
           <a:solidFill>
-            <a:srgbClr val="DDD6FE"/>
+            <a:srgbClr val="F1F5F9"/>
           </a:solidFill>
           <a:ln w="12700">
             <a:solidFill>
@@ -38026,18 +38548,68 @@
       </p:sp>
       <p:sp>
         <p:nvSpPr>
-          <p:cNvPr id="24" name="Text 22"/>
-          <p:cNvSpPr/>
-          <p:nvPr/>
-        </p:nvSpPr>
-        <p:spPr>
-          <a:xfrm>
-            <a:off x="640080" y="2212848"/>
+          <p:cNvPr id="24" name="Shape 22"/>
+          <p:cNvSpPr/>
+          <p:nvPr/>
+        </p:nvSpPr>
+        <p:spPr>
+          <a:xfrm>
+            <a:off x="3291840" y="2212848"/>
+            <a:ext cx="1645920" cy="420624"/>
+          </a:xfrm>
+          <a:prstGeom prst="rect">
+            <a:avLst/>
+          </a:prstGeom>
+          <a:solidFill>
+            <a:srgbClr val="F1F5F9"/>
+          </a:solidFill>
+          <a:ln w="12700">
+            <a:solidFill>
+              <a:srgbClr val="E5E7EB"/>
+            </a:solidFill>
+            <a:prstDash val="solid"/>
+          </a:ln>
+        </p:spPr>
+      </p:sp>
+      <p:sp>
+        <p:nvSpPr>
+          <p:cNvPr id="25" name="Shape 23"/>
+          <p:cNvSpPr/>
+          <p:nvPr/>
+        </p:nvSpPr>
+        <p:spPr>
+          <a:xfrm>
+            <a:off x="5943600" y="2212848"/>
             <a:ext cx="1463040" cy="420624"/>
           </a:xfrm>
           <a:prstGeom prst="rect">
             <a:avLst/>
           </a:prstGeom>
+          <a:solidFill>
+            <a:srgbClr val="FCE7F3"/>
+          </a:solidFill>
+          <a:ln w="12700">
+            <a:solidFill>
+              <a:srgbClr val="E5E7EB"/>
+            </a:solidFill>
+            <a:prstDash val="solid"/>
+          </a:ln>
+        </p:spPr>
+      </p:sp>
+      <p:sp>
+        <p:nvSpPr>
+          <p:cNvPr id="26" name="Text 24"/>
+          <p:cNvSpPr/>
+          <p:nvPr/>
+        </p:nvSpPr>
+        <p:spPr>
+          <a:xfrm>
+            <a:off x="5943600" y="2212848"/>
+            <a:ext cx="1463040" cy="420624"/>
+          </a:xfrm>
+          <a:prstGeom prst="rect">
+            <a:avLst/>
+          </a:prstGeom>
           <a:noFill/>
           <a:ln/>
         </p:spPr>
@@ -38051,13 +38623,13 @@
             <a:r>
               <a:rPr lang="en-US" sz="1300" b="1" dirty="0">
                 <a:solidFill>
-                  <a:srgbClr val="4C1D95"/>
+                  <a:srgbClr val="9D174D"/>
                 </a:solidFill>
                 <a:latin typeface="Trebuchet MS" pitchFamily="34" charset="0"/>
                 <a:ea typeface="Trebuchet MS" pitchFamily="34" charset="-122"/>
                 <a:cs typeface="Trebuchet MS" pitchFamily="34" charset="-120"/>
               </a:rPr>
-              <a:t>re-</a:t>
+              <a:t>-ly</a:t>
             </a:r>
             <a:endParaRPr lang="en-US" sz="1300" dirty="0"/>
           </a:p>
@@ -38065,20 +38637,45 @@
       </p:sp>
       <p:sp>
         <p:nvSpPr>
-          <p:cNvPr id="25" name="Shape 23"/>
-          <p:cNvSpPr/>
-          <p:nvPr/>
-        </p:nvSpPr>
-        <p:spPr>
-          <a:xfrm>
-            <a:off x="3291840" y="2212848"/>
+          <p:cNvPr id="27" name="Shape 25"/>
+          <p:cNvSpPr/>
+          <p:nvPr/>
+        </p:nvSpPr>
+        <p:spPr>
+          <a:xfrm>
+            <a:off x="640080" y="2670048"/>
+            <a:ext cx="1463040" cy="420624"/>
+          </a:xfrm>
+          <a:prstGeom prst="rect">
+            <a:avLst/>
+          </a:prstGeom>
+          <a:solidFill>
+            <a:srgbClr val="F8FAFC"/>
+          </a:solidFill>
+          <a:ln w="12700">
+            <a:solidFill>
+              <a:srgbClr val="E5E7EB"/>
+            </a:solidFill>
+            <a:prstDash val="solid"/>
+          </a:ln>
+        </p:spPr>
+      </p:sp>
+      <p:sp>
+        <p:nvSpPr>
+          <p:cNvPr id="28" name="Shape 26"/>
+          <p:cNvSpPr/>
+          <p:nvPr/>
+        </p:nvSpPr>
+        <p:spPr>
+          <a:xfrm>
+            <a:off x="3291840" y="2670048"/>
             <a:ext cx="1645920" cy="420624"/>
           </a:xfrm>
           <a:prstGeom prst="rect">
             <a:avLst/>
           </a:prstGeom>
           <a:solidFill>
-            <a:srgbClr val="F1F5F9"/>
+            <a:srgbClr val="F8FAFC"/>
           </a:solidFill>
           <a:ln w="12700">
             <a:solidFill>
@@ -38090,13 +38687,13 @@
       </p:sp>
       <p:sp>
         <p:nvSpPr>
-          <p:cNvPr id="26" name="Shape 24"/>
-          <p:cNvSpPr/>
-          <p:nvPr/>
-        </p:nvSpPr>
-        <p:spPr>
-          <a:xfrm>
-            <a:off x="5943600" y="2212848"/>
+          <p:cNvPr id="29" name="Shape 27"/>
+          <p:cNvSpPr/>
+          <p:nvPr/>
+        </p:nvSpPr>
+        <p:spPr>
+          <a:xfrm>
+            <a:off x="5943600" y="2670048"/>
             <a:ext cx="1463040" cy="420624"/>
           </a:xfrm>
           <a:prstGeom prst="rect">
@@ -38115,13 +38712,13 @@
       </p:sp>
       <p:sp>
         <p:nvSpPr>
-          <p:cNvPr id="27" name="Text 25"/>
-          <p:cNvSpPr/>
-          <p:nvPr/>
-        </p:nvSpPr>
-        <p:spPr>
-          <a:xfrm>
-            <a:off x="5943600" y="2212848"/>
+          <p:cNvPr id="30" name="Text 28"/>
+          <p:cNvSpPr/>
+          <p:nvPr/>
+        </p:nvSpPr>
+        <p:spPr>
+          <a:xfrm>
+            <a:off x="5943600" y="2670048"/>
             <a:ext cx="1463040" cy="420624"/>
           </a:xfrm>
           <a:prstGeom prst="rect">
@@ -38146,7 +38743,7 @@
                 <a:ea typeface="Trebuchet MS" pitchFamily="34" charset="-122"/>
                 <a:cs typeface="Trebuchet MS" pitchFamily="34" charset="-120"/>
               </a:rPr>
-              <a:t>-ty</a:t>
+              <a:t>-ness</a:t>
             </a:r>
             <a:endParaRPr lang="en-US" sz="1300" dirty="0"/>
           </a:p>
@@ -38154,20 +38751,20 @@
       </p:sp>
       <p:sp>
         <p:nvSpPr>
-          <p:cNvPr id="28" name="Shape 26"/>
-          <p:cNvSpPr/>
-          <p:nvPr/>
-        </p:nvSpPr>
-        <p:spPr>
-          <a:xfrm>
-            <a:off x="640080" y="2670048"/>
+          <p:cNvPr id="31" name="Shape 29"/>
+          <p:cNvSpPr/>
+          <p:nvPr/>
+        </p:nvSpPr>
+        <p:spPr>
+          <a:xfrm>
+            <a:off x="640080" y="3127248"/>
             <a:ext cx="1463040" cy="420624"/>
           </a:xfrm>
           <a:prstGeom prst="rect">
             <a:avLst/>
           </a:prstGeom>
           <a:solidFill>
-            <a:srgbClr val="DDD6FE"/>
+            <a:srgbClr val="F1F5F9"/>
           </a:solidFill>
           <a:ln w="12700">
             <a:solidFill>
@@ -38179,18 +38776,68 @@
       </p:sp>
       <p:sp>
         <p:nvSpPr>
-          <p:cNvPr id="29" name="Text 27"/>
-          <p:cNvSpPr/>
-          <p:nvPr/>
-        </p:nvSpPr>
-        <p:spPr>
-          <a:xfrm>
-            <a:off x="640080" y="2670048"/>
+          <p:cNvPr id="32" name="Shape 30"/>
+          <p:cNvSpPr/>
+          <p:nvPr/>
+        </p:nvSpPr>
+        <p:spPr>
+          <a:xfrm>
+            <a:off x="3291840" y="3127248"/>
+            <a:ext cx="1645920" cy="420624"/>
+          </a:xfrm>
+          <a:prstGeom prst="rect">
+            <a:avLst/>
+          </a:prstGeom>
+          <a:solidFill>
+            <a:srgbClr val="F1F5F9"/>
+          </a:solidFill>
+          <a:ln w="12700">
+            <a:solidFill>
+              <a:srgbClr val="E5E7EB"/>
+            </a:solidFill>
+            <a:prstDash val="solid"/>
+          </a:ln>
+        </p:spPr>
+      </p:sp>
+      <p:sp>
+        <p:nvSpPr>
+          <p:cNvPr id="33" name="Shape 31"/>
+          <p:cNvSpPr/>
+          <p:nvPr/>
+        </p:nvSpPr>
+        <p:spPr>
+          <a:xfrm>
+            <a:off x="5943600" y="3127248"/>
             <a:ext cx="1463040" cy="420624"/>
           </a:xfrm>
           <a:prstGeom prst="rect">
             <a:avLst/>
           </a:prstGeom>
+          <a:solidFill>
+            <a:srgbClr val="FCE7F3"/>
+          </a:solidFill>
+          <a:ln w="12700">
+            <a:solidFill>
+              <a:srgbClr val="E5E7EB"/>
+            </a:solidFill>
+            <a:prstDash val="solid"/>
+          </a:ln>
+        </p:spPr>
+      </p:sp>
+      <p:sp>
+        <p:nvSpPr>
+          <p:cNvPr id="34" name="Text 32"/>
+          <p:cNvSpPr/>
+          <p:nvPr/>
+        </p:nvSpPr>
+        <p:spPr>
+          <a:xfrm>
+            <a:off x="5943600" y="3127248"/>
+            <a:ext cx="1463040" cy="420624"/>
+          </a:xfrm>
+          <a:prstGeom prst="rect">
+            <a:avLst/>
+          </a:prstGeom>
           <a:noFill/>
           <a:ln/>
         </p:spPr>
@@ -38204,13 +38851,13 @@
             <a:r>
               <a:rPr lang="en-US" sz="1300" b="1" dirty="0">
                 <a:solidFill>
-                  <a:srgbClr val="4C1D95"/>
+                  <a:srgbClr val="9D174D"/>
                 </a:solidFill>
                 <a:latin typeface="Trebuchet MS" pitchFamily="34" charset="0"/>
                 <a:ea typeface="Trebuchet MS" pitchFamily="34" charset="-122"/>
                 <a:cs typeface="Trebuchet MS" pitchFamily="34" charset="-120"/>
               </a:rPr>
-              <a:t>fire-</a:t>
+              <a:t>-er</a:t>
             </a:r>
             <a:endParaRPr lang="en-US" sz="1300" dirty="0"/>
           </a:p>
@@ -38218,13 +38865,38 @@
       </p:sp>
       <p:sp>
         <p:nvSpPr>
-          <p:cNvPr id="30" name="Shape 28"/>
-          <p:cNvSpPr/>
-          <p:nvPr/>
-        </p:nvSpPr>
-        <p:spPr>
-          <a:xfrm>
-            <a:off x="3291840" y="2670048"/>
+          <p:cNvPr id="35" name="Shape 33"/>
+          <p:cNvSpPr/>
+          <p:nvPr/>
+        </p:nvSpPr>
+        <p:spPr>
+          <a:xfrm>
+            <a:off x="640080" y="3584448"/>
+            <a:ext cx="1463040" cy="420624"/>
+          </a:xfrm>
+          <a:prstGeom prst="rect">
+            <a:avLst/>
+          </a:prstGeom>
+          <a:solidFill>
+            <a:srgbClr val="F8FAFC"/>
+          </a:solidFill>
+          <a:ln w="12700">
+            <a:solidFill>
+              <a:srgbClr val="E5E7EB"/>
+            </a:solidFill>
+            <a:prstDash val="solid"/>
+          </a:ln>
+        </p:spPr>
+      </p:sp>
+      <p:sp>
+        <p:nvSpPr>
+          <p:cNvPr id="36" name="Shape 34"/>
+          <p:cNvSpPr/>
+          <p:nvPr/>
+        </p:nvSpPr>
+        <p:spPr>
+          <a:xfrm>
+            <a:off x="3291840" y="3584448"/>
             <a:ext cx="1645920" cy="420624"/>
           </a:xfrm>
           <a:prstGeom prst="rect">
@@ -38243,13 +38915,13 @@
       </p:sp>
       <p:sp>
         <p:nvSpPr>
-          <p:cNvPr id="31" name="Shape 29"/>
-          <p:cNvSpPr/>
-          <p:nvPr/>
-        </p:nvSpPr>
-        <p:spPr>
-          <a:xfrm>
-            <a:off x="5943600" y="2670048"/>
+          <p:cNvPr id="37" name="Shape 35"/>
+          <p:cNvSpPr/>
+          <p:nvPr/>
+        </p:nvSpPr>
+        <p:spPr>
+          <a:xfrm>
+            <a:off x="5943600" y="3584448"/>
             <a:ext cx="1463040" cy="420624"/>
           </a:xfrm>
           <a:prstGeom prst="rect">
@@ -38268,13 +38940,13 @@
       </p:sp>
       <p:sp>
         <p:nvSpPr>
-          <p:cNvPr id="32" name="Text 30"/>
-          <p:cNvSpPr/>
-          <p:nvPr/>
-        </p:nvSpPr>
-        <p:spPr>
-          <a:xfrm>
-            <a:off x="5943600" y="2670048"/>
+          <p:cNvPr id="38" name="Text 36"/>
+          <p:cNvSpPr/>
+          <p:nvPr/>
+        </p:nvSpPr>
+        <p:spPr>
+          <a:xfrm>
+            <a:off x="5943600" y="3584448"/>
             <a:ext cx="1463040" cy="420624"/>
           </a:xfrm>
           <a:prstGeom prst="rect">
@@ -38299,7 +38971,7 @@
                 <a:ea typeface="Trebuchet MS" pitchFamily="34" charset="-122"/>
                 <a:cs typeface="Trebuchet MS" pitchFamily="34" charset="-120"/>
               </a:rPr>
-              <a:t>-guard</a:t>
+              <a:t>-est</a:t>
             </a:r>
             <a:endParaRPr lang="en-US" sz="1300" dirty="0"/>
           </a:p>
@@ -38307,20 +38979,20 @@
       </p:sp>
       <p:sp>
         <p:nvSpPr>
-          <p:cNvPr id="33" name="Shape 31"/>
-          <p:cNvSpPr/>
-          <p:nvPr/>
-        </p:nvSpPr>
-        <p:spPr>
-          <a:xfrm>
-            <a:off x="640080" y="3127248"/>
+          <p:cNvPr id="39" name="Shape 37"/>
+          <p:cNvSpPr/>
+          <p:nvPr/>
+        </p:nvSpPr>
+        <p:spPr>
+          <a:xfrm>
+            <a:off x="640080" y="4041648"/>
             <a:ext cx="1463040" cy="420624"/>
           </a:xfrm>
           <a:prstGeom prst="rect">
             <a:avLst/>
           </a:prstGeom>
           <a:solidFill>
-            <a:srgbClr val="DDD6FE"/>
+            <a:srgbClr val="F1F5F9"/>
           </a:solidFill>
           <a:ln w="12700">
             <a:solidFill>
@@ -38332,18 +39004,68 @@
       </p:sp>
       <p:sp>
         <p:nvSpPr>
-          <p:cNvPr id="34" name="Text 32"/>
-          <p:cNvSpPr/>
-          <p:nvPr/>
-        </p:nvSpPr>
-        <p:spPr>
-          <a:xfrm>
-            <a:off x="640080" y="3127248"/>
+          <p:cNvPr id="40" name="Shape 38"/>
+          <p:cNvSpPr/>
+          <p:nvPr/>
+        </p:nvSpPr>
+        <p:spPr>
+          <a:xfrm>
+            <a:off x="3291840" y="4041648"/>
+            <a:ext cx="1645920" cy="420624"/>
+          </a:xfrm>
+          <a:prstGeom prst="rect">
+            <a:avLst/>
+          </a:prstGeom>
+          <a:solidFill>
+            <a:srgbClr val="F1F5F9"/>
+          </a:solidFill>
+          <a:ln w="12700">
+            <a:solidFill>
+              <a:srgbClr val="E5E7EB"/>
+            </a:solidFill>
+            <a:prstDash val="solid"/>
+          </a:ln>
+        </p:spPr>
+      </p:sp>
+      <p:sp>
+        <p:nvSpPr>
+          <p:cNvPr id="41" name="Shape 39"/>
+          <p:cNvSpPr/>
+          <p:nvPr/>
+        </p:nvSpPr>
+        <p:spPr>
+          <a:xfrm>
+            <a:off x="5943600" y="4041648"/>
             <a:ext cx="1463040" cy="420624"/>
           </a:xfrm>
           <a:prstGeom prst="rect">
             <a:avLst/>
           </a:prstGeom>
+          <a:solidFill>
+            <a:srgbClr val="FCE7F3"/>
+          </a:solidFill>
+          <a:ln w="12700">
+            <a:solidFill>
+              <a:srgbClr val="E5E7EB"/>
+            </a:solidFill>
+            <a:prstDash val="solid"/>
+          </a:ln>
+        </p:spPr>
+      </p:sp>
+      <p:sp>
+        <p:nvSpPr>
+          <p:cNvPr id="42" name="Text 40"/>
+          <p:cNvSpPr/>
+          <p:nvPr/>
+        </p:nvSpPr>
+        <p:spPr>
+          <a:xfrm>
+            <a:off x="5943600" y="4041648"/>
+            <a:ext cx="1463040" cy="420624"/>
+          </a:xfrm>
+          <a:prstGeom prst="rect">
+            <a:avLst/>
+          </a:prstGeom>
           <a:noFill/>
           <a:ln/>
         </p:spPr>
@@ -38357,13 +39079,13 @@
             <a:r>
               <a:rPr lang="en-US" sz="1300" b="1" dirty="0">
                 <a:solidFill>
-                  <a:srgbClr val="4C1D95"/>
+                  <a:srgbClr val="9D174D"/>
                 </a:solidFill>
                 <a:latin typeface="Trebuchet MS" pitchFamily="34" charset="0"/>
                 <a:ea typeface="Trebuchet MS" pitchFamily="34" charset="-122"/>
                 <a:cs typeface="Trebuchet MS" pitchFamily="34" charset="-120"/>
               </a:rPr>
-              <a:t>food-</a:t>
+              <a:t>-ty</a:t>
             </a:r>
             <a:endParaRPr lang="en-US" sz="1300" dirty="0"/>
           </a:p>
@@ -38371,255 +39093,13 @@
       </p:sp>
       <p:sp>
         <p:nvSpPr>
-          <p:cNvPr id="35" name="Shape 33"/>
-          <p:cNvSpPr/>
-          <p:nvPr/>
-        </p:nvSpPr>
-        <p:spPr>
-          <a:xfrm>
-            <a:off x="3291840" y="3127248"/>
-            <a:ext cx="1645920" cy="420624"/>
-          </a:xfrm>
-          <a:prstGeom prst="rect">
-            <a:avLst/>
-          </a:prstGeom>
-          <a:solidFill>
-            <a:srgbClr val="F1F5F9"/>
-          </a:solidFill>
-          <a:ln w="12700">
-            <a:solidFill>
-              <a:srgbClr val="E5E7EB"/>
-            </a:solidFill>
-            <a:prstDash val="solid"/>
-          </a:ln>
-        </p:spPr>
-      </p:sp>
-      <p:sp>
-        <p:nvSpPr>
-          <p:cNvPr id="36" name="Shape 34"/>
-          <p:cNvSpPr/>
-          <p:nvPr/>
-        </p:nvSpPr>
-        <p:spPr>
-          <a:xfrm>
-            <a:off x="5943600" y="3127248"/>
-            <a:ext cx="1463040" cy="420624"/>
-          </a:xfrm>
-          <a:prstGeom prst="rect">
-            <a:avLst/>
-          </a:prstGeom>
-          <a:solidFill>
-            <a:srgbClr val="FCE7F3"/>
-          </a:solidFill>
-          <a:ln w="12700">
-            <a:solidFill>
-              <a:srgbClr val="E5E7EB"/>
-            </a:solidFill>
-            <a:prstDash val="solid"/>
-          </a:ln>
-        </p:spPr>
-      </p:sp>
-      <p:sp>
-        <p:nvSpPr>
-          <p:cNvPr id="37" name="Text 35"/>
-          <p:cNvSpPr/>
-          <p:nvPr/>
-        </p:nvSpPr>
-        <p:spPr>
-          <a:xfrm>
-            <a:off x="5943600" y="3127248"/>
-            <a:ext cx="1463040" cy="420624"/>
-          </a:xfrm>
-          <a:prstGeom prst="rect">
-            <a:avLst/>
-          </a:prstGeom>
-          <a:noFill/>
-          <a:ln/>
-        </p:spPr>
-        <p:txBody>
-          <a:bodyPr wrap="square" lIns="0" tIns="0" rIns="0" bIns="0" rtlCol="0" anchor="ctr"/>
-          <a:lstStyle/>
-          <a:p>
-            <a:pPr algn="ctr" indent="0" marL="0">
-              <a:buNone/>
-            </a:pPr>
-            <a:r>
-              <a:rPr lang="en-US" sz="1300" b="1" dirty="0">
-                <a:solidFill>
-                  <a:srgbClr val="9D174D"/>
-                </a:solidFill>
-                <a:latin typeface="Trebuchet MS" pitchFamily="34" charset="0"/>
-                <a:ea typeface="Trebuchet MS" pitchFamily="34" charset="-122"/>
-                <a:cs typeface="Trebuchet MS" pitchFamily="34" charset="-120"/>
-              </a:rPr>
-              <a:t>-keep</a:t>
-            </a:r>
-            <a:endParaRPr lang="en-US" sz="1300" dirty="0"/>
-          </a:p>
-        </p:txBody>
-      </p:sp>
-      <p:sp>
-        <p:nvSpPr>
-          <p:cNvPr id="38" name="Shape 36"/>
-          <p:cNvSpPr/>
-          <p:nvPr/>
-        </p:nvSpPr>
-        <p:spPr>
-          <a:xfrm>
-            <a:off x="640080" y="3584448"/>
-            <a:ext cx="1463040" cy="420624"/>
-          </a:xfrm>
-          <a:prstGeom prst="rect">
-            <a:avLst/>
-          </a:prstGeom>
-          <a:solidFill>
-            <a:srgbClr val="DDD6FE"/>
-          </a:solidFill>
-          <a:ln w="12700">
-            <a:solidFill>
-              <a:srgbClr val="E5E7EB"/>
-            </a:solidFill>
-            <a:prstDash val="solid"/>
-          </a:ln>
-        </p:spPr>
-      </p:sp>
-      <p:sp>
-        <p:nvSpPr>
-          <p:cNvPr id="39" name="Text 37"/>
-          <p:cNvSpPr/>
-          <p:nvPr/>
-        </p:nvSpPr>
-        <p:spPr>
-          <a:xfrm>
-            <a:off x="640080" y="3584448"/>
-            <a:ext cx="1463040" cy="420624"/>
-          </a:xfrm>
-          <a:prstGeom prst="rect">
-            <a:avLst/>
-          </a:prstGeom>
-          <a:noFill/>
-          <a:ln/>
-        </p:spPr>
-        <p:txBody>
-          <a:bodyPr wrap="square" lIns="0" tIns="0" rIns="0" bIns="0" rtlCol="0" anchor="ctr"/>
-          <a:lstStyle/>
-          <a:p>
-            <a:pPr algn="ctr" indent="0" marL="0">
-              <a:buNone/>
-            </a:pPr>
-            <a:r>
-              <a:rPr lang="en-US" sz="1300" b="1" dirty="0">
-                <a:solidFill>
-                  <a:srgbClr val="4C1D95"/>
-                </a:solidFill>
-                <a:latin typeface="Trebuchet MS" pitchFamily="34" charset="0"/>
-                <a:ea typeface="Trebuchet MS" pitchFamily="34" charset="-122"/>
-                <a:cs typeface="Trebuchet MS" pitchFamily="34" charset="-120"/>
-              </a:rPr>
-              <a:t>child-</a:t>
-            </a:r>
-            <a:endParaRPr lang="en-US" sz="1300" dirty="0"/>
-          </a:p>
-        </p:txBody>
-      </p:sp>
-      <p:sp>
-        <p:nvSpPr>
-          <p:cNvPr id="40" name="Shape 38"/>
-          <p:cNvSpPr/>
-          <p:nvPr/>
-        </p:nvSpPr>
-        <p:spPr>
-          <a:xfrm>
-            <a:off x="3291840" y="3584448"/>
-            <a:ext cx="1645920" cy="420624"/>
-          </a:xfrm>
-          <a:prstGeom prst="rect">
-            <a:avLst/>
-          </a:prstGeom>
-          <a:solidFill>
-            <a:srgbClr val="F8FAFC"/>
-          </a:solidFill>
-          <a:ln w="12700">
-            <a:solidFill>
-              <a:srgbClr val="E5E7EB"/>
-            </a:solidFill>
-            <a:prstDash val="solid"/>
-          </a:ln>
-        </p:spPr>
-      </p:sp>
-      <p:sp>
-        <p:nvSpPr>
-          <p:cNvPr id="41" name="Shape 39"/>
-          <p:cNvSpPr/>
-          <p:nvPr/>
-        </p:nvSpPr>
-        <p:spPr>
-          <a:xfrm>
-            <a:off x="5943600" y="3584448"/>
-            <a:ext cx="1463040" cy="420624"/>
-          </a:xfrm>
-          <a:prstGeom prst="rect">
-            <a:avLst/>
-          </a:prstGeom>
-          <a:solidFill>
-            <a:srgbClr val="FCE7F3"/>
-          </a:solidFill>
-          <a:ln w="12700">
-            <a:solidFill>
-              <a:srgbClr val="E5E7EB"/>
-            </a:solidFill>
-            <a:prstDash val="solid"/>
-          </a:ln>
-        </p:spPr>
-      </p:sp>
-      <p:sp>
-        <p:nvSpPr>
-          <p:cNvPr id="42" name="Text 40"/>
-          <p:cNvSpPr/>
-          <p:nvPr/>
-        </p:nvSpPr>
-        <p:spPr>
-          <a:xfrm>
-            <a:off x="5943600" y="3584448"/>
-            <a:ext cx="1463040" cy="420624"/>
-          </a:xfrm>
-          <a:prstGeom prst="rect">
-            <a:avLst/>
-          </a:prstGeom>
-          <a:noFill/>
-          <a:ln/>
-        </p:spPr>
-        <p:txBody>
-          <a:bodyPr wrap="square" lIns="0" tIns="0" rIns="0" bIns="0" rtlCol="0" anchor="ctr"/>
-          <a:lstStyle/>
-          <a:p>
-            <a:pPr algn="ctr" indent="0" marL="0">
-              <a:buNone/>
-            </a:pPr>
-            <a:r>
-              <a:rPr lang="en-US" sz="1300" b="1" dirty="0">
-                <a:solidFill>
-                  <a:srgbClr val="9D174D"/>
-                </a:solidFill>
-                <a:latin typeface="Trebuchet MS" pitchFamily="34" charset="0"/>
-                <a:ea typeface="Trebuchet MS" pitchFamily="34" charset="-122"/>
-                <a:cs typeface="Trebuchet MS" pitchFamily="34" charset="-120"/>
-              </a:rPr>
-              <a:t>-r</a:t>
-            </a:r>
-            <a:endParaRPr lang="en-US" sz="1300" dirty="0"/>
-          </a:p>
-        </p:txBody>
-      </p:sp>
-      <p:sp>
-        <p:nvSpPr>
           <p:cNvPr id="43" name="Text 41"/>
           <p:cNvSpPr/>
           <p:nvPr/>
         </p:nvSpPr>
         <p:spPr>
           <a:xfrm>
-            <a:off x="365760" y="4178808"/>
+            <a:off x="365760" y="4636008"/>
             <a:ext cx="1097280" cy="420624"/>
           </a:xfrm>
           <a:prstGeom prst="rect">
@@ -38658,7 +39138,7 @@
         </p:nvSpPr>
         <p:spPr>
           <a:xfrm>
-            <a:off x="1508760" y="4178808"/>
+            <a:off x="1508760" y="4636008"/>
             <a:ext cx="822960" cy="420624"/>
           </a:xfrm>
           <a:prstGeom prst="rect">
@@ -38692,7 +39172,7 @@
         </p:nvSpPr>
         <p:spPr>
           <a:xfrm>
-            <a:off x="1508760" y="4178808"/>
+            <a:off x="1508760" y="4636008"/>
             <a:ext cx="822960" cy="420624"/>
           </a:xfrm>
           <a:prstGeom prst="rect">
@@ -38731,7 +39211,7 @@
         </p:nvSpPr>
         <p:spPr>
           <a:xfrm>
-            <a:off x="2359152" y="4178808"/>
+            <a:off x="2359152" y="4636008"/>
             <a:ext cx="320040" cy="420624"/>
           </a:xfrm>
           <a:prstGeom prst="rect">
@@ -38770,7 +39250,7 @@
         </p:nvSpPr>
         <p:spPr>
           <a:xfrm>
-            <a:off x="2706624" y="4178808"/>
+            <a:off x="2706624" y="4636008"/>
             <a:ext cx="1243584" cy="420624"/>
           </a:xfrm>
           <a:prstGeom prst="rect">
@@ -38804,7 +39284,7 @@
         </p:nvSpPr>
         <p:spPr>
           <a:xfrm>
-            <a:off x="2706624" y="4178808"/>
+            <a:off x="2706624" y="4636008"/>
             <a:ext cx="1243584" cy="420624"/>
           </a:xfrm>
           <a:prstGeom prst="rect">
@@ -38843,7 +39323,7 @@
         </p:nvSpPr>
         <p:spPr>
           <a:xfrm>
-            <a:off x="3977640" y="4178808"/>
+            <a:off x="3977640" y="4636008"/>
             <a:ext cx="320040" cy="420624"/>
           </a:xfrm>
           <a:prstGeom prst="rect">
@@ -38882,8 +39362,8 @@
         </p:nvSpPr>
         <p:spPr>
           <a:xfrm>
-            <a:off x="4325112" y="4178808"/>
-            <a:ext cx="822960" cy="420624"/>
+            <a:off x="4325112" y="4636008"/>
+            <a:ext cx="950976" cy="420624"/>
           </a:xfrm>
           <a:prstGeom prst="rect">
             <a:avLst>
@@ -38916,8 +39396,8 @@
         </p:nvSpPr>
         <p:spPr>
           <a:xfrm>
-            <a:off x="4325112" y="4178808"/>
-            <a:ext cx="822960" cy="420624"/>
+            <a:off x="4325112" y="4636008"/>
+            <a:ext cx="950976" cy="420624"/>
           </a:xfrm>
           <a:prstGeom prst="rect">
             <a:avLst/>
@@ -38941,7 +39421,7 @@
                 <a:ea typeface="Trebuchet MS" pitchFamily="34" charset="-122"/>
                 <a:cs typeface="Trebuchet MS" pitchFamily="34" charset="-120"/>
               </a:rPr>
-              <a:t>-ly</a:t>
+              <a:t>-ary</a:t>
             </a:r>
             <a:endParaRPr lang="en-US" sz="1300" dirty="0"/>
           </a:p>
@@ -38955,7 +39435,7 @@
         </p:nvSpPr>
         <p:spPr>
           <a:xfrm>
-            <a:off x="5221224" y="4178808"/>
+            <a:off x="5349240" y="4636008"/>
             <a:ext cx="365760" cy="420624"/>
           </a:xfrm>
           <a:prstGeom prst="rect">
@@ -38994,7 +39474,7 @@
         </p:nvSpPr>
         <p:spPr>
           <a:xfrm>
-            <a:off x="5632704" y="4178808"/>
+            <a:off x="5760720" y="4636008"/>
             <a:ext cx="2194560" cy="420624"/>
           </a:xfrm>
           <a:prstGeom prst="rect">
@@ -39021,7 +39501,7 @@
         </p:nvSpPr>
         <p:spPr>
           <a:xfrm>
-            <a:off x="5632704" y="4178808"/>
+            <a:off x="5760720" y="4636008"/>
             <a:ext cx="2194560" cy="420624"/>
           </a:xfrm>
           <a:prstGeom prst="rect">
@@ -39046,7 +39526,7 @@
                 <a:ea typeface="Trebuchet MS" pitchFamily="34" charset="-122"/>
                 <a:cs typeface="Trebuchet MS" pitchFamily="34" charset="-120"/>
               </a:rPr>
-              <a:t>safely</a:t>
+              <a:t>safe</a:t>
             </a:r>
             <a:endParaRPr lang="en-US" sz="1400" dirty="0"/>
           </a:p>
@@ -39338,7 +39818,7 @@
                 <a:ea typeface="Calibri" pitchFamily="34" charset="-122"/>
                 <a:cs typeface="Calibri" pitchFamily="34" charset="-120"/>
               </a:rPr>
-              <a:t>Word Labs  •  wordlabs.app  •  Root: 'safe' = free from harm or danger</a:t>
+              <a:t>Word Labs  •  wordlabs.app  •  Root: 'safe' = free from danger</a:t>
             </a:r>
             <a:endParaRPr lang="en-US" sz="800" dirty="0"/>
           </a:p>
@@ -39450,7 +39930,7 @@
                 <a:ea typeface="Trebuchet MS" pitchFamily="34" charset="-122"/>
                 <a:cs typeface="Trebuchet MS" pitchFamily="34" charset="-120"/>
               </a:rPr>
-              <a:t>safely</a:t>
+              <a:t>safe</a:t>
             </a:r>
             <a:endParaRPr lang="en-US" sz="1200" dirty="0"/>
           </a:p>
@@ -39516,7 +39996,7 @@
                 <a:ea typeface="Calibri" pitchFamily="34" charset="-122"/>
                 <a:cs typeface="Calibri" pitchFamily="34" charset="-120"/>
               </a:rPr>
-              <a:t>To make something safe again after it has become dangerous.</a:t>
+              <a:t>less dangerous than something else</a:t>
             </a:r>
             <a:endParaRPr lang="en-US" sz="1200" dirty="0"/>
           </a:p>
@@ -39589,7 +40069,7 @@
                 <a:ea typeface="Trebuchet MS" pitchFamily="34" charset="-122"/>
                 <a:cs typeface="Trebuchet MS" pitchFamily="34" charset="-120"/>
               </a:rPr>
-              <a:t>safety</a:t>
+              <a:t>safer</a:t>
             </a:r>
             <a:endParaRPr lang="en-US" sz="1200" dirty="0"/>
           </a:p>
@@ -39655,7 +40135,7 @@
                 <a:ea typeface="Calibri" pitchFamily="34" charset="-122"/>
                 <a:cs typeface="Calibri" pitchFamily="34" charset="-120"/>
               </a:rPr>
-              <a:t>A person who looks after something valuable to keep it protected.</a:t>
+              <a:t>in a way that avoids danger or harm</a:t>
             </a:r>
             <a:endParaRPr lang="en-US" sz="1200" dirty="0"/>
           </a:p>
@@ -39728,7 +40208,7 @@
                 <a:ea typeface="Trebuchet MS" pitchFamily="34" charset="-122"/>
                 <a:cs typeface="Trebuchet MS" pitchFamily="34" charset="-120"/>
               </a:rPr>
-              <a:t>safeguard</a:t>
+              <a:t>safely</a:t>
             </a:r>
             <a:endParaRPr lang="en-US" sz="1200" dirty="0"/>
           </a:p>
@@ -39794,7 +40274,7 @@
                 <a:ea typeface="Calibri" pitchFamily="34" charset="-122"/>
                 <a:cs typeface="Calibri" pitchFamily="34" charset="-120"/>
               </a:rPr>
-              <a:t>Something that is dangerous or could cause harm.</a:t>
+              <a:t>the least dangerous</a:t>
             </a:r>
             <a:endParaRPr lang="en-US" sz="1200" dirty="0"/>
           </a:p>
@@ -39867,7 +40347,7 @@
                 <a:ea typeface="Trebuchet MS" pitchFamily="34" charset="-122"/>
                 <a:cs typeface="Trebuchet MS" pitchFamily="34" charset="-120"/>
               </a:rPr>
-              <a:t>unsafe</a:t>
+              <a:t>safest</a:t>
             </a:r>
             <a:endParaRPr lang="en-US" sz="1200" dirty="0"/>
           </a:p>
@@ -39933,424 +40413,7 @@
                 <a:ea typeface="Calibri" pitchFamily="34" charset="-122"/>
                 <a:cs typeface="Calibri" pitchFamily="34" charset="-120"/>
               </a:rPr>
-              <a:t>The most protected from danger out of a group of options.</a:t>
-            </a:r>
-            <a:endParaRPr lang="en-US" sz="1200" dirty="0"/>
-          </a:p>
-        </p:txBody>
-      </p:sp>
-      <p:sp>
-        <p:nvSpPr>
-          <p:cNvPr id="27" name="Shape 25"/>
-          <p:cNvSpPr/>
-          <p:nvPr/>
-        </p:nvSpPr>
-        <p:spPr>
-          <a:xfrm>
-            <a:off x="365760" y="3310128"/>
-            <a:ext cx="2011680" cy="457200"/>
-          </a:xfrm>
-          <a:prstGeom prst="rect">
-            <a:avLst>
-              <a:gd name="adj" fmla="val 12000"/>
-            </a:avLst>
-          </a:prstGeom>
-          <a:solidFill>
-            <a:srgbClr val="EEF2FF"/>
-          </a:solidFill>
-          <a:ln w="12700">
-            <a:solidFill>
-              <a:srgbClr val="6366F1"/>
-            </a:solidFill>
-            <a:prstDash val="solid"/>
-          </a:ln>
-          <a:effectLst>
-            <a:outerShdw sx="100000" sy="100000" kx="0" ky="0" algn="bl" rotWithShape="0" blurRad="101600" dist="38100" dir="8100000">
-              <a:srgbClr val="000000">
-                <a:alpha val="12000"/>
-              </a:srgbClr>
-            </a:outerShdw>
-          </a:effectLst>
-        </p:spPr>
-      </p:sp>
-      <p:sp>
-        <p:nvSpPr>
-          <p:cNvPr id="28" name="Text 26"/>
-          <p:cNvSpPr/>
-          <p:nvPr/>
-        </p:nvSpPr>
-        <p:spPr>
-          <a:xfrm>
-            <a:off x="365760" y="3310128"/>
-            <a:ext cx="2011680" cy="457200"/>
-          </a:xfrm>
-          <a:prstGeom prst="rect">
-            <a:avLst/>
-          </a:prstGeom>
-          <a:noFill/>
-          <a:ln/>
-        </p:spPr>
-        <p:txBody>
-          <a:bodyPr wrap="square" lIns="0" tIns="0" rIns="0" bIns="0" rtlCol="0" anchor="ctr"/>
-          <a:lstStyle/>
-          <a:p>
-            <a:pPr algn="ctr" indent="0" marL="0">
-              <a:buNone/>
-            </a:pPr>
-            <a:r>
-              <a:rPr lang="en-US" sz="1200" b="1" dirty="0">
-                <a:solidFill>
-                  <a:srgbClr val="4338CA"/>
-                </a:solidFill>
-                <a:latin typeface="Trebuchet MS" pitchFamily="34" charset="0"/>
-                <a:ea typeface="Trebuchet MS" pitchFamily="34" charset="-122"/>
-                <a:cs typeface="Trebuchet MS" pitchFamily="34" charset="-120"/>
-              </a:rPr>
-              <a:t>safekeeper</a:t>
-            </a:r>
-            <a:endParaRPr lang="en-US" sz="1200" dirty="0"/>
-          </a:p>
-        </p:txBody>
-      </p:sp>
-      <p:sp>
-        <p:nvSpPr>
-          <p:cNvPr id="29" name="Shape 27"/>
-          <p:cNvSpPr/>
-          <p:nvPr/>
-        </p:nvSpPr>
-        <p:spPr>
-          <a:xfrm>
-            <a:off x="2514600" y="3310128"/>
-            <a:ext cx="6263640" cy="457200"/>
-          </a:xfrm>
-          <a:prstGeom prst="rect">
-            <a:avLst>
-              <a:gd name="adj" fmla="val 12000"/>
-            </a:avLst>
-          </a:prstGeom>
-          <a:solidFill>
-            <a:srgbClr val="F8FAFC"/>
-          </a:solidFill>
-          <a:ln w="12700">
-            <a:solidFill>
-              <a:srgbClr val="E2E8F0"/>
-            </a:solidFill>
-            <a:prstDash val="solid"/>
-          </a:ln>
-        </p:spPr>
-      </p:sp>
-      <p:sp>
-        <p:nvSpPr>
-          <p:cNvPr id="30" name="Text 28"/>
-          <p:cNvSpPr/>
-          <p:nvPr/>
-        </p:nvSpPr>
-        <p:spPr>
-          <a:xfrm>
-            <a:off x="2651760" y="3310128"/>
-            <a:ext cx="6035040" cy="457200"/>
-          </a:xfrm>
-          <a:prstGeom prst="rect">
-            <a:avLst/>
-          </a:prstGeom>
-          <a:noFill/>
-          <a:ln/>
-        </p:spPr>
-        <p:txBody>
-          <a:bodyPr wrap="square" rtlCol="0" anchor="ctr"/>
-          <a:lstStyle/>
-          <a:p>
-            <a:pPr algn="l" indent="0" marL="0">
-              <a:buNone/>
-            </a:pPr>
-            <a:r>
-              <a:rPr lang="en-US" sz="1200" dirty="0">
-                <a:solidFill>
-                  <a:srgbClr val="0F172A"/>
-                </a:solidFill>
-                <a:latin typeface="Calibri" pitchFamily="34" charset="0"/>
-                <a:ea typeface="Calibri" pitchFamily="34" charset="-122"/>
-                <a:cs typeface="Calibri" pitchFamily="34" charset="-120"/>
-              </a:rPr>
-              <a:t>Something that protects you or keeps you safe from harm.</a:t>
-            </a:r>
-            <a:endParaRPr lang="en-US" sz="1200" dirty="0"/>
-          </a:p>
-        </p:txBody>
-      </p:sp>
-      <p:sp>
-        <p:nvSpPr>
-          <p:cNvPr id="31" name="Shape 29"/>
-          <p:cNvSpPr/>
-          <p:nvPr/>
-        </p:nvSpPr>
-        <p:spPr>
-          <a:xfrm>
-            <a:off x="365760" y="3840480"/>
-            <a:ext cx="2011680" cy="457200"/>
-          </a:xfrm>
-          <a:prstGeom prst="rect">
-            <a:avLst>
-              <a:gd name="adj" fmla="val 12000"/>
-            </a:avLst>
-          </a:prstGeom>
-          <a:solidFill>
-            <a:srgbClr val="EEF2FF"/>
-          </a:solidFill>
-          <a:ln w="12700">
-            <a:solidFill>
-              <a:srgbClr val="6366F1"/>
-            </a:solidFill>
-            <a:prstDash val="solid"/>
-          </a:ln>
-          <a:effectLst>
-            <a:outerShdw sx="100000" sy="100000" kx="0" ky="0" algn="bl" rotWithShape="0" blurRad="101600" dist="38100" dir="8100000">
-              <a:srgbClr val="000000">
-                <a:alpha val="12000"/>
-              </a:srgbClr>
-            </a:outerShdw>
-          </a:effectLst>
-        </p:spPr>
-      </p:sp>
-      <p:sp>
-        <p:nvSpPr>
-          <p:cNvPr id="32" name="Text 30"/>
-          <p:cNvSpPr/>
-          <p:nvPr/>
-        </p:nvSpPr>
-        <p:spPr>
-          <a:xfrm>
-            <a:off x="365760" y="3840480"/>
-            <a:ext cx="2011680" cy="457200"/>
-          </a:xfrm>
-          <a:prstGeom prst="rect">
-            <a:avLst/>
-          </a:prstGeom>
-          <a:noFill/>
-          <a:ln/>
-        </p:spPr>
-        <p:txBody>
-          <a:bodyPr wrap="square" lIns="0" tIns="0" rIns="0" bIns="0" rtlCol="0" anchor="ctr"/>
-          <a:lstStyle/>
-          <a:p>
-            <a:pPr algn="ctr" indent="0" marL="0">
-              <a:buNone/>
-            </a:pPr>
-            <a:r>
-              <a:rPr lang="en-US" sz="1200" b="1" dirty="0">
-                <a:solidFill>
-                  <a:srgbClr val="4338CA"/>
-                </a:solidFill>
-                <a:latin typeface="Trebuchet MS" pitchFamily="34" charset="0"/>
-                <a:ea typeface="Trebuchet MS" pitchFamily="34" charset="-122"/>
-                <a:cs typeface="Trebuchet MS" pitchFamily="34" charset="-120"/>
-              </a:rPr>
-              <a:t>safest</a:t>
-            </a:r>
-            <a:endParaRPr lang="en-US" sz="1200" dirty="0"/>
-          </a:p>
-        </p:txBody>
-      </p:sp>
-      <p:sp>
-        <p:nvSpPr>
-          <p:cNvPr id="33" name="Shape 31"/>
-          <p:cNvSpPr/>
-          <p:nvPr/>
-        </p:nvSpPr>
-        <p:spPr>
-          <a:xfrm>
-            <a:off x="2514600" y="3840480"/>
-            <a:ext cx="6263640" cy="457200"/>
-          </a:xfrm>
-          <a:prstGeom prst="rect">
-            <a:avLst>
-              <a:gd name="adj" fmla="val 12000"/>
-            </a:avLst>
-          </a:prstGeom>
-          <a:solidFill>
-            <a:srgbClr val="F8FAFC"/>
-          </a:solidFill>
-          <a:ln w="12700">
-            <a:solidFill>
-              <a:srgbClr val="E2E8F0"/>
-            </a:solidFill>
-            <a:prstDash val="solid"/>
-          </a:ln>
-        </p:spPr>
-      </p:sp>
-      <p:sp>
-        <p:nvSpPr>
-          <p:cNvPr id="34" name="Text 32"/>
-          <p:cNvSpPr/>
-          <p:nvPr/>
-        </p:nvSpPr>
-        <p:spPr>
-          <a:xfrm>
-            <a:off x="2651760" y="3840480"/>
-            <a:ext cx="6035040" cy="457200"/>
-          </a:xfrm>
-          <a:prstGeom prst="rect">
-            <a:avLst/>
-          </a:prstGeom>
-          <a:noFill/>
-          <a:ln/>
-        </p:spPr>
-        <p:txBody>
-          <a:bodyPr wrap="square" rtlCol="0" anchor="ctr"/>
-          <a:lstStyle/>
-          <a:p>
-            <a:pPr algn="l" indent="0" marL="0">
-              <a:buNone/>
-            </a:pPr>
-            <a:r>
-              <a:rPr lang="en-US" sz="1200" dirty="0">
-                <a:solidFill>
-                  <a:srgbClr val="0F172A"/>
-                </a:solidFill>
-                <a:latin typeface="Calibri" pitchFamily="34" charset="0"/>
-                <a:ea typeface="Calibri" pitchFamily="34" charset="-122"/>
-                <a:cs typeface="Calibri" pitchFamily="34" charset="-120"/>
-              </a:rPr>
-              <a:t>Doing something without getting hurt or in danger.</a:t>
-            </a:r>
-            <a:endParaRPr lang="en-US" sz="1200" dirty="0"/>
-          </a:p>
-        </p:txBody>
-      </p:sp>
-      <p:sp>
-        <p:nvSpPr>
-          <p:cNvPr id="35" name="Shape 33"/>
-          <p:cNvSpPr/>
-          <p:nvPr/>
-        </p:nvSpPr>
-        <p:spPr>
-          <a:xfrm>
-            <a:off x="365760" y="4370832"/>
-            <a:ext cx="2011680" cy="457200"/>
-          </a:xfrm>
-          <a:prstGeom prst="rect">
-            <a:avLst>
-              <a:gd name="adj" fmla="val 12000"/>
-            </a:avLst>
-          </a:prstGeom>
-          <a:solidFill>
-            <a:srgbClr val="EEF2FF"/>
-          </a:solidFill>
-          <a:ln w="12700">
-            <a:solidFill>
-              <a:srgbClr val="6366F1"/>
-            </a:solidFill>
-            <a:prstDash val="solid"/>
-          </a:ln>
-          <a:effectLst>
-            <a:outerShdw sx="100000" sy="100000" kx="0" ky="0" algn="bl" rotWithShape="0" blurRad="101600" dist="38100" dir="8100000">
-              <a:srgbClr val="000000">
-                <a:alpha val="12000"/>
-              </a:srgbClr>
-            </a:outerShdw>
-          </a:effectLst>
-        </p:spPr>
-      </p:sp>
-      <p:sp>
-        <p:nvSpPr>
-          <p:cNvPr id="36" name="Text 34"/>
-          <p:cNvSpPr/>
-          <p:nvPr/>
-        </p:nvSpPr>
-        <p:spPr>
-          <a:xfrm>
-            <a:off x="365760" y="4370832"/>
-            <a:ext cx="2011680" cy="457200"/>
-          </a:xfrm>
-          <a:prstGeom prst="rect">
-            <a:avLst/>
-          </a:prstGeom>
-          <a:noFill/>
-          <a:ln/>
-        </p:spPr>
-        <p:txBody>
-          <a:bodyPr wrap="square" lIns="0" tIns="0" rIns="0" bIns="0" rtlCol="0" anchor="ctr"/>
-          <a:lstStyle/>
-          <a:p>
-            <a:pPr algn="ctr" indent="0" marL="0">
-              <a:buNone/>
-            </a:pPr>
-            <a:r>
-              <a:rPr lang="en-US" sz="1200" b="1" dirty="0">
-                <a:solidFill>
-                  <a:srgbClr val="4338CA"/>
-                </a:solidFill>
-                <a:latin typeface="Trebuchet MS" pitchFamily="34" charset="0"/>
-                <a:ea typeface="Trebuchet MS" pitchFamily="34" charset="-122"/>
-                <a:cs typeface="Trebuchet MS" pitchFamily="34" charset="-120"/>
-              </a:rPr>
-              <a:t>resafe</a:t>
-            </a:r>
-            <a:endParaRPr lang="en-US" sz="1200" dirty="0"/>
-          </a:p>
-        </p:txBody>
-      </p:sp>
-      <p:sp>
-        <p:nvSpPr>
-          <p:cNvPr id="37" name="Shape 35"/>
-          <p:cNvSpPr/>
-          <p:nvPr/>
-        </p:nvSpPr>
-        <p:spPr>
-          <a:xfrm>
-            <a:off x="2514600" y="4370832"/>
-            <a:ext cx="6263640" cy="457200"/>
-          </a:xfrm>
-          <a:prstGeom prst="rect">
-            <a:avLst>
-              <a:gd name="adj" fmla="val 12000"/>
-            </a:avLst>
-          </a:prstGeom>
-          <a:solidFill>
-            <a:srgbClr val="F8FAFC"/>
-          </a:solidFill>
-          <a:ln w="12700">
-            <a:solidFill>
-              <a:srgbClr val="E2E8F0"/>
-            </a:solidFill>
-            <a:prstDash val="solid"/>
-          </a:ln>
-        </p:spPr>
-      </p:sp>
-      <p:sp>
-        <p:nvSpPr>
-          <p:cNvPr id="38" name="Text 36"/>
-          <p:cNvSpPr/>
-          <p:nvPr/>
-        </p:nvSpPr>
-        <p:spPr>
-          <a:xfrm>
-            <a:off x="2651760" y="4370832"/>
-            <a:ext cx="6035040" cy="457200"/>
-          </a:xfrm>
-          <a:prstGeom prst="rect">
-            <a:avLst/>
-          </a:prstGeom>
-          <a:noFill/>
-          <a:ln/>
-        </p:spPr>
-        <p:txBody>
-          <a:bodyPr wrap="square" rtlCol="0" anchor="ctr"/>
-          <a:lstStyle/>
-          <a:p>
-            <a:pPr algn="l" indent="0" marL="0">
-              <a:buNone/>
-            </a:pPr>
-            <a:r>
-              <a:rPr lang="en-US" sz="1200" dirty="0">
-                <a:solidFill>
-                  <a:srgbClr val="0F172A"/>
-                </a:solidFill>
-                <a:latin typeface="Calibri" pitchFamily="34" charset="0"/>
-                <a:ea typeface="Calibri" pitchFamily="34" charset="-122"/>
-                <a:cs typeface="Calibri" pitchFamily="34" charset="-120"/>
-              </a:rPr>
-              <a:t>The state of being protected from harm or danger.</a:t>
+              <a:t>protected from danger or harm</a:t>
             </a:r>
             <a:endParaRPr lang="en-US" sz="1200" dirty="0"/>
           </a:p>
@@ -40642,7 +40705,7 @@
                 <a:ea typeface="Calibri" pitchFamily="34" charset="-122"/>
                 <a:cs typeface="Calibri" pitchFamily="34" charset="-120"/>
               </a:rPr>
-              <a:t>Word Labs  •  wordlabs.app  •  Root: 'safe' = free from harm or danger</a:t>
+              <a:t>Word Labs  •  wordlabs.app  •  Root: 'safe' = free from danger</a:t>
             </a:r>
             <a:endParaRPr lang="en-US" sz="800" dirty="0"/>
           </a:p>
@@ -40845,7 +40908,7 @@
                 <a:ea typeface="Calibri" pitchFamily="34" charset="-122"/>
                 <a:cs typeface="Calibri" pitchFamily="34" charset="-120"/>
               </a:rPr>
-              <a:t>Always cross the road safely by using the pedestrian crossing and looking both ways.</a:t>
+              <a:t>Wear a helmet to stay safe while cycling.</a:t>
             </a:r>
             <a:endParaRPr lang="en-US" sz="1500" dirty="0"/>
           </a:p>
@@ -41009,7 +41072,7 @@
                 <a:ea typeface="Calibri" pitchFamily="34" charset="-122"/>
                 <a:cs typeface="Calibri" pitchFamily="34" charset="-120"/>
               </a:rPr>
-              <a:t>The lifeguard's job is to safeguard swimmers at the beach during the summer holidays.</a:t>
+              <a:t>Wearing a seatbelt makes a car journey safer.</a:t>
             </a:r>
             <a:endParaRPr lang="en-US" sz="1500" dirty="0"/>
           </a:p>
@@ -41173,7 +41236,7 @@
                 <a:ea typeface="Calibri" pitchFamily="34" charset="-122"/>
                 <a:cs typeface="Calibri" pitchFamily="34" charset="-120"/>
               </a:rPr>
-              <a:t>Wearing a helmet is an important safety rule when riding your bike.</a:t>
+              <a:t>Please cross the road safely by looking both ways.</a:t>
             </a:r>
             <a:endParaRPr lang="en-US" sz="1500" dirty="0"/>
           </a:p>
